--- a/Документы/Защита_Парамонова_АС.pptx
+++ b/Документы/Защита_Парамонова_АС.pptx
@@ -4,6 +4,9 @@
   <p:sldMasterIdLst>
     <p:sldMasterId id="2147483648" r:id="rId1"/>
   </p:sldMasterIdLst>
+  <p:notesMasterIdLst>
+    <p:notesMasterId r:id="rId16"/>
+  </p:notesMasterIdLst>
   <p:sldIdLst>
     <p:sldId id="266" r:id="rId2"/>
     <p:sldId id="256" r:id="rId3"/>
@@ -12,16 +15,13 @@
     <p:sldId id="280" r:id="rId6"/>
     <p:sldId id="267" r:id="rId7"/>
     <p:sldId id="269" r:id="rId8"/>
-    <p:sldId id="281" r:id="rId9"/>
-    <p:sldId id="284" r:id="rId10"/>
+    <p:sldId id="292" r:id="rId9"/>
+    <p:sldId id="293" r:id="rId10"/>
     <p:sldId id="291" r:id="rId11"/>
-    <p:sldId id="286" r:id="rId12"/>
-    <p:sldId id="290" r:id="rId13"/>
-    <p:sldId id="289" r:id="rId14"/>
-    <p:sldId id="288" r:id="rId15"/>
-    <p:sldId id="287" r:id="rId16"/>
-    <p:sldId id="285" r:id="rId17"/>
-    <p:sldId id="258" r:id="rId18"/>
+    <p:sldId id="281" r:id="rId12"/>
+    <p:sldId id="284" r:id="rId13"/>
+    <p:sldId id="286" r:id="rId14"/>
+    <p:sldId id="258" r:id="rId15"/>
   </p:sldIdLst>
   <p:sldSz cx="12192000" cy="6858000"/>
   <p:notesSz cx="6858000" cy="9144000"/>
@@ -120,6 +120,11 @@
       </a:defRPr>
     </a:lvl9pPr>
   </p:defaultTextStyle>
+  <p:extLst>
+    <p:ext uri="{EFAFB233-063F-42B5-8137-9DF3F51BA10A}">
+      <p15:sldGuideLst xmlns:p15="http://schemas.microsoft.com/office/powerpoint/2012/main"/>
+    </p:ext>
+  </p:extLst>
 </p:presentation>
 </file>
 
@@ -1699,7 +1704,7 @@
         <a:lstStyle/>
         <a:p>
           <a:r>
-            <a:rPr lang="ru-RU" sz="1400" dirty="0"/>
+            <a:rPr lang="ru-RU" sz="2000" dirty="0"/>
             <a:t>Проанализировать предметную область</a:t>
           </a:r>
         </a:p>
@@ -1735,8 +1740,8 @@
         <a:lstStyle/>
         <a:p>
           <a:r>
-            <a:rPr lang="ru-RU" sz="1400" dirty="0"/>
-            <a:t>Осуществить интеграцию данных</a:t>
+            <a:rPr lang="ru-RU" sz="2000" dirty="0"/>
+            <a:t>Провести сравнительный анализ аналогов</a:t>
           </a:r>
         </a:p>
       </dgm:t>
@@ -1771,8 +1776,16 @@
         <a:lstStyle/>
         <a:p>
           <a:r>
-            <a:rPr lang="ru-RU" sz="1400" dirty="0"/>
-            <a:t>Разработать модель данных и БД</a:t>
+            <a:rPr lang="ru-RU" sz="2000" dirty="0"/>
+            <a:t>Разработать модель и хранилище</a:t>
+          </a:r>
+          <a:r>
+            <a:rPr lang="en-US" sz="2000" dirty="0"/>
+            <a:t> </a:t>
+          </a:r>
+          <a:r>
+            <a:rPr lang="ru-RU" sz="2000" dirty="0"/>
+            <a:t>данных</a:t>
           </a:r>
         </a:p>
       </dgm:t>
@@ -1807,8 +1820,8 @@
         <a:lstStyle/>
         <a:p>
           <a:r>
-            <a:rPr lang="ru-RU" sz="1400" dirty="0"/>
-            <a:t>Создать аналитический модуль</a:t>
+            <a:rPr lang="ru-RU" sz="2000" dirty="0"/>
+            <a:t>Реализовать серверную часть системы</a:t>
           </a:r>
         </a:p>
       </dgm:t>
@@ -1843,8 +1856,8 @@
         <a:lstStyle/>
         <a:p>
           <a:r>
-            <a:rPr lang="ru-RU" sz="1400" dirty="0"/>
-            <a:t>Реализовать веб-интерфейс для доступа к витрине данных</a:t>
+            <a:rPr lang="ru-RU" sz="2000" dirty="0"/>
+            <a:t>Реализовать клиентскую часть системы</a:t>
           </a:r>
         </a:p>
       </dgm:t>
@@ -1879,8 +1892,8 @@
         <a:lstStyle/>
         <a:p>
           <a:r>
-            <a:rPr lang="ru-RU" sz="1400" dirty="0"/>
-            <a:t>Обеспечить безопасность и разграничение ролей</a:t>
+            <a:rPr lang="ru-RU" sz="2000" dirty="0"/>
+            <a:t>Разработать требования к проектируемой системе</a:t>
           </a:r>
         </a:p>
       </dgm:t>
@@ -1917,7 +1930,7 @@
       <dgm:spPr/>
     </dgm:pt>
     <dgm:pt modelId="{652E9560-0117-4043-974B-C9F69C426233}" type="pres">
-      <dgm:prSet presAssocID="{DA917CD9-02F1-477D-B2E9-CDF0C662B495}" presName="node" presStyleLbl="node1" presStyleIdx="0" presStyleCnt="6">
+      <dgm:prSet presAssocID="{DA917CD9-02F1-477D-B2E9-CDF0C662B495}" presName="node" presStyleLbl="node1" presStyleIdx="0" presStyleCnt="6" custScaleX="237224">
         <dgm:presLayoutVars>
           <dgm:bulletEnabled val="1"/>
         </dgm:presLayoutVars>
@@ -1933,7 +1946,7 @@
       <dgm:spPr/>
     </dgm:pt>
     <dgm:pt modelId="{8A10F62B-6276-445F-A6DB-4BEC776E9A9E}" type="pres">
-      <dgm:prSet presAssocID="{0B7D3728-01E8-4FB7-98DD-6D8A59D056D7}" presName="node" presStyleLbl="node1" presStyleIdx="1" presStyleCnt="6">
+      <dgm:prSet presAssocID="{0B7D3728-01E8-4FB7-98DD-6D8A59D056D7}" presName="node" presStyleLbl="node1" presStyleIdx="1" presStyleCnt="6" custScaleX="237224">
         <dgm:presLayoutVars>
           <dgm:bulletEnabled val="1"/>
         </dgm:presLayoutVars>
@@ -1949,7 +1962,7 @@
       <dgm:spPr/>
     </dgm:pt>
     <dgm:pt modelId="{9BE2BF78-BECE-408F-84D4-58A336A16375}" type="pres">
-      <dgm:prSet presAssocID="{9591DBB7-341F-48CF-B0A6-85E76EECA625}" presName="node" presStyleLbl="node1" presStyleIdx="2" presStyleCnt="6">
+      <dgm:prSet presAssocID="{9591DBB7-341F-48CF-B0A6-85E76EECA625}" presName="node" presStyleLbl="node1" presStyleIdx="2" presStyleCnt="6" custScaleX="237224">
         <dgm:presLayoutVars>
           <dgm:bulletEnabled val="1"/>
         </dgm:presLayoutVars>
@@ -1965,7 +1978,7 @@
       <dgm:spPr/>
     </dgm:pt>
     <dgm:pt modelId="{3E5E2562-CE40-4B2C-BB79-969ADBDFBAF8}" type="pres">
-      <dgm:prSet presAssocID="{346B0B5E-50E0-4C90-A71A-F3BF3709046E}" presName="node" presStyleLbl="node1" presStyleIdx="3" presStyleCnt="6">
+      <dgm:prSet presAssocID="{346B0B5E-50E0-4C90-A71A-F3BF3709046E}" presName="node" presStyleLbl="node1" presStyleIdx="3" presStyleCnt="6" custScaleX="237224">
         <dgm:presLayoutVars>
           <dgm:bulletEnabled val="1"/>
         </dgm:presLayoutVars>
@@ -1981,7 +1994,7 @@
       <dgm:spPr/>
     </dgm:pt>
     <dgm:pt modelId="{316F8855-8484-4C8F-AEE5-4DFF77993B10}" type="pres">
-      <dgm:prSet presAssocID="{C7F6CF83-957E-49E6-9FB9-544D9F3D07D6}" presName="node" presStyleLbl="node1" presStyleIdx="4" presStyleCnt="6">
+      <dgm:prSet presAssocID="{C7F6CF83-957E-49E6-9FB9-544D9F3D07D6}" presName="node" presStyleLbl="node1" presStyleIdx="4" presStyleCnt="6" custScaleX="237224">
         <dgm:presLayoutVars>
           <dgm:bulletEnabled val="1"/>
         </dgm:presLayoutVars>
@@ -1997,7 +2010,7 @@
       <dgm:spPr/>
     </dgm:pt>
     <dgm:pt modelId="{2344379F-636E-45BB-81B1-FB76B718FC22}" type="pres">
-      <dgm:prSet presAssocID="{73E299CC-99E5-4E0F-9A17-3CED8AB9E063}" presName="node" presStyleLbl="node1" presStyleIdx="5" presStyleCnt="6">
+      <dgm:prSet presAssocID="{73E299CC-99E5-4E0F-9A17-3CED8AB9E063}" presName="node" presStyleLbl="node1" presStyleIdx="5" presStyleCnt="6" custScaleX="237224">
         <dgm:presLayoutVars>
           <dgm:bulletEnabled val="1"/>
         </dgm:presLayoutVars>
@@ -2097,9 +2110,9 @@
         <a:p>
           <a:r>
             <a:rPr lang="ru-RU" sz="2400" b="1" i="0" dirty="0"/>
-            <a:t>Аналитик / Технолог</a:t>
+            <a:t>Производство</a:t>
           </a:r>
-          <a:endParaRPr lang="ru-RU" sz="2400" dirty="0"/>
+          <a:endParaRPr lang="ru-RU" sz="2400" b="1" dirty="0"/>
         </a:p>
       </dgm:t>
     </dgm:pt>
@@ -2126,17 +2139,34 @@
       </dgm:t>
     </dgm:pt>
     <dgm:pt modelId="{3678B069-F54C-475F-8EBD-EDEB722EB4D8}">
-      <dgm:prSet custT="1"/>
+      <dgm:prSet custT="1">
+        <dgm:style>
+          <a:lnRef idx="2">
+            <a:schemeClr val="accent2">
+              <a:shade val="50000"/>
+            </a:schemeClr>
+          </a:lnRef>
+          <a:fillRef idx="1">
+            <a:schemeClr val="accent2"/>
+          </a:fillRef>
+          <a:effectRef idx="0">
+            <a:schemeClr val="accent2"/>
+          </a:effectRef>
+          <a:fontRef idx="minor">
+            <a:schemeClr val="lt1"/>
+          </a:fontRef>
+        </dgm:style>
+      </dgm:prSet>
       <dgm:spPr/>
       <dgm:t>
         <a:bodyPr/>
         <a:lstStyle/>
         <a:p>
           <a:r>
-            <a:rPr lang="ru-RU" sz="2400" b="0" i="0" dirty="0"/>
-            <a:t>Оперативный анализ, работа с детальными отчетами</a:t>
+            <a:rPr lang="ru-RU" sz="2400" b="1" i="0" dirty="0"/>
+            <a:t>Руководство</a:t>
           </a:r>
-          <a:endParaRPr lang="ru-RU" sz="2400" dirty="0"/>
+          <a:endParaRPr lang="ru-RU" sz="2400" b="1" dirty="0"/>
         </a:p>
       </dgm:t>
     </dgm:pt>
@@ -2166,16 +2196,18 @@
       <dgm:prSet custT="1">
         <dgm:style>
           <a:lnRef idx="2">
-            <a:schemeClr val="accent2"/>
+            <a:schemeClr val="accent2">
+              <a:shade val="50000"/>
+            </a:schemeClr>
           </a:lnRef>
           <a:fillRef idx="1">
-            <a:schemeClr val="lt1"/>
+            <a:schemeClr val="accent2"/>
           </a:fillRef>
           <a:effectRef idx="0">
             <a:schemeClr val="accent2"/>
           </a:effectRef>
           <a:fontRef idx="minor">
-            <a:schemeClr val="dk1"/>
+            <a:schemeClr val="lt1"/>
           </a:fontRef>
         </dgm:style>
       </dgm:prSet>
@@ -2186,9 +2218,9 @@
         <a:p>
           <a:r>
             <a:rPr lang="ru-RU" sz="2400" b="1" i="0" dirty="0"/>
-            <a:t>Руководитель / Служба качества</a:t>
+            <a:t>Лаборатория</a:t>
           </a:r>
-          <a:endParaRPr lang="ru-RU" sz="2400" dirty="0"/>
+          <a:endParaRPr lang="ru-RU" sz="2400" b="1" dirty="0"/>
         </a:p>
       </dgm:t>
     </dgm:pt>
@@ -2215,43 +2247,6 @@
       </dgm:t>
     </dgm:pt>
     <dgm:pt modelId="{072F76DC-CAFD-4F29-8F4F-CB4B95DB6532}">
-      <dgm:prSet custT="1"/>
-      <dgm:spPr/>
-      <dgm:t>
-        <a:bodyPr/>
-        <a:lstStyle/>
-        <a:p>
-          <a:r>
-            <a:rPr lang="ru-RU" sz="2400" b="0" i="0" dirty="0"/>
-            <a:t>Стратегический мониторинг по KPI, принятие управленческих решений</a:t>
-          </a:r>
-          <a:endParaRPr lang="ru-RU" sz="2400" dirty="0"/>
-        </a:p>
-      </dgm:t>
-    </dgm:pt>
-    <dgm:pt modelId="{023577E4-E00C-4303-A6E5-34F4FBFCA199}" type="parTrans" cxnId="{8E8543D3-C8D6-4043-B26D-2F13E04AC193}">
-      <dgm:prSet/>
-      <dgm:spPr/>
-      <dgm:t>
-        <a:bodyPr/>
-        <a:lstStyle/>
-        <a:p>
-          <a:endParaRPr lang="ru-RU"/>
-        </a:p>
-      </dgm:t>
-    </dgm:pt>
-    <dgm:pt modelId="{64C3A829-48BF-447E-9D01-CE56940CD906}" type="sibTrans" cxnId="{8E8543D3-C8D6-4043-B26D-2F13E04AC193}">
-      <dgm:prSet/>
-      <dgm:spPr/>
-      <dgm:t>
-        <a:bodyPr/>
-        <a:lstStyle/>
-        <a:p>
-          <a:endParaRPr lang="ru-RU"/>
-        </a:p>
-      </dgm:t>
-    </dgm:pt>
-    <dgm:pt modelId="{44FFD2C9-2A18-4622-B0DA-E41B4CF627C0}">
       <dgm:prSet custT="1">
         <dgm:style>
           <a:lnRef idx="2">
@@ -2277,11 +2272,11 @@
             <a:rPr lang="ru-RU" sz="2400" b="1" i="0" dirty="0"/>
             <a:t>Администратор</a:t>
           </a:r>
-          <a:endParaRPr lang="ru-RU" sz="2400" dirty="0"/>
+          <a:endParaRPr lang="ru-RU" sz="2400" b="1" dirty="0"/>
         </a:p>
       </dgm:t>
     </dgm:pt>
-    <dgm:pt modelId="{070E893C-D4CA-4A6F-B3B0-D01086A47A81}" type="parTrans" cxnId="{0B12E14F-735D-4EC8-B766-CD2AE7F51407}">
+    <dgm:pt modelId="{023577E4-E00C-4303-A6E5-34F4FBFCA199}" type="parTrans" cxnId="{8E8543D3-C8D6-4043-B26D-2F13E04AC193}">
       <dgm:prSet/>
       <dgm:spPr/>
       <dgm:t>
@@ -2292,44 +2287,7 @@
         </a:p>
       </dgm:t>
     </dgm:pt>
-    <dgm:pt modelId="{2BE6882A-F298-443F-8D95-B5081E83F3AA}" type="sibTrans" cxnId="{0B12E14F-735D-4EC8-B766-CD2AE7F51407}">
-      <dgm:prSet/>
-      <dgm:spPr/>
-      <dgm:t>
-        <a:bodyPr/>
-        <a:lstStyle/>
-        <a:p>
-          <a:endParaRPr lang="ru-RU"/>
-        </a:p>
-      </dgm:t>
-    </dgm:pt>
-    <dgm:pt modelId="{DE834EBC-8E7D-40B0-95A9-BFA96D1F6E79}">
-      <dgm:prSet custT="1"/>
-      <dgm:spPr/>
-      <dgm:t>
-        <a:bodyPr/>
-        <a:lstStyle/>
-        <a:p>
-          <a:r>
-            <a:rPr lang="ru-RU" sz="2400" b="0" i="0" dirty="0"/>
-            <a:t>Обеспечение бесперебойной работы, интеграция и безопасность</a:t>
-          </a:r>
-          <a:endParaRPr lang="ru-RU" sz="2400" dirty="0"/>
-        </a:p>
-      </dgm:t>
-    </dgm:pt>
-    <dgm:pt modelId="{C4B4929C-3862-4441-A762-540F8ACB8504}" type="parTrans" cxnId="{A898F681-CADA-4825-9D52-FB45A56E69DE}">
-      <dgm:prSet/>
-      <dgm:spPr/>
-      <dgm:t>
-        <a:bodyPr/>
-        <a:lstStyle/>
-        <a:p>
-          <a:endParaRPr lang="ru-RU"/>
-        </a:p>
-      </dgm:t>
-    </dgm:pt>
-    <dgm:pt modelId="{0132442A-BB17-4124-80FE-266A8D6C7B49}" type="sibTrans" cxnId="{A898F681-CADA-4825-9D52-FB45A56E69DE}">
+    <dgm:pt modelId="{64C3A829-48BF-447E-9D01-CE56940CD906}" type="sibTrans" cxnId="{8E8543D3-C8D6-4043-B26D-2F13E04AC193}">
       <dgm:prSet/>
       <dgm:spPr/>
       <dgm:t>
@@ -2357,7 +2315,7 @@
       <dgm:spPr/>
     </dgm:pt>
     <dgm:pt modelId="{0FB1D82C-C840-49FD-8F32-5C5A2EBBC687}" type="pres">
-      <dgm:prSet presAssocID="{BE4E43B2-8DC0-427F-92AB-C2CDDFE68145}" presName="txOne" presStyleLbl="node0" presStyleIdx="0" presStyleCnt="3">
+      <dgm:prSet presAssocID="{BE4E43B2-8DC0-427F-92AB-C2CDDFE68145}" presName="txOne" presStyleLbl="node0" presStyleIdx="0" presStyleCnt="2">
         <dgm:presLayoutVars>
           <dgm:chPref val="3"/>
         </dgm:presLayoutVars>
@@ -2377,7 +2335,7 @@
       <dgm:spPr/>
     </dgm:pt>
     <dgm:pt modelId="{D4A332A9-899E-41F7-AF5A-CCE7711F381D}" type="pres">
-      <dgm:prSet presAssocID="{3678B069-F54C-475F-8EBD-EDEB722EB4D8}" presName="txTwo" presStyleLbl="node2" presStyleIdx="0" presStyleCnt="3">
+      <dgm:prSet presAssocID="{3678B069-F54C-475F-8EBD-EDEB722EB4D8}" presName="txTwo" presStyleLbl="node2" presStyleIdx="0" presStyleCnt="2">
         <dgm:presLayoutVars>
           <dgm:chPref val="3"/>
         </dgm:presLayoutVars>
@@ -2397,7 +2355,7 @@
       <dgm:spPr/>
     </dgm:pt>
     <dgm:pt modelId="{CC2BF28F-EFAE-4170-9767-2009CB8328D0}" type="pres">
-      <dgm:prSet presAssocID="{590DD966-38A6-491C-A71A-E05BAE613DF2}" presName="txOne" presStyleLbl="node0" presStyleIdx="1" presStyleCnt="3">
+      <dgm:prSet presAssocID="{590DD966-38A6-491C-A71A-E05BAE613DF2}" presName="txOne" presStyleLbl="node0" presStyleIdx="1" presStyleCnt="2">
         <dgm:presLayoutVars>
           <dgm:chPref val="3"/>
         </dgm:presLayoutVars>
@@ -2417,7 +2375,7 @@
       <dgm:spPr/>
     </dgm:pt>
     <dgm:pt modelId="{5EDA0103-5948-45DF-8C56-C8AF94623D0D}" type="pres">
-      <dgm:prSet presAssocID="{072F76DC-CAFD-4F29-8F4F-CB4B95DB6532}" presName="txTwo" presStyleLbl="node2" presStyleIdx="1" presStyleCnt="3">
+      <dgm:prSet presAssocID="{072F76DC-CAFD-4F29-8F4F-CB4B95DB6532}" presName="txTwo" presStyleLbl="node2" presStyleIdx="1" presStyleCnt="2">
         <dgm:presLayoutVars>
           <dgm:chPref val="3"/>
         </dgm:presLayoutVars>
@@ -2428,46 +2386,6 @@
       <dgm:prSet presAssocID="{072F76DC-CAFD-4F29-8F4F-CB4B95DB6532}" presName="horzTwo" presStyleCnt="0"/>
       <dgm:spPr/>
     </dgm:pt>
-    <dgm:pt modelId="{223D5D36-3F71-4000-B33E-7736708B1C32}" type="pres">
-      <dgm:prSet presAssocID="{A3B18BF8-CEAF-4550-BB88-BBA5CF89724E}" presName="sibSpaceOne" presStyleCnt="0"/>
-      <dgm:spPr/>
-    </dgm:pt>
-    <dgm:pt modelId="{95D34B89-9D9C-4B07-95A0-ACD08F8DCD8B}" type="pres">
-      <dgm:prSet presAssocID="{44FFD2C9-2A18-4622-B0DA-E41B4CF627C0}" presName="vertOne" presStyleCnt="0"/>
-      <dgm:spPr/>
-    </dgm:pt>
-    <dgm:pt modelId="{0844B3D3-24C1-4FD8-A223-B4A928E4AEE4}" type="pres">
-      <dgm:prSet presAssocID="{44FFD2C9-2A18-4622-B0DA-E41B4CF627C0}" presName="txOne" presStyleLbl="node0" presStyleIdx="2" presStyleCnt="3">
-        <dgm:presLayoutVars>
-          <dgm:chPref val="3"/>
-        </dgm:presLayoutVars>
-      </dgm:prSet>
-      <dgm:spPr/>
-    </dgm:pt>
-    <dgm:pt modelId="{462EE591-AC1E-4903-9A85-B29080473909}" type="pres">
-      <dgm:prSet presAssocID="{44FFD2C9-2A18-4622-B0DA-E41B4CF627C0}" presName="parTransOne" presStyleCnt="0"/>
-      <dgm:spPr/>
-    </dgm:pt>
-    <dgm:pt modelId="{BADD351F-9F42-4E00-994F-A993FF45A168}" type="pres">
-      <dgm:prSet presAssocID="{44FFD2C9-2A18-4622-B0DA-E41B4CF627C0}" presName="horzOne" presStyleCnt="0"/>
-      <dgm:spPr/>
-    </dgm:pt>
-    <dgm:pt modelId="{1E0FFA2D-7638-4C88-8E91-049564EEEB60}" type="pres">
-      <dgm:prSet presAssocID="{DE834EBC-8E7D-40B0-95A9-BFA96D1F6E79}" presName="vertTwo" presStyleCnt="0"/>
-      <dgm:spPr/>
-    </dgm:pt>
-    <dgm:pt modelId="{A33D0A27-344F-4419-B3B4-7AFBBEA93174}" type="pres">
-      <dgm:prSet presAssocID="{DE834EBC-8E7D-40B0-95A9-BFA96D1F6E79}" presName="txTwo" presStyleLbl="node2" presStyleIdx="2" presStyleCnt="3">
-        <dgm:presLayoutVars>
-          <dgm:chPref val="3"/>
-        </dgm:presLayoutVars>
-      </dgm:prSet>
-      <dgm:spPr/>
-    </dgm:pt>
-    <dgm:pt modelId="{A3FC8B7C-A3F7-4C4F-9B9F-CDBC3B12410D}" type="pres">
-      <dgm:prSet presAssocID="{DE834EBC-8E7D-40B0-95A9-BFA96D1F6E79}" presName="horzTwo" presStyleCnt="0"/>
-      <dgm:spPr/>
-    </dgm:pt>
   </dgm:ptLst>
   <dgm:cxnLst>
     <dgm:cxn modelId="{19DB3B09-4804-405B-B747-EE78B3DDB303}" type="presOf" srcId="{7C37C33D-8CE0-4413-A5B3-515208507422}" destId="{DF2FD805-26EE-4B6E-8AFE-1E3656F6CE24}" srcOrd="0" destOrd="0" presId="urn:microsoft.com/office/officeart/2005/8/layout/hierarchy4"/>
@@ -2475,13 +2393,9 @@
     <dgm:cxn modelId="{9B30D628-61D2-4D3C-B712-7814ED77C087}" type="presOf" srcId="{590DD966-38A6-491C-A71A-E05BAE613DF2}" destId="{CC2BF28F-EFAE-4170-9767-2009CB8328D0}" srcOrd="0" destOrd="0" presId="urn:microsoft.com/office/officeart/2005/8/layout/hierarchy4"/>
     <dgm:cxn modelId="{4EB7C144-B16D-4438-AD39-9DDE1666FC67}" srcId="{7C37C33D-8CE0-4413-A5B3-515208507422}" destId="{590DD966-38A6-491C-A71A-E05BAE613DF2}" srcOrd="1" destOrd="0" parTransId="{E4154F7B-75C7-4F42-9871-7F0B70728B1E}" sibTransId="{A3B18BF8-CEAF-4550-BB88-BBA5CF89724E}"/>
     <dgm:cxn modelId="{84363A46-AF45-4A1E-AD34-0A353AFB7CBD}" srcId="{7C37C33D-8CE0-4413-A5B3-515208507422}" destId="{BE4E43B2-8DC0-427F-92AB-C2CDDFE68145}" srcOrd="0" destOrd="0" parTransId="{ED446963-2E0C-47FA-92A6-CFB11BE8B0E1}" sibTransId="{FDC7D449-9E3C-47FA-919D-CD9957D9E653}"/>
-    <dgm:cxn modelId="{0B12E14F-735D-4EC8-B766-CD2AE7F51407}" srcId="{7C37C33D-8CE0-4413-A5B3-515208507422}" destId="{44FFD2C9-2A18-4622-B0DA-E41B4CF627C0}" srcOrd="2" destOrd="0" parTransId="{070E893C-D4CA-4A6F-B3B0-D01086A47A81}" sibTransId="{2BE6882A-F298-443F-8D95-B5081E83F3AA}"/>
-    <dgm:cxn modelId="{A898F681-CADA-4825-9D52-FB45A56E69DE}" srcId="{44FFD2C9-2A18-4622-B0DA-E41B4CF627C0}" destId="{DE834EBC-8E7D-40B0-95A9-BFA96D1F6E79}" srcOrd="0" destOrd="0" parTransId="{C4B4929C-3862-4441-A762-540F8ACB8504}" sibTransId="{0132442A-BB17-4124-80FE-266A8D6C7B49}"/>
     <dgm:cxn modelId="{30ADBECB-49F0-4348-BB0C-1FA5645B489F}" type="presOf" srcId="{072F76DC-CAFD-4F29-8F4F-CB4B95DB6532}" destId="{5EDA0103-5948-45DF-8C56-C8AF94623D0D}" srcOrd="0" destOrd="0" presId="urn:microsoft.com/office/officeart/2005/8/layout/hierarchy4"/>
     <dgm:cxn modelId="{8E8543D3-C8D6-4043-B26D-2F13E04AC193}" srcId="{590DD966-38A6-491C-A71A-E05BAE613DF2}" destId="{072F76DC-CAFD-4F29-8F4F-CB4B95DB6532}" srcOrd="0" destOrd="0" parTransId="{023577E4-E00C-4303-A6E5-34F4FBFCA199}" sibTransId="{64C3A829-48BF-447E-9D01-CE56940CD906}"/>
     <dgm:cxn modelId="{7CA31BEA-9766-42B3-9EEF-D378D6E0B17D}" srcId="{BE4E43B2-8DC0-427F-92AB-C2CDDFE68145}" destId="{3678B069-F54C-475F-8EBD-EDEB722EB4D8}" srcOrd="0" destOrd="0" parTransId="{BA6ADD4B-242C-4147-881E-EA3BE84912CF}" sibTransId="{CCA8CA70-247E-4942-BD46-B7D064F07CAC}"/>
-    <dgm:cxn modelId="{14443AED-A0DF-4C6F-910C-F0C559BA7E1A}" type="presOf" srcId="{DE834EBC-8E7D-40B0-95A9-BFA96D1F6E79}" destId="{A33D0A27-344F-4419-B3B4-7AFBBEA93174}" srcOrd="0" destOrd="0" presId="urn:microsoft.com/office/officeart/2005/8/layout/hierarchy4"/>
-    <dgm:cxn modelId="{FF9116F7-8CAC-4970-AE4E-387354817086}" type="presOf" srcId="{44FFD2C9-2A18-4622-B0DA-E41B4CF627C0}" destId="{0844B3D3-24C1-4FD8-A223-B4A928E4AEE4}" srcOrd="0" destOrd="0" presId="urn:microsoft.com/office/officeart/2005/8/layout/hierarchy4"/>
     <dgm:cxn modelId="{ADBA3AF7-6ABB-42E6-BDCF-734DF1B9DC01}" type="presOf" srcId="{BE4E43B2-8DC0-427F-92AB-C2CDDFE68145}" destId="{0FB1D82C-C840-49FD-8F32-5C5A2EBBC687}" srcOrd="0" destOrd="0" presId="urn:microsoft.com/office/officeart/2005/8/layout/hierarchy4"/>
     <dgm:cxn modelId="{FE925598-61B7-4DDD-BAF4-EB51FEC2D6AD}" type="presParOf" srcId="{DF2FD805-26EE-4B6E-8AFE-1E3656F6CE24}" destId="{09B4E5E5-9D3B-4110-BAEE-A52E51549A44}" srcOrd="0" destOrd="0" presId="urn:microsoft.com/office/officeart/2005/8/layout/hierarchy4"/>
     <dgm:cxn modelId="{5DE105BD-7F1D-4302-BD98-0B9EBF1624A7}" type="presParOf" srcId="{09B4E5E5-9D3B-4110-BAEE-A52E51549A44}" destId="{0FB1D82C-C840-49FD-8F32-5C5A2EBBC687}" srcOrd="0" destOrd="0" presId="urn:microsoft.com/office/officeart/2005/8/layout/hierarchy4"/>
@@ -2498,14 +2412,6 @@
     <dgm:cxn modelId="{146AB6F3-2BE9-4E99-B7F0-B1A75C7CE901}" type="presParOf" srcId="{D9464890-27C5-480F-95AE-EB2F7B1E77DA}" destId="{2B77BBEE-8769-491E-BA16-1BDF50E7D074}" srcOrd="0" destOrd="0" presId="urn:microsoft.com/office/officeart/2005/8/layout/hierarchy4"/>
     <dgm:cxn modelId="{E9223B4F-05A0-4FB9-8D86-0F791D6D0B8C}" type="presParOf" srcId="{2B77BBEE-8769-491E-BA16-1BDF50E7D074}" destId="{5EDA0103-5948-45DF-8C56-C8AF94623D0D}" srcOrd="0" destOrd="0" presId="urn:microsoft.com/office/officeart/2005/8/layout/hierarchy4"/>
     <dgm:cxn modelId="{8884D13C-CBBC-4A43-AAD1-2078C9E5AFA7}" type="presParOf" srcId="{2B77BBEE-8769-491E-BA16-1BDF50E7D074}" destId="{E8E859A8-3C4C-400A-8D18-A2E411B06407}" srcOrd="1" destOrd="0" presId="urn:microsoft.com/office/officeart/2005/8/layout/hierarchy4"/>
-    <dgm:cxn modelId="{02486A35-2ABF-4DFD-9C5D-3717344D8301}" type="presParOf" srcId="{DF2FD805-26EE-4B6E-8AFE-1E3656F6CE24}" destId="{223D5D36-3F71-4000-B33E-7736708B1C32}" srcOrd="3" destOrd="0" presId="urn:microsoft.com/office/officeart/2005/8/layout/hierarchy4"/>
-    <dgm:cxn modelId="{39F04445-5466-4179-B55E-CC21E826A9DD}" type="presParOf" srcId="{DF2FD805-26EE-4B6E-8AFE-1E3656F6CE24}" destId="{95D34B89-9D9C-4B07-95A0-ACD08F8DCD8B}" srcOrd="4" destOrd="0" presId="urn:microsoft.com/office/officeart/2005/8/layout/hierarchy4"/>
-    <dgm:cxn modelId="{3C19BD31-BDF0-40E5-A4DC-0DA02A2C5E7F}" type="presParOf" srcId="{95D34B89-9D9C-4B07-95A0-ACD08F8DCD8B}" destId="{0844B3D3-24C1-4FD8-A223-B4A928E4AEE4}" srcOrd="0" destOrd="0" presId="urn:microsoft.com/office/officeart/2005/8/layout/hierarchy4"/>
-    <dgm:cxn modelId="{5A8D5279-F206-400A-9DB0-FA70545AF85D}" type="presParOf" srcId="{95D34B89-9D9C-4B07-95A0-ACD08F8DCD8B}" destId="{462EE591-AC1E-4903-9A85-B29080473909}" srcOrd="1" destOrd="0" presId="urn:microsoft.com/office/officeart/2005/8/layout/hierarchy4"/>
-    <dgm:cxn modelId="{7EBC81B5-40F3-4ED6-BD96-2ED5DB34B279}" type="presParOf" srcId="{95D34B89-9D9C-4B07-95A0-ACD08F8DCD8B}" destId="{BADD351F-9F42-4E00-994F-A993FF45A168}" srcOrd="2" destOrd="0" presId="urn:microsoft.com/office/officeart/2005/8/layout/hierarchy4"/>
-    <dgm:cxn modelId="{2C9163AD-0D55-4839-93C9-8E478EB5441C}" type="presParOf" srcId="{BADD351F-9F42-4E00-994F-A993FF45A168}" destId="{1E0FFA2D-7638-4C88-8E91-049564EEEB60}" srcOrd="0" destOrd="0" presId="urn:microsoft.com/office/officeart/2005/8/layout/hierarchy4"/>
-    <dgm:cxn modelId="{FE270DAA-2787-444F-99A0-8D5B5B8A2FB4}" type="presParOf" srcId="{1E0FFA2D-7638-4C88-8E91-049564EEEB60}" destId="{A33D0A27-344F-4419-B3B4-7AFBBEA93174}" srcOrd="0" destOrd="0" presId="urn:microsoft.com/office/officeart/2005/8/layout/hierarchy4"/>
-    <dgm:cxn modelId="{5C06ADF2-2824-4978-8146-676E25AA8AC2}" type="presParOf" srcId="{1E0FFA2D-7638-4C88-8E91-049564EEEB60}" destId="{A3FC8B7C-A3F7-4C4F-9B9F-CDBC3B12410D}" srcOrd="1" destOrd="0" presId="urn:microsoft.com/office/officeart/2005/8/layout/hierarchy4"/>
   </dgm:cxnLst>
   <dgm:bg/>
   <dgm:whole/>
@@ -2532,8 +2438,8 @@
       </dsp:nvSpPr>
       <dsp:spPr>
         <a:xfrm>
-          <a:off x="45891" y="812"/>
-          <a:ext cx="2164610" cy="1298766"/>
+          <a:off x="3922" y="519593"/>
+          <a:ext cx="3148641" cy="796371"/>
         </a:xfrm>
         <a:prstGeom prst="roundRect">
           <a:avLst>
@@ -2578,12 +2484,12 @@
         </a:fontRef>
       </dsp:style>
       <dsp:txBody>
-        <a:bodyPr spcFirstLastPara="0" vert="horz" wrap="square" lIns="53340" tIns="53340" rIns="53340" bIns="53340" numCol="1" spcCol="1270" anchor="ctr" anchorCtr="0">
+        <a:bodyPr spcFirstLastPara="0" vert="horz" wrap="square" lIns="76200" tIns="76200" rIns="76200" bIns="76200" numCol="1" spcCol="1270" anchor="ctr" anchorCtr="0">
           <a:noAutofit/>
         </a:bodyPr>
         <a:lstStyle/>
         <a:p>
-          <a:pPr marL="0" lvl="0" indent="0" algn="ctr" defTabSz="622300">
+          <a:pPr marL="0" lvl="0" indent="0" algn="ctr" defTabSz="889000">
             <a:lnSpc>
               <a:spcPct val="90000"/>
             </a:lnSpc>
@@ -2596,14 +2502,14 @@
             <a:buNone/>
           </a:pPr>
           <a:r>
-            <a:rPr lang="ru-RU" sz="1400" kern="1200" dirty="0"/>
+            <a:rPr lang="ru-RU" sz="2000" kern="1200" dirty="0"/>
             <a:t>Проанализировать предметную область</a:t>
           </a:r>
         </a:p>
       </dsp:txBody>
       <dsp:txXfrm>
-        <a:off x="83931" y="38852"/>
-        <a:ext cx="2088530" cy="1222686"/>
+        <a:off x="27247" y="542918"/>
+        <a:ext cx="3101991" cy="749721"/>
       </dsp:txXfrm>
     </dsp:sp>
     <dsp:sp modelId="{2BD29B13-C108-421F-AFBC-4A130F02D553}">
@@ -2613,8 +2519,8 @@
       </dsp:nvSpPr>
       <dsp:spPr>
         <a:xfrm>
-          <a:off x="2400987" y="381784"/>
-          <a:ext cx="458897" cy="536823"/>
+          <a:off x="3269365" y="753196"/>
+          <a:ext cx="281384" cy="329167"/>
         </a:xfrm>
         <a:prstGeom prst="rightArrow">
           <a:avLst>
@@ -2672,8 +2578,8 @@
         </a:p>
       </dsp:txBody>
       <dsp:txXfrm>
-        <a:off x="2400987" y="489149"/>
-        <a:ext cx="321228" cy="322093"/>
+        <a:off x="3269365" y="819029"/>
+        <a:ext cx="196969" cy="197501"/>
       </dsp:txXfrm>
     </dsp:sp>
     <dsp:sp modelId="{8A10F62B-6276-445F-A6DB-4BEC776E9A9E}">
@@ -2683,8 +2589,8 @@
       </dsp:nvSpPr>
       <dsp:spPr>
         <a:xfrm>
-          <a:off x="3076345" y="812"/>
-          <a:ext cx="2164610" cy="1298766"/>
+          <a:off x="3683478" y="519593"/>
+          <a:ext cx="3148641" cy="796371"/>
         </a:xfrm>
         <a:prstGeom prst="roundRect">
           <a:avLst>
@@ -2729,12 +2635,12 @@
         </a:fontRef>
       </dsp:style>
       <dsp:txBody>
-        <a:bodyPr spcFirstLastPara="0" vert="horz" wrap="square" lIns="53340" tIns="53340" rIns="53340" bIns="53340" numCol="1" spcCol="1270" anchor="ctr" anchorCtr="0">
+        <a:bodyPr spcFirstLastPara="0" vert="horz" wrap="square" lIns="76200" tIns="76200" rIns="76200" bIns="76200" numCol="1" spcCol="1270" anchor="ctr" anchorCtr="0">
           <a:noAutofit/>
         </a:bodyPr>
         <a:lstStyle/>
         <a:p>
-          <a:pPr marL="0" lvl="0" indent="0" algn="ctr" defTabSz="622300">
+          <a:pPr marL="0" lvl="0" indent="0" algn="ctr" defTabSz="889000">
             <a:lnSpc>
               <a:spcPct val="90000"/>
             </a:lnSpc>
@@ -2747,14 +2653,14 @@
             <a:buNone/>
           </a:pPr>
           <a:r>
-            <a:rPr lang="ru-RU" sz="1400" kern="1200" dirty="0"/>
-            <a:t>Осуществить интеграцию данных</a:t>
+            <a:rPr lang="ru-RU" sz="2000" kern="1200" dirty="0"/>
+            <a:t>Провести сравнительный анализ аналогов</a:t>
           </a:r>
         </a:p>
       </dsp:txBody>
       <dsp:txXfrm>
-        <a:off x="3114385" y="38852"/>
-        <a:ext cx="2088530" cy="1222686"/>
+        <a:off x="3706803" y="542918"/>
+        <a:ext cx="3101991" cy="749721"/>
       </dsp:txXfrm>
     </dsp:sp>
     <dsp:sp modelId="{C013587D-532B-4EE8-8F0B-8DDA12E879DC}">
@@ -2764,8 +2670,8 @@
       </dsp:nvSpPr>
       <dsp:spPr>
         <a:xfrm>
-          <a:off x="5431441" y="381784"/>
-          <a:ext cx="458897" cy="536823"/>
+          <a:off x="6948921" y="753196"/>
+          <a:ext cx="281384" cy="329167"/>
         </a:xfrm>
         <a:prstGeom prst="rightArrow">
           <a:avLst>
@@ -2823,8 +2729,8 @@
         </a:p>
       </dsp:txBody>
       <dsp:txXfrm>
-        <a:off x="5431441" y="489149"/>
-        <a:ext cx="321228" cy="322093"/>
+        <a:off x="6948921" y="819029"/>
+        <a:ext cx="196969" cy="197501"/>
       </dsp:txXfrm>
     </dsp:sp>
     <dsp:sp modelId="{9BE2BF78-BECE-408F-84D4-58A336A16375}">
@@ -2834,8 +2740,8 @@
       </dsp:nvSpPr>
       <dsp:spPr>
         <a:xfrm>
-          <a:off x="6106799" y="812"/>
-          <a:ext cx="2164610" cy="1298766"/>
+          <a:off x="7363034" y="519593"/>
+          <a:ext cx="3148641" cy="796371"/>
         </a:xfrm>
         <a:prstGeom prst="roundRect">
           <a:avLst>
@@ -2880,12 +2786,12 @@
         </a:fontRef>
       </dsp:style>
       <dsp:txBody>
-        <a:bodyPr spcFirstLastPara="0" vert="horz" wrap="square" lIns="53340" tIns="53340" rIns="53340" bIns="53340" numCol="1" spcCol="1270" anchor="ctr" anchorCtr="0">
+        <a:bodyPr spcFirstLastPara="0" vert="horz" wrap="square" lIns="76200" tIns="76200" rIns="76200" bIns="76200" numCol="1" spcCol="1270" anchor="ctr" anchorCtr="0">
           <a:noAutofit/>
         </a:bodyPr>
         <a:lstStyle/>
         <a:p>
-          <a:pPr marL="0" lvl="0" indent="0" algn="ctr" defTabSz="622300">
+          <a:pPr marL="0" lvl="0" indent="0" algn="ctr" defTabSz="889000">
             <a:lnSpc>
               <a:spcPct val="90000"/>
             </a:lnSpc>
@@ -2898,14 +2804,14 @@
             <a:buNone/>
           </a:pPr>
           <a:r>
-            <a:rPr lang="ru-RU" sz="1400" kern="1200" dirty="0"/>
-            <a:t>Обеспечить безопасность и разграничение ролей</a:t>
+            <a:rPr lang="ru-RU" sz="2000" kern="1200" dirty="0"/>
+            <a:t>Разработать требования к проектируемой системе</a:t>
           </a:r>
         </a:p>
       </dsp:txBody>
       <dsp:txXfrm>
-        <a:off x="6144839" y="38852"/>
-        <a:ext cx="2088530" cy="1222686"/>
+        <a:off x="7386359" y="542918"/>
+        <a:ext cx="3101991" cy="749721"/>
       </dsp:txXfrm>
     </dsp:sp>
     <dsp:sp modelId="{76607EAA-CDE9-41BF-893F-B6AB1281C07E}">
@@ -2915,8 +2821,8 @@
       </dsp:nvSpPr>
       <dsp:spPr>
         <a:xfrm rot="5400000">
-          <a:off x="6959655" y="1451101"/>
-          <a:ext cx="458897" cy="536823"/>
+          <a:off x="8796663" y="1408875"/>
+          <a:ext cx="281384" cy="329167"/>
         </a:xfrm>
         <a:prstGeom prst="rightArrow">
           <a:avLst>
@@ -2974,8 +2880,8 @@
         </a:p>
       </dsp:txBody>
       <dsp:txXfrm rot="-5400000">
-        <a:off x="7028058" y="1490064"/>
-        <a:ext cx="322093" cy="321228"/>
+        <a:off x="8838605" y="1432767"/>
+        <a:ext cx="197501" cy="196969"/>
       </dsp:txXfrm>
     </dsp:sp>
     <dsp:sp modelId="{3E5E2562-CE40-4B2C-BB79-969ADBDFBAF8}">
@@ -2985,8 +2891,8 @@
       </dsp:nvSpPr>
       <dsp:spPr>
         <a:xfrm>
-          <a:off x="6106799" y="2165423"/>
-          <a:ext cx="2164610" cy="1298766"/>
+          <a:off x="7363034" y="1846880"/>
+          <a:ext cx="3148641" cy="796371"/>
         </a:xfrm>
         <a:prstGeom prst="roundRect">
           <a:avLst>
@@ -3031,12 +2937,12 @@
         </a:fontRef>
       </dsp:style>
       <dsp:txBody>
-        <a:bodyPr spcFirstLastPara="0" vert="horz" wrap="square" lIns="53340" tIns="53340" rIns="53340" bIns="53340" numCol="1" spcCol="1270" anchor="ctr" anchorCtr="0">
+        <a:bodyPr spcFirstLastPara="0" vert="horz" wrap="square" lIns="76200" tIns="76200" rIns="76200" bIns="76200" numCol="1" spcCol="1270" anchor="ctr" anchorCtr="0">
           <a:noAutofit/>
         </a:bodyPr>
         <a:lstStyle/>
         <a:p>
-          <a:pPr marL="0" lvl="0" indent="0" algn="ctr" defTabSz="622300">
+          <a:pPr marL="0" lvl="0" indent="0" algn="ctr" defTabSz="889000">
             <a:lnSpc>
               <a:spcPct val="90000"/>
             </a:lnSpc>
@@ -3049,14 +2955,22 @@
             <a:buNone/>
           </a:pPr>
           <a:r>
-            <a:rPr lang="ru-RU" sz="1400" kern="1200" dirty="0"/>
-            <a:t>Разработать модель данных и БД</a:t>
+            <a:rPr lang="ru-RU" sz="2000" kern="1200" dirty="0"/>
+            <a:t>Разработать модель и хранилище</a:t>
+          </a:r>
+          <a:r>
+            <a:rPr lang="en-US" sz="2000" kern="1200" dirty="0"/>
+            <a:t> </a:t>
+          </a:r>
+          <a:r>
+            <a:rPr lang="ru-RU" sz="2000" kern="1200" dirty="0"/>
+            <a:t>данных</a:t>
           </a:r>
         </a:p>
       </dsp:txBody>
       <dsp:txXfrm>
-        <a:off x="6144839" y="2203463"/>
-        <a:ext cx="2088530" cy="1222686"/>
+        <a:off x="7386359" y="1870205"/>
+        <a:ext cx="3101991" cy="749721"/>
       </dsp:txXfrm>
     </dsp:sp>
     <dsp:sp modelId="{0C108A3F-843D-4D1B-9BA6-D31ED971F87C}">
@@ -3066,8 +2980,8 @@
       </dsp:nvSpPr>
       <dsp:spPr>
         <a:xfrm rot="10800000">
-          <a:off x="5457416" y="2546394"/>
-          <a:ext cx="458897" cy="536823"/>
+          <a:off x="6964848" y="2080482"/>
+          <a:ext cx="281384" cy="329167"/>
         </a:xfrm>
         <a:prstGeom prst="rightArrow">
           <a:avLst>
@@ -3125,8 +3039,8 @@
         </a:p>
       </dsp:txBody>
       <dsp:txXfrm rot="10800000">
-        <a:off x="5595085" y="2653759"/>
-        <a:ext cx="321228" cy="322093"/>
+        <a:off x="7049263" y="2146315"/>
+        <a:ext cx="196969" cy="197501"/>
       </dsp:txXfrm>
     </dsp:sp>
     <dsp:sp modelId="{316F8855-8484-4C8F-AEE5-4DFF77993B10}">
@@ -3136,8 +3050,8 @@
       </dsp:nvSpPr>
       <dsp:spPr>
         <a:xfrm>
-          <a:off x="3076345" y="2165423"/>
-          <a:ext cx="2164610" cy="1298766"/>
+          <a:off x="3683478" y="1846880"/>
+          <a:ext cx="3148641" cy="796371"/>
         </a:xfrm>
         <a:prstGeom prst="roundRect">
           <a:avLst>
@@ -3182,12 +3096,12 @@
         </a:fontRef>
       </dsp:style>
       <dsp:txBody>
-        <a:bodyPr spcFirstLastPara="0" vert="horz" wrap="square" lIns="53340" tIns="53340" rIns="53340" bIns="53340" numCol="1" spcCol="1270" anchor="ctr" anchorCtr="0">
+        <a:bodyPr spcFirstLastPara="0" vert="horz" wrap="square" lIns="76200" tIns="76200" rIns="76200" bIns="76200" numCol="1" spcCol="1270" anchor="ctr" anchorCtr="0">
           <a:noAutofit/>
         </a:bodyPr>
         <a:lstStyle/>
         <a:p>
-          <a:pPr marL="0" lvl="0" indent="0" algn="ctr" defTabSz="622300">
+          <a:pPr marL="0" lvl="0" indent="0" algn="ctr" defTabSz="889000">
             <a:lnSpc>
               <a:spcPct val="90000"/>
             </a:lnSpc>
@@ -3200,14 +3114,14 @@
             <a:buNone/>
           </a:pPr>
           <a:r>
-            <a:rPr lang="ru-RU" sz="1400" kern="1200" dirty="0"/>
-            <a:t>Создать аналитический модуль</a:t>
+            <a:rPr lang="ru-RU" sz="2000" kern="1200" dirty="0"/>
+            <a:t>Реализовать серверную часть системы</a:t>
           </a:r>
         </a:p>
       </dsp:txBody>
       <dsp:txXfrm>
-        <a:off x="3114385" y="2203463"/>
-        <a:ext cx="2088530" cy="1222686"/>
+        <a:off x="3706803" y="1870205"/>
+        <a:ext cx="3101991" cy="749721"/>
       </dsp:txXfrm>
     </dsp:sp>
     <dsp:sp modelId="{E7788809-BE23-495F-B211-3363A58B4D01}">
@@ -3217,8 +3131,8 @@
       </dsp:nvSpPr>
       <dsp:spPr>
         <a:xfrm rot="10800000">
-          <a:off x="2426962" y="2546394"/>
-          <a:ext cx="458897" cy="536823"/>
+          <a:off x="3285292" y="2080482"/>
+          <a:ext cx="281384" cy="329167"/>
         </a:xfrm>
         <a:prstGeom prst="rightArrow">
           <a:avLst>
@@ -3276,8 +3190,8 @@
         </a:p>
       </dsp:txBody>
       <dsp:txXfrm rot="10800000">
-        <a:off x="2564631" y="2653759"/>
-        <a:ext cx="321228" cy="322093"/>
+        <a:off x="3369707" y="2146315"/>
+        <a:ext cx="196969" cy="197501"/>
       </dsp:txXfrm>
     </dsp:sp>
     <dsp:sp modelId="{2344379F-636E-45BB-81B1-FB76B718FC22}">
@@ -3287,8 +3201,8 @@
       </dsp:nvSpPr>
       <dsp:spPr>
         <a:xfrm>
-          <a:off x="45891" y="2165423"/>
-          <a:ext cx="2164610" cy="1298766"/>
+          <a:off x="3922" y="1846880"/>
+          <a:ext cx="3148641" cy="796371"/>
         </a:xfrm>
         <a:prstGeom prst="roundRect">
           <a:avLst>
@@ -3333,12 +3247,12 @@
         </a:fontRef>
       </dsp:style>
       <dsp:txBody>
-        <a:bodyPr spcFirstLastPara="0" vert="horz" wrap="square" lIns="53340" tIns="53340" rIns="53340" bIns="53340" numCol="1" spcCol="1270" anchor="ctr" anchorCtr="0">
+        <a:bodyPr spcFirstLastPara="0" vert="horz" wrap="square" lIns="76200" tIns="76200" rIns="76200" bIns="76200" numCol="1" spcCol="1270" anchor="ctr" anchorCtr="0">
           <a:noAutofit/>
         </a:bodyPr>
         <a:lstStyle/>
         <a:p>
-          <a:pPr marL="0" lvl="0" indent="0" algn="ctr" defTabSz="622300">
+          <a:pPr marL="0" lvl="0" indent="0" algn="ctr" defTabSz="889000">
             <a:lnSpc>
               <a:spcPct val="90000"/>
             </a:lnSpc>
@@ -3351,14 +3265,14 @@
             <a:buNone/>
           </a:pPr>
           <a:r>
-            <a:rPr lang="ru-RU" sz="1400" kern="1200" dirty="0"/>
-            <a:t>Реализовать веб-интерфейс для доступа к витрине данных</a:t>
+            <a:rPr lang="ru-RU" sz="2000" kern="1200" dirty="0"/>
+            <a:t>Реализовать клиентскую часть системы</a:t>
           </a:r>
         </a:p>
       </dsp:txBody>
       <dsp:txXfrm>
-        <a:off x="83931" y="2203463"/>
-        <a:ext cx="2088530" cy="1222686"/>
+        <a:off x="27247" y="1870205"/>
+        <a:ext cx="3101991" cy="749721"/>
       </dsp:txXfrm>
     </dsp:sp>
   </dsp:spTree>
@@ -3380,8 +3294,8 @@
       </dsp:nvSpPr>
       <dsp:spPr>
         <a:xfrm>
-          <a:off x="7784" y="312"/>
-          <a:ext cx="3147491" cy="2274274"/>
+          <a:off x="3018" y="500"/>
+          <a:ext cx="4047976" cy="2145101"/>
         </a:xfrm>
         <a:prstGeom prst="roundRect">
           <a:avLst>
@@ -3434,14 +3348,14 @@
           </a:pPr>
           <a:r>
             <a:rPr lang="ru-RU" sz="2400" b="1" i="0" kern="1200" dirty="0"/>
-            <a:t>Аналитик / Технолог</a:t>
+            <a:t>Производство</a:t>
           </a:r>
-          <a:endParaRPr lang="ru-RU" sz="2400" kern="1200" dirty="0"/>
+          <a:endParaRPr lang="ru-RU" sz="2400" b="1" kern="1200" dirty="0"/>
         </a:p>
       </dsp:txBody>
       <dsp:txXfrm>
-        <a:off x="74395" y="66923"/>
-        <a:ext cx="3014269" cy="2141052"/>
+        <a:off x="65846" y="63328"/>
+        <a:ext cx="3922320" cy="2019445"/>
       </dsp:txXfrm>
     </dsp:sp>
     <dsp:sp modelId="{D4A332A9-899E-41F7-AF5A-CCE7711F381D}">
@@ -3451,8 +3365,8 @@
       </dsp:nvSpPr>
       <dsp:spPr>
         <a:xfrm>
-          <a:off x="7784" y="2552059"/>
-          <a:ext cx="3147491" cy="2274274"/>
+          <a:off x="3018" y="2378772"/>
+          <a:ext cx="4047976" cy="2145101"/>
         </a:xfrm>
         <a:prstGeom prst="roundRect">
           <a:avLst>
@@ -3460,20 +3374,12 @@
           </a:avLst>
         </a:prstGeom>
         <a:solidFill>
-          <a:schemeClr val="accent2">
-            <a:hueOff val="0"/>
-            <a:satOff val="0"/>
-            <a:lumOff val="0"/>
-            <a:alphaOff val="0"/>
-          </a:schemeClr>
+          <a:schemeClr val="accent2"/>
         </a:solidFill>
         <a:ln w="12700" cap="flat" cmpd="sng" algn="ctr">
           <a:solidFill>
-            <a:schemeClr val="lt1">
-              <a:hueOff val="0"/>
-              <a:satOff val="0"/>
-              <a:lumOff val="0"/>
-              <a:alphaOff val="0"/>
+            <a:schemeClr val="accent2">
+              <a:shade val="50000"/>
             </a:schemeClr>
           </a:solidFill>
           <a:prstDash val="solid"/>
@@ -3483,13 +3389,15 @@
       </dsp:spPr>
       <dsp:style>
         <a:lnRef idx="2">
-          <a:scrgbClr r="0" g="0" b="0"/>
+          <a:schemeClr val="accent2">
+            <a:shade val="50000"/>
+          </a:schemeClr>
         </a:lnRef>
         <a:fillRef idx="1">
-          <a:scrgbClr r="0" g="0" b="0"/>
+          <a:schemeClr val="accent2"/>
         </a:fillRef>
         <a:effectRef idx="0">
-          <a:scrgbClr r="0" g="0" b="0"/>
+          <a:schemeClr val="accent2"/>
         </a:effectRef>
         <a:fontRef idx="minor">
           <a:schemeClr val="lt1"/>
@@ -3514,15 +3422,15 @@
             <a:buNone/>
           </a:pPr>
           <a:r>
-            <a:rPr lang="ru-RU" sz="2400" b="0" i="0" kern="1200" dirty="0"/>
-            <a:t>Оперативный анализ, работа с детальными отчетами</a:t>
+            <a:rPr lang="ru-RU" sz="2400" b="1" i="0" kern="1200" dirty="0"/>
+            <a:t>Руководство</a:t>
           </a:r>
-          <a:endParaRPr lang="ru-RU" sz="2400" kern="1200" dirty="0"/>
+          <a:endParaRPr lang="ru-RU" sz="2400" b="1" kern="1200" dirty="0"/>
         </a:p>
       </dsp:txBody>
       <dsp:txXfrm>
-        <a:off x="74395" y="2618670"/>
-        <a:ext cx="3014269" cy="2141052"/>
+        <a:off x="65846" y="2441600"/>
+        <a:ext cx="3922320" cy="2019445"/>
       </dsp:txXfrm>
     </dsp:sp>
     <dsp:sp modelId="{CC2BF28F-EFAE-4170-9767-2009CB8328D0}">
@@ -3532,8 +3440,8 @@
       </dsp:nvSpPr>
       <dsp:spPr>
         <a:xfrm>
-          <a:off x="3684054" y="312"/>
-          <a:ext cx="3147491" cy="2274274"/>
+          <a:off x="4731054" y="500"/>
+          <a:ext cx="4047976" cy="2145101"/>
         </a:xfrm>
         <a:prstGeom prst="roundRect">
           <a:avLst>
@@ -3541,91 +3449,12 @@
           </a:avLst>
         </a:prstGeom>
         <a:solidFill>
-          <a:schemeClr val="lt1"/>
+          <a:schemeClr val="accent2"/>
         </a:solidFill>
         <a:ln w="12700" cap="flat" cmpd="sng" algn="ctr">
           <a:solidFill>
-            <a:schemeClr val="accent2"/>
-          </a:solidFill>
-          <a:prstDash val="solid"/>
-          <a:miter lim="800000"/>
-        </a:ln>
-        <a:effectLst/>
-      </dsp:spPr>
-      <dsp:style>
-        <a:lnRef idx="2">
-          <a:schemeClr val="accent2"/>
-        </a:lnRef>
-        <a:fillRef idx="1">
-          <a:schemeClr val="lt1"/>
-        </a:fillRef>
-        <a:effectRef idx="0">
-          <a:schemeClr val="accent2"/>
-        </a:effectRef>
-        <a:fontRef idx="minor">
-          <a:schemeClr val="dk1"/>
-        </a:fontRef>
-      </dsp:style>
-      <dsp:txBody>
-        <a:bodyPr spcFirstLastPara="0" vert="horz" wrap="square" lIns="91440" tIns="91440" rIns="91440" bIns="91440" numCol="1" spcCol="1270" anchor="ctr" anchorCtr="0">
-          <a:noAutofit/>
-        </a:bodyPr>
-        <a:lstStyle/>
-        <a:p>
-          <a:pPr marL="0" lvl="0" indent="0" algn="ctr" defTabSz="1066800">
-            <a:lnSpc>
-              <a:spcPct val="90000"/>
-            </a:lnSpc>
-            <a:spcBef>
-              <a:spcPct val="0"/>
-            </a:spcBef>
-            <a:spcAft>
-              <a:spcPct val="35000"/>
-            </a:spcAft>
-            <a:buNone/>
-          </a:pPr>
-          <a:r>
-            <a:rPr lang="ru-RU" sz="2400" b="1" i="0" kern="1200" dirty="0"/>
-            <a:t>Руководитель / Служба качества</a:t>
-          </a:r>
-          <a:endParaRPr lang="ru-RU" sz="2400" kern="1200" dirty="0"/>
-        </a:p>
-      </dsp:txBody>
-      <dsp:txXfrm>
-        <a:off x="3750665" y="66923"/>
-        <a:ext cx="3014269" cy="2141052"/>
-      </dsp:txXfrm>
-    </dsp:sp>
-    <dsp:sp modelId="{5EDA0103-5948-45DF-8C56-C8AF94623D0D}">
-      <dsp:nvSpPr>
-        <dsp:cNvPr id="0" name=""/>
-        <dsp:cNvSpPr/>
-      </dsp:nvSpPr>
-      <dsp:spPr>
-        <a:xfrm>
-          <a:off x="3684054" y="2552059"/>
-          <a:ext cx="3147491" cy="2274274"/>
-        </a:xfrm>
-        <a:prstGeom prst="roundRect">
-          <a:avLst>
-            <a:gd name="adj" fmla="val 10000"/>
-          </a:avLst>
-        </a:prstGeom>
-        <a:solidFill>
-          <a:schemeClr val="accent2">
-            <a:hueOff val="0"/>
-            <a:satOff val="0"/>
-            <a:lumOff val="0"/>
-            <a:alphaOff val="0"/>
-          </a:schemeClr>
-        </a:solidFill>
-        <a:ln w="12700" cap="flat" cmpd="sng" algn="ctr">
-          <a:solidFill>
-            <a:schemeClr val="lt1">
-              <a:hueOff val="0"/>
-              <a:satOff val="0"/>
-              <a:lumOff val="0"/>
-              <a:alphaOff val="0"/>
+            <a:schemeClr val="accent2">
+              <a:shade val="50000"/>
             </a:schemeClr>
           </a:solidFill>
           <a:prstDash val="solid"/>
@@ -3635,13 +3464,15 @@
       </dsp:spPr>
       <dsp:style>
         <a:lnRef idx="2">
-          <a:scrgbClr r="0" g="0" b="0"/>
+          <a:schemeClr val="accent2">
+            <a:shade val="50000"/>
+          </a:schemeClr>
         </a:lnRef>
         <a:fillRef idx="1">
-          <a:scrgbClr r="0" g="0" b="0"/>
+          <a:schemeClr val="accent2"/>
         </a:fillRef>
         <a:effectRef idx="0">
-          <a:scrgbClr r="0" g="0" b="0"/>
+          <a:schemeClr val="accent2"/>
         </a:effectRef>
         <a:fontRef idx="minor">
           <a:schemeClr val="lt1"/>
@@ -3666,26 +3497,26 @@
             <a:buNone/>
           </a:pPr>
           <a:r>
-            <a:rPr lang="ru-RU" sz="2400" b="0" i="0" kern="1200" dirty="0"/>
-            <a:t>Стратегический мониторинг по KPI, принятие управленческих решений</a:t>
+            <a:rPr lang="ru-RU" sz="2400" b="1" i="0" kern="1200" dirty="0"/>
+            <a:t>Лаборатория</a:t>
           </a:r>
-          <a:endParaRPr lang="ru-RU" sz="2400" kern="1200" dirty="0"/>
+          <a:endParaRPr lang="ru-RU" sz="2400" b="1" kern="1200" dirty="0"/>
         </a:p>
       </dsp:txBody>
       <dsp:txXfrm>
-        <a:off x="3750665" y="2618670"/>
-        <a:ext cx="3014269" cy="2141052"/>
+        <a:off x="4793882" y="63328"/>
+        <a:ext cx="3922320" cy="2019445"/>
       </dsp:txXfrm>
     </dsp:sp>
-    <dsp:sp modelId="{0844B3D3-24C1-4FD8-A223-B4A928E4AEE4}">
+    <dsp:sp modelId="{5EDA0103-5948-45DF-8C56-C8AF94623D0D}">
       <dsp:nvSpPr>
         <dsp:cNvPr id="0" name=""/>
         <dsp:cNvSpPr/>
       </dsp:nvSpPr>
       <dsp:spPr>
         <a:xfrm>
-          <a:off x="7360324" y="312"/>
-          <a:ext cx="3147491" cy="2274274"/>
+          <a:off x="4731054" y="2378772"/>
+          <a:ext cx="4047976" cy="2145101"/>
         </a:xfrm>
         <a:prstGeom prst="roundRect">
           <a:avLst>
@@ -3740,93 +3571,12 @@
             <a:rPr lang="ru-RU" sz="2400" b="1" i="0" kern="1200" dirty="0"/>
             <a:t>Администратор</a:t>
           </a:r>
-          <a:endParaRPr lang="ru-RU" sz="2400" kern="1200" dirty="0"/>
+          <a:endParaRPr lang="ru-RU" sz="2400" b="1" kern="1200" dirty="0"/>
         </a:p>
       </dsp:txBody>
       <dsp:txXfrm>
-        <a:off x="7426935" y="66923"/>
-        <a:ext cx="3014269" cy="2141052"/>
-      </dsp:txXfrm>
-    </dsp:sp>
-    <dsp:sp modelId="{A33D0A27-344F-4419-B3B4-7AFBBEA93174}">
-      <dsp:nvSpPr>
-        <dsp:cNvPr id="0" name=""/>
-        <dsp:cNvSpPr/>
-      </dsp:nvSpPr>
-      <dsp:spPr>
-        <a:xfrm>
-          <a:off x="7360324" y="2552059"/>
-          <a:ext cx="3147491" cy="2274274"/>
-        </a:xfrm>
-        <a:prstGeom prst="roundRect">
-          <a:avLst>
-            <a:gd name="adj" fmla="val 10000"/>
-          </a:avLst>
-        </a:prstGeom>
-        <a:solidFill>
-          <a:schemeClr val="accent2">
-            <a:hueOff val="0"/>
-            <a:satOff val="0"/>
-            <a:lumOff val="0"/>
-            <a:alphaOff val="0"/>
-          </a:schemeClr>
-        </a:solidFill>
-        <a:ln w="12700" cap="flat" cmpd="sng" algn="ctr">
-          <a:solidFill>
-            <a:schemeClr val="lt1">
-              <a:hueOff val="0"/>
-              <a:satOff val="0"/>
-              <a:lumOff val="0"/>
-              <a:alphaOff val="0"/>
-            </a:schemeClr>
-          </a:solidFill>
-          <a:prstDash val="solid"/>
-          <a:miter lim="800000"/>
-        </a:ln>
-        <a:effectLst/>
-      </dsp:spPr>
-      <dsp:style>
-        <a:lnRef idx="2">
-          <a:scrgbClr r="0" g="0" b="0"/>
-        </a:lnRef>
-        <a:fillRef idx="1">
-          <a:scrgbClr r="0" g="0" b="0"/>
-        </a:fillRef>
-        <a:effectRef idx="0">
-          <a:scrgbClr r="0" g="0" b="0"/>
-        </a:effectRef>
-        <a:fontRef idx="minor">
-          <a:schemeClr val="lt1"/>
-        </a:fontRef>
-      </dsp:style>
-      <dsp:txBody>
-        <a:bodyPr spcFirstLastPara="0" vert="horz" wrap="square" lIns="91440" tIns="91440" rIns="91440" bIns="91440" numCol="1" spcCol="1270" anchor="ctr" anchorCtr="0">
-          <a:noAutofit/>
-        </a:bodyPr>
-        <a:lstStyle/>
-        <a:p>
-          <a:pPr marL="0" lvl="0" indent="0" algn="ctr" defTabSz="1066800">
-            <a:lnSpc>
-              <a:spcPct val="90000"/>
-            </a:lnSpc>
-            <a:spcBef>
-              <a:spcPct val="0"/>
-            </a:spcBef>
-            <a:spcAft>
-              <a:spcPct val="35000"/>
-            </a:spcAft>
-            <a:buNone/>
-          </a:pPr>
-          <a:r>
-            <a:rPr lang="ru-RU" sz="2400" b="0" i="0" kern="1200" dirty="0"/>
-            <a:t>Обеспечение бесперебойной работы, интеграция и безопасность</a:t>
-          </a:r>
-          <a:endParaRPr lang="ru-RU" sz="2400" kern="1200" dirty="0"/>
-        </a:p>
-      </dsp:txBody>
-      <dsp:txXfrm>
-        <a:off x="7426935" y="2618670"/>
-        <a:ext cx="3014269" cy="2141052"/>
+        <a:off x="4793882" y="2441600"/>
+        <a:ext cx="3922320" cy="2019445"/>
       </dsp:txXfrm>
     </dsp:sp>
   </dsp:spTree>
@@ -6594,6 +6344,439 @@
 </dgm:styleDef>
 </file>
 
+<file path=ppt/notesMasters/notesMaster1.xml><?xml version="1.0" encoding="utf-8"?>
+<p:notesMaster xmlns:a="http://schemas.openxmlformats.org/drawingml/2006/main" xmlns:r="http://schemas.openxmlformats.org/officeDocument/2006/relationships" xmlns:p="http://schemas.openxmlformats.org/presentationml/2006/main">
+  <p:cSld>
+    <p:bg>
+      <p:bgRef idx="1001">
+        <a:schemeClr val="bg1"/>
+      </p:bgRef>
+    </p:bg>
+    <p:spTree>
+      <p:nvGrpSpPr>
+        <p:cNvPr id="1" name=""/>
+        <p:cNvGrpSpPr/>
+        <p:nvPr/>
+      </p:nvGrpSpPr>
+      <p:grpSpPr>
+        <a:xfrm>
+          <a:off x="0" y="0"/>
+          <a:ext cx="0" cy="0"/>
+          <a:chOff x="0" y="0"/>
+          <a:chExt cx="0" cy="0"/>
+        </a:xfrm>
+      </p:grpSpPr>
+      <p:sp>
+        <p:nvSpPr>
+          <p:cNvPr id="2" name="Верхний колонтитул 1"/>
+          <p:cNvSpPr>
+            <a:spLocks noGrp="1"/>
+          </p:cNvSpPr>
+          <p:nvPr>
+            <p:ph type="hdr" sz="quarter"/>
+          </p:nvPr>
+        </p:nvSpPr>
+        <p:spPr>
+          <a:xfrm>
+            <a:off x="0" y="0"/>
+            <a:ext cx="2971800" cy="458788"/>
+          </a:xfrm>
+          <a:prstGeom prst="rect">
+            <a:avLst/>
+          </a:prstGeom>
+        </p:spPr>
+        <p:txBody>
+          <a:bodyPr vert="horz" lIns="91440" tIns="45720" rIns="91440" bIns="45720" rtlCol="0"/>
+          <a:lstStyle>
+            <a:lvl1pPr algn="l">
+              <a:defRPr sz="1200"/>
+            </a:lvl1pPr>
+          </a:lstStyle>
+          <a:p>
+            <a:endParaRPr lang="ru-RU"/>
+          </a:p>
+        </p:txBody>
+      </p:sp>
+      <p:sp>
+        <p:nvSpPr>
+          <p:cNvPr id="3" name="Дата 2"/>
+          <p:cNvSpPr>
+            <a:spLocks noGrp="1"/>
+          </p:cNvSpPr>
+          <p:nvPr>
+            <p:ph type="dt" idx="1"/>
+          </p:nvPr>
+        </p:nvSpPr>
+        <p:spPr>
+          <a:xfrm>
+            <a:off x="3884613" y="0"/>
+            <a:ext cx="2971800" cy="458788"/>
+          </a:xfrm>
+          <a:prstGeom prst="rect">
+            <a:avLst/>
+          </a:prstGeom>
+        </p:spPr>
+        <p:txBody>
+          <a:bodyPr vert="horz" lIns="91440" tIns="45720" rIns="91440" bIns="45720" rtlCol="0"/>
+          <a:lstStyle>
+            <a:lvl1pPr algn="r">
+              <a:defRPr sz="1200"/>
+            </a:lvl1pPr>
+          </a:lstStyle>
+          <a:p>
+            <a:fld id="{1276E137-159C-40AE-B6E4-0B8BBE748819}" type="datetimeFigureOut">
+              <a:rPr lang="ru-RU" smtClean="0"/>
+              <a:t>12.06.2026</a:t>
+            </a:fld>
+            <a:endParaRPr lang="ru-RU"/>
+          </a:p>
+        </p:txBody>
+      </p:sp>
+      <p:sp>
+        <p:nvSpPr>
+          <p:cNvPr id="4" name="Образ слайда 3"/>
+          <p:cNvSpPr>
+            <a:spLocks noGrp="1" noRot="1" noChangeAspect="1"/>
+          </p:cNvSpPr>
+          <p:nvPr>
+            <p:ph type="sldImg" idx="2"/>
+          </p:nvPr>
+        </p:nvSpPr>
+        <p:spPr>
+          <a:xfrm>
+            <a:off x="685800" y="1143000"/>
+            <a:ext cx="5486400" cy="3086100"/>
+          </a:xfrm>
+          <a:prstGeom prst="rect">
+            <a:avLst/>
+          </a:prstGeom>
+          <a:noFill/>
+          <a:ln w="12700">
+            <a:solidFill>
+              <a:prstClr val="black"/>
+            </a:solidFill>
+          </a:ln>
+        </p:spPr>
+        <p:txBody>
+          <a:bodyPr vert="horz" lIns="91440" tIns="45720" rIns="91440" bIns="45720" rtlCol="0" anchor="ctr"/>
+          <a:lstStyle/>
+          <a:p>
+            <a:endParaRPr lang="ru-RU"/>
+          </a:p>
+        </p:txBody>
+      </p:sp>
+      <p:sp>
+        <p:nvSpPr>
+          <p:cNvPr id="5" name="Заметки 4"/>
+          <p:cNvSpPr>
+            <a:spLocks noGrp="1"/>
+          </p:cNvSpPr>
+          <p:nvPr>
+            <p:ph type="body" sz="quarter" idx="3"/>
+          </p:nvPr>
+        </p:nvSpPr>
+        <p:spPr>
+          <a:xfrm>
+            <a:off x="685800" y="4400550"/>
+            <a:ext cx="5486400" cy="3600450"/>
+          </a:xfrm>
+          <a:prstGeom prst="rect">
+            <a:avLst/>
+          </a:prstGeom>
+        </p:spPr>
+        <p:txBody>
+          <a:bodyPr vert="horz" lIns="91440" tIns="45720" rIns="91440" bIns="45720" rtlCol="0"/>
+          <a:lstStyle/>
+          <a:p>
+            <a:pPr lvl="0"/>
+            <a:r>
+              <a:rPr lang="ru-RU"/>
+              <a:t>Образец текста</a:t>
+            </a:r>
+          </a:p>
+          <a:p>
+            <a:pPr lvl="1"/>
+            <a:r>
+              <a:rPr lang="ru-RU"/>
+              <a:t>Второй уровень</a:t>
+            </a:r>
+          </a:p>
+          <a:p>
+            <a:pPr lvl="2"/>
+            <a:r>
+              <a:rPr lang="ru-RU"/>
+              <a:t>Третий уровень</a:t>
+            </a:r>
+          </a:p>
+          <a:p>
+            <a:pPr lvl="3"/>
+            <a:r>
+              <a:rPr lang="ru-RU"/>
+              <a:t>Четвертый уровень</a:t>
+            </a:r>
+          </a:p>
+          <a:p>
+            <a:pPr lvl="4"/>
+            <a:r>
+              <a:rPr lang="ru-RU"/>
+              <a:t>Пятый уровень</a:t>
+            </a:r>
+          </a:p>
+        </p:txBody>
+      </p:sp>
+      <p:sp>
+        <p:nvSpPr>
+          <p:cNvPr id="6" name="Нижний колонтитул 5"/>
+          <p:cNvSpPr>
+            <a:spLocks noGrp="1"/>
+          </p:cNvSpPr>
+          <p:nvPr>
+            <p:ph type="ftr" sz="quarter" idx="4"/>
+          </p:nvPr>
+        </p:nvSpPr>
+        <p:spPr>
+          <a:xfrm>
+            <a:off x="0" y="8685213"/>
+            <a:ext cx="2971800" cy="458787"/>
+          </a:xfrm>
+          <a:prstGeom prst="rect">
+            <a:avLst/>
+          </a:prstGeom>
+        </p:spPr>
+        <p:txBody>
+          <a:bodyPr vert="horz" lIns="91440" tIns="45720" rIns="91440" bIns="45720" rtlCol="0" anchor="b"/>
+          <a:lstStyle>
+            <a:lvl1pPr algn="l">
+              <a:defRPr sz="1200"/>
+            </a:lvl1pPr>
+          </a:lstStyle>
+          <a:p>
+            <a:endParaRPr lang="ru-RU"/>
+          </a:p>
+        </p:txBody>
+      </p:sp>
+      <p:sp>
+        <p:nvSpPr>
+          <p:cNvPr id="7" name="Номер слайда 6"/>
+          <p:cNvSpPr>
+            <a:spLocks noGrp="1"/>
+          </p:cNvSpPr>
+          <p:nvPr>
+            <p:ph type="sldNum" sz="quarter" idx="5"/>
+          </p:nvPr>
+        </p:nvSpPr>
+        <p:spPr>
+          <a:xfrm>
+            <a:off x="3884613" y="8685213"/>
+            <a:ext cx="2971800" cy="458787"/>
+          </a:xfrm>
+          <a:prstGeom prst="rect">
+            <a:avLst/>
+          </a:prstGeom>
+        </p:spPr>
+        <p:txBody>
+          <a:bodyPr vert="horz" lIns="91440" tIns="45720" rIns="91440" bIns="45720" rtlCol="0" anchor="b"/>
+          <a:lstStyle>
+            <a:lvl1pPr algn="r">
+              <a:defRPr sz="1200"/>
+            </a:lvl1pPr>
+          </a:lstStyle>
+          <a:p>
+            <a:fld id="{7772016F-07DD-450A-84F7-F54B5EEAA4A9}" type="slidenum">
+              <a:rPr lang="ru-RU" smtClean="0"/>
+              <a:t>‹#›</a:t>
+            </a:fld>
+            <a:endParaRPr lang="ru-RU"/>
+          </a:p>
+        </p:txBody>
+      </p:sp>
+    </p:spTree>
+    <p:extLst>
+      <p:ext uri="{BB962C8B-B14F-4D97-AF65-F5344CB8AC3E}">
+        <p14:creationId xmlns:p14="http://schemas.microsoft.com/office/powerpoint/2010/main" val="541542818"/>
+      </p:ext>
+    </p:extLst>
+  </p:cSld>
+  <p:clrMap bg1="lt1" tx1="dk1" bg2="lt2" tx2="dk2" accent1="accent1" accent2="accent2" accent3="accent3" accent4="accent4" accent5="accent5" accent6="accent6" hlink="hlink" folHlink="folHlink"/>
+  <p:notesStyle>
+    <a:lvl1pPr marL="0" algn="l" defTabSz="914400" rtl="0" eaLnBrk="1" latinLnBrk="0" hangingPunct="1">
+      <a:defRPr sz="1200" kern="1200">
+        <a:solidFill>
+          <a:schemeClr val="tx1"/>
+        </a:solidFill>
+        <a:latin typeface="+mn-lt"/>
+        <a:ea typeface="+mn-ea"/>
+        <a:cs typeface="+mn-cs"/>
+      </a:defRPr>
+    </a:lvl1pPr>
+    <a:lvl2pPr marL="457200" algn="l" defTabSz="914400" rtl="0" eaLnBrk="1" latinLnBrk="0" hangingPunct="1">
+      <a:defRPr sz="1200" kern="1200">
+        <a:solidFill>
+          <a:schemeClr val="tx1"/>
+        </a:solidFill>
+        <a:latin typeface="+mn-lt"/>
+        <a:ea typeface="+mn-ea"/>
+        <a:cs typeface="+mn-cs"/>
+      </a:defRPr>
+    </a:lvl2pPr>
+    <a:lvl3pPr marL="914400" algn="l" defTabSz="914400" rtl="0" eaLnBrk="1" latinLnBrk="0" hangingPunct="1">
+      <a:defRPr sz="1200" kern="1200">
+        <a:solidFill>
+          <a:schemeClr val="tx1"/>
+        </a:solidFill>
+        <a:latin typeface="+mn-lt"/>
+        <a:ea typeface="+mn-ea"/>
+        <a:cs typeface="+mn-cs"/>
+      </a:defRPr>
+    </a:lvl3pPr>
+    <a:lvl4pPr marL="1371600" algn="l" defTabSz="914400" rtl="0" eaLnBrk="1" latinLnBrk="0" hangingPunct="1">
+      <a:defRPr sz="1200" kern="1200">
+        <a:solidFill>
+          <a:schemeClr val="tx1"/>
+        </a:solidFill>
+        <a:latin typeface="+mn-lt"/>
+        <a:ea typeface="+mn-ea"/>
+        <a:cs typeface="+mn-cs"/>
+      </a:defRPr>
+    </a:lvl4pPr>
+    <a:lvl5pPr marL="1828800" algn="l" defTabSz="914400" rtl="0" eaLnBrk="1" latinLnBrk="0" hangingPunct="1">
+      <a:defRPr sz="1200" kern="1200">
+        <a:solidFill>
+          <a:schemeClr val="tx1"/>
+        </a:solidFill>
+        <a:latin typeface="+mn-lt"/>
+        <a:ea typeface="+mn-ea"/>
+        <a:cs typeface="+mn-cs"/>
+      </a:defRPr>
+    </a:lvl5pPr>
+    <a:lvl6pPr marL="2286000" algn="l" defTabSz="914400" rtl="0" eaLnBrk="1" latinLnBrk="0" hangingPunct="1">
+      <a:defRPr sz="1200" kern="1200">
+        <a:solidFill>
+          <a:schemeClr val="tx1"/>
+        </a:solidFill>
+        <a:latin typeface="+mn-lt"/>
+        <a:ea typeface="+mn-ea"/>
+        <a:cs typeface="+mn-cs"/>
+      </a:defRPr>
+    </a:lvl6pPr>
+    <a:lvl7pPr marL="2743200" algn="l" defTabSz="914400" rtl="0" eaLnBrk="1" latinLnBrk="0" hangingPunct="1">
+      <a:defRPr sz="1200" kern="1200">
+        <a:solidFill>
+          <a:schemeClr val="tx1"/>
+        </a:solidFill>
+        <a:latin typeface="+mn-lt"/>
+        <a:ea typeface="+mn-ea"/>
+        <a:cs typeface="+mn-cs"/>
+      </a:defRPr>
+    </a:lvl7pPr>
+    <a:lvl8pPr marL="3200400" algn="l" defTabSz="914400" rtl="0" eaLnBrk="1" latinLnBrk="0" hangingPunct="1">
+      <a:defRPr sz="1200" kern="1200">
+        <a:solidFill>
+          <a:schemeClr val="tx1"/>
+        </a:solidFill>
+        <a:latin typeface="+mn-lt"/>
+        <a:ea typeface="+mn-ea"/>
+        <a:cs typeface="+mn-cs"/>
+      </a:defRPr>
+    </a:lvl8pPr>
+    <a:lvl9pPr marL="3657600" algn="l" defTabSz="914400" rtl="0" eaLnBrk="1" latinLnBrk="0" hangingPunct="1">
+      <a:defRPr sz="1200" kern="1200">
+        <a:solidFill>
+          <a:schemeClr val="tx1"/>
+        </a:solidFill>
+        <a:latin typeface="+mn-lt"/>
+        <a:ea typeface="+mn-ea"/>
+        <a:cs typeface="+mn-cs"/>
+      </a:defRPr>
+    </a:lvl9pPr>
+  </p:notesStyle>
+</p:notesMaster>
+</file>
+
+<file path=ppt/notesSlides/notesSlide1.xml><?xml version="1.0" encoding="utf-8"?>
+<p:notes xmlns:a="http://schemas.openxmlformats.org/drawingml/2006/main" xmlns:r="http://schemas.openxmlformats.org/officeDocument/2006/relationships" xmlns:p="http://schemas.openxmlformats.org/presentationml/2006/main">
+  <p:cSld>
+    <p:spTree>
+      <p:nvGrpSpPr>
+        <p:cNvPr id="1" name=""/>
+        <p:cNvGrpSpPr/>
+        <p:nvPr/>
+      </p:nvGrpSpPr>
+      <p:grpSpPr>
+        <a:xfrm>
+          <a:off x="0" y="0"/>
+          <a:ext cx="0" cy="0"/>
+          <a:chOff x="0" y="0"/>
+          <a:chExt cx="0" cy="0"/>
+        </a:xfrm>
+      </p:grpSpPr>
+      <p:sp>
+        <p:nvSpPr>
+          <p:cNvPr id="2" name="Образ слайда 1"/>
+          <p:cNvSpPr>
+            <a:spLocks noGrp="1" noRot="1" noChangeAspect="1"/>
+          </p:cNvSpPr>
+          <p:nvPr>
+            <p:ph type="sldImg"/>
+          </p:nvPr>
+        </p:nvSpPr>
+        <p:spPr/>
+      </p:sp>
+      <p:sp>
+        <p:nvSpPr>
+          <p:cNvPr id="3" name="Заметки 2"/>
+          <p:cNvSpPr>
+            <a:spLocks noGrp="1"/>
+          </p:cNvSpPr>
+          <p:nvPr>
+            <p:ph type="body" idx="1"/>
+          </p:nvPr>
+        </p:nvSpPr>
+        <p:spPr/>
+        <p:txBody>
+          <a:bodyPr/>
+          <a:lstStyle/>
+          <a:p>
+            <a:endParaRPr lang="ru-RU" dirty="0"/>
+          </a:p>
+        </p:txBody>
+      </p:sp>
+      <p:sp>
+        <p:nvSpPr>
+          <p:cNvPr id="4" name="Номер слайда 3"/>
+          <p:cNvSpPr>
+            <a:spLocks noGrp="1"/>
+          </p:cNvSpPr>
+          <p:nvPr>
+            <p:ph type="sldNum" sz="quarter" idx="5"/>
+          </p:nvPr>
+        </p:nvSpPr>
+        <p:spPr/>
+        <p:txBody>
+          <a:bodyPr/>
+          <a:lstStyle/>
+          <a:p>
+            <a:fld id="{7772016F-07DD-450A-84F7-F54B5EEAA4A9}" type="slidenum">
+              <a:rPr lang="ru-RU" smtClean="0"/>
+              <a:t>2</a:t>
+            </a:fld>
+            <a:endParaRPr lang="ru-RU"/>
+          </a:p>
+        </p:txBody>
+      </p:sp>
+    </p:spTree>
+    <p:extLst>
+      <p:ext uri="{BB962C8B-B14F-4D97-AF65-F5344CB8AC3E}">
+        <p14:creationId xmlns:p14="http://schemas.microsoft.com/office/powerpoint/2010/main" val="2875327734"/>
+      </p:ext>
+    </p:extLst>
+  </p:cSld>
+  <p:clrMapOvr>
+    <a:masterClrMapping/>
+  </p:clrMapOvr>
+</p:notes>
+</file>
+
 <file path=ppt/slideLayouts/slideLayout1.xml><?xml version="1.0" encoding="utf-8"?>
 <p:sldLayout xmlns:a="http://schemas.openxmlformats.org/drawingml/2006/main" xmlns:r="http://schemas.openxmlformats.org/officeDocument/2006/relationships" xmlns:p="http://schemas.openxmlformats.org/presentationml/2006/main" type="title" preserve="1">
   <p:cSld name="Титульный слайд">
@@ -9794,6 +9977,14 @@
 <file path=ppt/slides/slide1.xml><?xml version="1.0" encoding="utf-8"?>
 <p:sld xmlns:a="http://schemas.openxmlformats.org/drawingml/2006/main" xmlns:r="http://schemas.openxmlformats.org/officeDocument/2006/relationships" xmlns:p="http://schemas.openxmlformats.org/presentationml/2006/main">
   <p:cSld>
+    <p:bg>
+      <p:bgPr>
+        <a:solidFill>
+          <a:schemeClr val="bg1"/>
+        </a:solidFill>
+        <a:effectLst/>
+      </p:bgPr>
+    </p:bg>
     <p:spTree>
       <p:nvGrpSpPr>
         <p:cNvPr id="1" name=""/>
@@ -9826,13 +10017,13 @@
         </p:nvSpPr>
         <p:spPr>
           <a:xfrm>
-            <a:off x="927716" y="2619987"/>
+            <a:off x="927716" y="2698030"/>
             <a:ext cx="10336567" cy="1461940"/>
           </a:xfrm>
         </p:spPr>
         <p:txBody>
           <a:bodyPr>
-            <a:normAutofit fontScale="90000"/>
+            <a:noAutofit/>
           </a:bodyPr>
           <a:lstStyle/>
           <a:p>
@@ -9848,9 +10039,33 @@
                     <a:lumMod val="50000"/>
                   </a:schemeClr>
                 </a:solidFill>
+                <a:latin typeface="Candara" panose="020E0502030303020204" pitchFamily="34" charset="0"/>
                 <a:ea typeface="Times New Roman" panose="02020603050405020304" pitchFamily="18" charset="0"/>
               </a:rPr>
-              <a:t>Разработка информационной системы витрины качества металла</a:t>
+              <a:t>РАЗРАБОТКА ИНФОРМАЦИОННОЙ СИСТЕМЫ</a:t>
+            </a:r>
+            <a:br>
+              <a:rPr lang="ru-RU" sz="3600" b="1" dirty="0">
+                <a:solidFill>
+                  <a:schemeClr val="accent2">
+                    <a:lumMod val="50000"/>
+                  </a:schemeClr>
+                </a:solidFill>
+                <a:latin typeface="Candara" panose="020E0502030303020204" pitchFamily="34" charset="0"/>
+                <a:ea typeface="Times New Roman" panose="02020603050405020304" pitchFamily="18" charset="0"/>
+              </a:rPr>
+            </a:br>
+            <a:r>
+              <a:rPr lang="ru-RU" sz="3600" b="1" dirty="0">
+                <a:solidFill>
+                  <a:schemeClr val="accent2">
+                    <a:lumMod val="50000"/>
+                  </a:schemeClr>
+                </a:solidFill>
+                <a:latin typeface="Candara" panose="020E0502030303020204" pitchFamily="34" charset="0"/>
+                <a:ea typeface="Times New Roman" panose="02020603050405020304" pitchFamily="18" charset="0"/>
+              </a:rPr>
+              <a:t>ВИТРИНЫ КАЧЕСТВА МЕТАЛЛА</a:t>
             </a:r>
             <a:endParaRPr lang="ru-RU" sz="3600" b="1" dirty="0">
               <a:solidFill>
@@ -9858,6 +10073,7 @@
                   <a:lumMod val="50000"/>
                 </a:schemeClr>
               </a:solidFill>
+              <a:latin typeface="Candara" panose="020E0502030303020204" pitchFamily="34" charset="0"/>
             </a:endParaRPr>
           </a:p>
         </p:txBody>
@@ -9880,40 +10096,77 @@
         </p:nvSpPr>
         <p:spPr>
           <a:xfrm>
-            <a:off x="7399090" y="4854253"/>
-            <a:ext cx="4515141" cy="1655762"/>
+            <a:off x="7362514" y="4440774"/>
+            <a:ext cx="4515141" cy="2133761"/>
           </a:xfrm>
         </p:spPr>
         <p:txBody>
           <a:bodyPr>
-            <a:normAutofit/>
+            <a:noAutofit/>
           </a:bodyPr>
           <a:lstStyle/>
           <a:p>
-            <a:pPr algn="l"/>
+            <a:pPr algn="l">
+              <a:lnSpc>
+                <a:spcPct val="100000"/>
+              </a:lnSpc>
+            </a:pPr>
             <a:r>
-              <a:rPr lang="ru-RU" sz="1600" dirty="0"/>
+              <a:rPr lang="ru-RU" sz="1800" dirty="0">
+                <a:latin typeface="Candara" panose="020E0502030303020204" pitchFamily="34" charset="0"/>
+              </a:rPr>
               <a:t>Выполнила студентка группы Б1-ИФСТ-42</a:t>
             </a:r>
           </a:p>
           <a:p>
-            <a:pPr algn="l"/>
+            <a:pPr algn="l">
+              <a:lnSpc>
+                <a:spcPct val="100000"/>
+              </a:lnSpc>
+            </a:pPr>
             <a:r>
-              <a:rPr lang="ru-RU" sz="1600" dirty="0"/>
+              <a:rPr lang="ru-RU" sz="1800" dirty="0">
+                <a:latin typeface="Candara" panose="020E0502030303020204" pitchFamily="34" charset="0"/>
+              </a:rPr>
               <a:t>Парамонова Анна Сергеевна</a:t>
             </a:r>
           </a:p>
           <a:p>
-            <a:pPr algn="l"/>
+            <a:pPr algn="l">
+              <a:lnSpc>
+                <a:spcPct val="100000"/>
+              </a:lnSpc>
+            </a:pPr>
             <a:r>
-              <a:rPr lang="ru-RU" sz="1600" dirty="0"/>
+              <a:rPr lang="ru-RU" sz="1800" dirty="0">
+                <a:latin typeface="Candara" panose="020E0502030303020204" pitchFamily="34" charset="0"/>
+              </a:rPr>
               <a:t>Руководитель ВКР: </a:t>
             </a:r>
           </a:p>
           <a:p>
-            <a:pPr algn="l"/>
+            <a:pPr algn="l">
+              <a:lnSpc>
+                <a:spcPct val="100000"/>
+              </a:lnSpc>
+            </a:pPr>
             <a:r>
-              <a:rPr lang="ru-RU" sz="1600" dirty="0"/>
+              <a:rPr lang="ru-RU" sz="1800" dirty="0">
+                <a:latin typeface="Candara" panose="020E0502030303020204" pitchFamily="34" charset="0"/>
+              </a:rPr>
+              <a:t>Доцент кафедры ПИТ, к.т.н.</a:t>
+            </a:r>
+          </a:p>
+          <a:p>
+            <a:pPr algn="l">
+              <a:lnSpc>
+                <a:spcPct val="100000"/>
+              </a:lnSpc>
+            </a:pPr>
+            <a:r>
+              <a:rPr lang="ru-RU" sz="1800" dirty="0">
+                <a:latin typeface="Candara" panose="020E0502030303020204" pitchFamily="34" charset="0"/>
+              </a:rPr>
               <a:t>Ермаков Александр Вадимович</a:t>
             </a:r>
           </a:p>
@@ -9934,7 +10187,7 @@
         <p:spPr>
           <a:xfrm>
             <a:off x="159391" y="670023"/>
-            <a:ext cx="11841946" cy="836126"/>
+            <a:ext cx="11841946" cy="1451679"/>
           </a:xfrm>
           <a:prstGeom prst="rect">
             <a:avLst/>
@@ -9946,6 +10199,66 @@
             <a:spAutoFit/>
           </a:bodyPr>
           <a:lstStyle/>
+          <a:p>
+            <a:pPr lvl="0" algn="ctr">
+              <a:buClr>
+                <a:schemeClr val="dk1"/>
+              </a:buClr>
+              <a:buSzPts val="5200"/>
+            </a:pPr>
+            <a:r>
+              <a:rPr lang="ru-RU" dirty="0">
+                <a:solidFill>
+                  <a:schemeClr val="dk1"/>
+                </a:solidFill>
+                <a:latin typeface="Candara" panose="020E0502030303020204" pitchFamily="34" charset="0"/>
+                <a:ea typeface="Comfortaa"/>
+                <a:cs typeface="Comfortaa"/>
+                <a:sym typeface="Comfortaa"/>
+              </a:rPr>
+              <a:t>ФЕДЕРАЛЬНОЕ ГОСУДАРСТВЕННОЕ БЮДЖЕТНОЕ ОБРАЗОВАТЕЛЬНОЕ УЧРЕЖДЕНИЕ ВЫСШЕГО ОБРАЗОВАНИЯ </a:t>
+            </a:r>
+            <a:endParaRPr lang="ru-RU" dirty="0">
+              <a:latin typeface="Candara" panose="020E0502030303020204" pitchFamily="34" charset="0"/>
+              <a:ea typeface="Comfortaa"/>
+              <a:cs typeface="Comfortaa"/>
+              <a:sym typeface="Comfortaa"/>
+            </a:endParaRPr>
+          </a:p>
+          <a:p>
+            <a:pPr lvl="0" algn="ctr">
+              <a:buClr>
+                <a:schemeClr val="dk1"/>
+              </a:buClr>
+              <a:buSzPts val="5200"/>
+            </a:pPr>
+            <a:r>
+              <a:rPr lang="ru-RU" dirty="0">
+                <a:solidFill>
+                  <a:schemeClr val="dk1"/>
+                </a:solidFill>
+                <a:latin typeface="Candara" panose="020E0502030303020204" pitchFamily="34" charset="0"/>
+                <a:ea typeface="Comfortaa"/>
+                <a:cs typeface="Comfortaa"/>
+                <a:sym typeface="Comfortaa"/>
+              </a:rPr>
+              <a:t>«САРАТОВСКИЙ ГОСУДАРСТВЕННЫЙ ТЕХНИЧЕСКИЙ УНИВЕРСИТЕТ ИМЕНИ ГАГАРИНА Ю.А.»</a:t>
+            </a:r>
+          </a:p>
+          <a:p>
+            <a:pPr lvl="0" algn="ctr">
+              <a:buClr>
+                <a:schemeClr val="dk1"/>
+              </a:buClr>
+              <a:buSzPts val="5200"/>
+            </a:pPr>
+            <a:endParaRPr lang="ru-RU" sz="800" dirty="0">
+              <a:latin typeface="Candara" panose="020E0502030303020204" pitchFamily="34" charset="0"/>
+              <a:ea typeface="Comfortaa"/>
+              <a:cs typeface="Comfortaa"/>
+              <a:sym typeface="Comfortaa"/>
+            </a:endParaRPr>
+          </a:p>
           <a:p>
             <a:pPr indent="450215" algn="ctr">
               <a:spcAft>
@@ -9968,7 +10281,7 @@
               </a:tabLst>
             </a:pPr>
             <a:r>
-              <a:rPr lang="ru-RU" sz="2000" dirty="0">
+              <a:rPr lang="ru-RU" dirty="0">
                 <a:solidFill>
                   <a:srgbClr val="000000"/>
                 </a:solidFill>
@@ -9978,43 +10291,12 @@
                     <a:srgbClr val="000000"/>
                   </a:solidFill>
                 </a:uFill>
-                <a:latin typeface="+mj-lt"/>
+                <a:latin typeface="Candara" panose="020E0502030303020204" pitchFamily="34" charset="0"/>
                 <a:ea typeface="Arial Unicode MS"/>
                 <a:cs typeface="Arial Unicode MS"/>
               </a:rPr>
-              <a:t>Институт </a:t>
+              <a:t>Институт прикладных информационных технологий и коммуникаций</a:t>
             </a:r>
-            <a:r>
-              <a:rPr lang="ru-RU" sz="2000" u="sng" dirty="0">
-                <a:solidFill>
-                  <a:srgbClr val="000000"/>
-                </a:solidFill>
-                <a:effectLst/>
-                <a:uFill>
-                  <a:solidFill>
-                    <a:srgbClr val="000000"/>
-                  </a:solidFill>
-                </a:uFill>
-                <a:latin typeface="+mj-lt"/>
-                <a:ea typeface="Arial Unicode MS"/>
-                <a:cs typeface="Arial Unicode MS"/>
-              </a:rPr>
-              <a:t>прикладных информационных технологий и коммуникаций</a:t>
-            </a:r>
-            <a:endParaRPr lang="ru-RU" sz="2000" dirty="0">
-              <a:solidFill>
-                <a:srgbClr val="000000"/>
-              </a:solidFill>
-              <a:effectLst/>
-              <a:uFill>
-                <a:solidFill>
-                  <a:srgbClr val="000000"/>
-                </a:solidFill>
-              </a:uFill>
-              <a:latin typeface="+mj-lt"/>
-              <a:ea typeface="Arial Unicode MS"/>
-              <a:cs typeface="Arial Unicode MS"/>
-            </a:endParaRPr>
           </a:p>
           <a:p>
             <a:pPr indent="450215" algn="ctr">
@@ -10038,7 +10320,7 @@
               </a:tabLst>
             </a:pPr>
             <a:r>
-              <a:rPr lang="ru-RU" sz="2000" dirty="0">
+              <a:rPr lang="ru-RU" dirty="0">
                 <a:solidFill>
                   <a:srgbClr val="000000"/>
                 </a:solidFill>
@@ -10048,14 +10330,14 @@
                     <a:srgbClr val="000000"/>
                   </a:solidFill>
                 </a:uFill>
-                <a:latin typeface="+mj-lt"/>
+                <a:latin typeface="Candara" panose="020E0502030303020204" pitchFamily="34" charset="0"/>
                 <a:ea typeface="Arial Unicode MS"/>
                 <a:cs typeface="Arial Unicode MS"/>
               </a:rPr>
-              <a:t>Кафедра </a:t>
+              <a:t>Кафедра Прикладные информационные технологии</a:t>
             </a:r>
             <a:r>
-              <a:rPr lang="ru-RU" sz="2000" u="sng" dirty="0">
+              <a:rPr lang="en-US" dirty="0">
                 <a:solidFill>
                   <a:srgbClr val="000000"/>
                 </a:solidFill>
@@ -10065,13 +10347,13 @@
                     <a:srgbClr val="000000"/>
                   </a:solidFill>
                 </a:uFill>
-                <a:latin typeface="+mj-lt"/>
+                <a:latin typeface="Candara" panose="020E0502030303020204" pitchFamily="34" charset="0"/>
                 <a:ea typeface="Arial Unicode MS"/>
                 <a:cs typeface="Arial Unicode MS"/>
               </a:rPr>
-              <a:t>Прикладные информационные технологии</a:t>
+              <a:t> </a:t>
             </a:r>
-            <a:endParaRPr lang="ru-RU" sz="2000" dirty="0">
+            <a:endParaRPr lang="ru-RU" dirty="0">
               <a:solidFill>
                 <a:srgbClr val="000000"/>
               </a:solidFill>
@@ -10081,7 +10363,7 @@
                   <a:srgbClr val="000000"/>
                 </a:solidFill>
               </a:uFill>
-              <a:latin typeface="+mj-lt"/>
+              <a:latin typeface="Candara" panose="020E0502030303020204" pitchFamily="34" charset="0"/>
               <a:ea typeface="Arial Unicode MS"/>
               <a:cs typeface="Arial Unicode MS"/>
             </a:endParaRPr>
@@ -10135,9 +10417,9 @@
           </p:nvPr>
         </p:nvSpPr>
         <p:spPr>
-          <a:xfrm>
-            <a:off x="1037012" y="138023"/>
-            <a:ext cx="10117975" cy="1056351"/>
+          <a:xfrm rot="16200000">
+            <a:off x="-819220" y="3014591"/>
+            <a:ext cx="6858000" cy="828820"/>
           </a:xfrm>
         </p:spPr>
         <p:txBody>
@@ -10155,17 +10437,37 @@
                   </a:schemeClr>
                 </a:solidFill>
               </a:rPr>
-              <a:t>Диаграмма последовательности</a:t>
+              <a:t>ДИАГРАММА </a:t>
+            </a:r>
+            <a:r>
+              <a:rPr lang="en-US" sz="3600" b="1" dirty="0">
+                <a:solidFill>
+                  <a:schemeClr val="accent2">
+                    <a:lumMod val="50000"/>
+                  </a:schemeClr>
+                </a:solidFill>
+              </a:rPr>
+              <a:t>IDEF</a:t>
+            </a:r>
+            <a:r>
+              <a:rPr lang="ru-RU" sz="3600" b="1" dirty="0">
+                <a:solidFill>
+                  <a:schemeClr val="accent2">
+                    <a:lumMod val="50000"/>
+                  </a:schemeClr>
+                </a:solidFill>
+              </a:rPr>
+              <a:t>3</a:t>
             </a:r>
           </a:p>
         </p:txBody>
       </p:sp>
       <p:pic>
         <p:nvPicPr>
-          <p:cNvPr id="4" name="Рисунок 3">
+          <p:cNvPr id="5" name="Рисунок 4">
             <a:extLst>
               <a:ext uri="{FF2B5EF4-FFF2-40B4-BE49-F238E27FC236}">
-                <a16:creationId xmlns:a16="http://schemas.microsoft.com/office/drawing/2014/main" id="{1A1ACDEF-8BB4-4524-8F2F-B5CF9E272D06}"/>
+                <a16:creationId xmlns:a16="http://schemas.microsoft.com/office/drawing/2014/main" id="{86407F13-CF02-4CD2-8CE4-16D06570F76F}"/>
               </a:ext>
             </a:extLst>
           </p:cNvPr>
@@ -10173,7 +10475,7 @@
           <p:nvPr/>
         </p:nvPicPr>
         <p:blipFill>
-          <a:blip r:embed="rId2">
+          <a:blip r:embed="rId2" cstate="print">
             <a:extLst>
               <a:ext uri="{28A0092B-C50C-407E-A947-70E740481C1C}">
                 <a14:useLocalDpi xmlns:a14="http://schemas.microsoft.com/office/drawing/2010/main" val="0"/>
@@ -10187,13 +10489,16 @@
         </p:blipFill>
         <p:spPr bwMode="auto">
           <a:xfrm>
-            <a:off x="824604" y="1266350"/>
-            <a:ext cx="10542792" cy="4608237"/>
+            <a:off x="3024191" y="677235"/>
+            <a:ext cx="6967534" cy="5503529"/>
           </a:xfrm>
           <a:prstGeom prst="rect">
             <a:avLst/>
           </a:prstGeom>
           <a:noFill/>
+          <a:ln>
+            <a:noFill/>
+          </a:ln>
         </p:spPr>
       </p:pic>
     </p:spTree>
@@ -10231,7 +10536,7 @@
           <p:cNvPr id="2" name="Заголовок 1">
             <a:extLst>
               <a:ext uri="{FF2B5EF4-FFF2-40B4-BE49-F238E27FC236}">
-                <a16:creationId xmlns:a16="http://schemas.microsoft.com/office/drawing/2014/main" id="{6D2043EB-560B-44F4-8826-DC4A8C92371B}"/>
+                <a16:creationId xmlns:a16="http://schemas.microsoft.com/office/drawing/2014/main" id="{FFE226BE-C6AE-45AA-A385-720ADCF44DAD}"/>
               </a:ext>
             </a:extLst>
           </p:cNvPr>
@@ -10243,14 +10548,14 @@
           </p:nvPr>
         </p:nvSpPr>
         <p:spPr>
-          <a:xfrm>
-            <a:off x="838200" y="0"/>
-            <a:ext cx="10515600" cy="943558"/>
+          <a:xfrm rot="16200000">
+            <a:off x="-1243994" y="2927957"/>
+            <a:ext cx="6858000" cy="1002087"/>
           </a:xfrm>
         </p:spPr>
         <p:txBody>
           <a:bodyPr>
-            <a:normAutofit/>
+            <a:noAutofit/>
           </a:bodyPr>
           <a:lstStyle/>
           <a:p>
@@ -10263,23 +10568,40 @@
                   </a:schemeClr>
                 </a:solidFill>
               </a:rPr>
-              <a:t>Интерфейс</a:t>
+              <a:t>ДИАГРАММА </a:t>
+            </a:r>
+            <a:br>
+              <a:rPr lang="ru-RU" sz="3600" b="1" dirty="0">
+                <a:solidFill>
+                  <a:schemeClr val="accent2">
+                    <a:lumMod val="50000"/>
+                  </a:schemeClr>
+                </a:solidFill>
+              </a:rPr>
+            </a:br>
+            <a:r>
+              <a:rPr lang="ru-RU" sz="3600" b="1" dirty="0">
+                <a:solidFill>
+                  <a:schemeClr val="accent2">
+                    <a:lumMod val="50000"/>
+                  </a:schemeClr>
+                </a:solidFill>
+              </a:rPr>
+              <a:t>АКТИВНОСТИ</a:t>
             </a:r>
           </a:p>
         </p:txBody>
       </p:sp>
       <p:pic>
         <p:nvPicPr>
-          <p:cNvPr id="7" name="Рисунок 6">
+          <p:cNvPr id="4" name="Рисунок 3">
             <a:extLst>
               <a:ext uri="{FF2B5EF4-FFF2-40B4-BE49-F238E27FC236}">
-                <a16:creationId xmlns:a16="http://schemas.microsoft.com/office/drawing/2014/main" id="{82E76FAC-1153-47E1-9B72-904523E5562A}"/>
+                <a16:creationId xmlns:a16="http://schemas.microsoft.com/office/drawing/2014/main" id="{9FC05A8F-8E7F-4139-ADBE-394BB8C734C0}"/>
               </a:ext>
             </a:extLst>
           </p:cNvPr>
-          <p:cNvPicPr>
-            <a:picLocks noChangeAspect="1"/>
-          </p:cNvPicPr>
+          <p:cNvPicPr/>
           <p:nvPr/>
         </p:nvPicPr>
         <p:blipFill>
@@ -10287,6 +10609,9 @@
             <a:extLst>
               <a:ext uri="{28A0092B-C50C-407E-A947-70E740481C1C}">
                 <a14:useLocalDpi xmlns:a14="http://schemas.microsoft.com/office/drawing/2010/main" val="0"/>
+              </a:ext>
+              <a:ext uri="{96DAC541-7B7A-43D3-8B79-37D633B846F1}">
+                <asvg:svgBlip xmlns:asvg="http://schemas.microsoft.com/office/drawing/2016/SVG/main" r:embed="rId3"/>
               </a:ext>
             </a:extLst>
           </a:blip>
@@ -10296,8 +10621,8 @@
         </p:blipFill>
         <p:spPr>
           <a:xfrm>
-            <a:off x="1109270" y="943558"/>
-            <a:ext cx="9973460" cy="5616633"/>
+            <a:off x="2686050" y="222823"/>
+            <a:ext cx="7912221" cy="6412354"/>
           </a:xfrm>
           <a:prstGeom prst="rect">
             <a:avLst/>
@@ -10307,7 +10632,7 @@
     </p:spTree>
     <p:extLst>
       <p:ext uri="{BB962C8B-B14F-4D97-AF65-F5344CB8AC3E}">
-        <p14:creationId xmlns:p14="http://schemas.microsoft.com/office/powerpoint/2010/main" val="3060085501"/>
+        <p14:creationId xmlns:p14="http://schemas.microsoft.com/office/powerpoint/2010/main" val="1122859262"/>
       </p:ext>
     </p:extLst>
   </p:cSld>
@@ -10339,7 +10664,7 @@
           <p:cNvPr id="2" name="Заголовок 1">
             <a:extLst>
               <a:ext uri="{FF2B5EF4-FFF2-40B4-BE49-F238E27FC236}">
-                <a16:creationId xmlns:a16="http://schemas.microsoft.com/office/drawing/2014/main" id="{6D2043EB-560B-44F4-8826-DC4A8C92371B}"/>
+                <a16:creationId xmlns:a16="http://schemas.microsoft.com/office/drawing/2014/main" id="{94AB1114-2E3C-4ABF-89D4-C103C0381824}"/>
               </a:ext>
             </a:extLst>
           </p:cNvPr>
@@ -10351,14 +10676,14 @@
           </p:nvPr>
         </p:nvSpPr>
         <p:spPr>
-          <a:xfrm>
-            <a:off x="838200" y="0"/>
-            <a:ext cx="10515600" cy="943558"/>
+          <a:xfrm rot="16200000">
+            <a:off x="-410762" y="2953213"/>
+            <a:ext cx="6962777" cy="1056351"/>
           </a:xfrm>
         </p:spPr>
         <p:txBody>
           <a:bodyPr>
-            <a:normAutofit/>
+            <a:noAutofit/>
           </a:bodyPr>
           <a:lstStyle/>
           <a:p>
@@ -10371,7 +10696,7 @@
                   </a:schemeClr>
                 </a:solidFill>
               </a:rPr>
-              <a:t>Интерфейс</a:t>
+              <a:t>ДИАГРАММА ПОСЛЕДОВАТЕЛЬНОСТИ</a:t>
             </a:r>
           </a:p>
         </p:txBody>
@@ -10381,13 +10706,11 @@
           <p:cNvPr id="4" name="Рисунок 3">
             <a:extLst>
               <a:ext uri="{FF2B5EF4-FFF2-40B4-BE49-F238E27FC236}">
-                <a16:creationId xmlns:a16="http://schemas.microsoft.com/office/drawing/2014/main" id="{DC2AE8CE-39A2-48DC-8B51-CCC2D3BE3D75}"/>
+                <a16:creationId xmlns:a16="http://schemas.microsoft.com/office/drawing/2014/main" id="{CD8BB43A-4B0D-41CE-996A-2DA2012FA0A1}"/>
               </a:ext>
             </a:extLst>
           </p:cNvPr>
-          <p:cNvPicPr>
-            <a:picLocks noChangeAspect="1"/>
-          </p:cNvPicPr>
+          <p:cNvPicPr/>
           <p:nvPr/>
         </p:nvPicPr>
         <p:blipFill>
@@ -10395,6 +10718,9 @@
             <a:extLst>
               <a:ext uri="{28A0092B-C50C-407E-A947-70E740481C1C}">
                 <a14:useLocalDpi xmlns:a14="http://schemas.microsoft.com/office/drawing/2010/main" val="0"/>
+              </a:ext>
+              <a:ext uri="{96DAC541-7B7A-43D3-8B79-37D633B846F1}">
+                <asvg:svgBlip xmlns:asvg="http://schemas.microsoft.com/office/drawing/2016/SVG/main" r:embed="rId3"/>
               </a:ext>
             </a:extLst>
           </a:blip>
@@ -10404,8 +10730,8 @@
         </p:blipFill>
         <p:spPr>
           <a:xfrm>
-            <a:off x="1504001" y="943558"/>
-            <a:ext cx="9183998" cy="5637606"/>
+            <a:off x="3598803" y="0"/>
+            <a:ext cx="6074569" cy="6858000"/>
           </a:xfrm>
           <a:prstGeom prst="rect">
             <a:avLst/>
@@ -10415,7 +10741,7 @@
     </p:spTree>
     <p:extLst>
       <p:ext uri="{BB962C8B-B14F-4D97-AF65-F5344CB8AC3E}">
-        <p14:creationId xmlns:p14="http://schemas.microsoft.com/office/powerpoint/2010/main" val="3552263146"/>
+        <p14:creationId xmlns:p14="http://schemas.microsoft.com/office/powerpoint/2010/main" val="1778410790"/>
       </p:ext>
     </p:extLst>
   </p:cSld>
@@ -10460,8 +10786,8 @@
         </p:nvSpPr>
         <p:spPr>
           <a:xfrm>
-            <a:off x="838200" y="0"/>
-            <a:ext cx="10515600" cy="943558"/>
+            <a:off x="838200" y="3032297"/>
+            <a:ext cx="10515600" cy="652754"/>
           </a:xfrm>
         </p:spPr>
         <p:txBody>
@@ -10472,24 +10798,24 @@
           <a:p>
             <a:pPr algn="ctr"/>
             <a:r>
-              <a:rPr lang="ru-RU" sz="3600" b="1" dirty="0">
+              <a:rPr lang="ru-RU" sz="4000" b="1" dirty="0">
                 <a:solidFill>
                   <a:schemeClr val="accent2">
                     <a:lumMod val="50000"/>
                   </a:schemeClr>
                 </a:solidFill>
               </a:rPr>
-              <a:t>Интерфейс</a:t>
+              <a:t>ДЕМОНСТРАЦИЯ ПО</a:t>
             </a:r>
           </a:p>
         </p:txBody>
       </p:sp>
       <p:pic>
         <p:nvPicPr>
-          <p:cNvPr id="4" name="Рисунок 3">
+          <p:cNvPr id="5" name="Рисунок 4">
             <a:extLst>
               <a:ext uri="{FF2B5EF4-FFF2-40B4-BE49-F238E27FC236}">
-                <a16:creationId xmlns:a16="http://schemas.microsoft.com/office/drawing/2014/main" id="{062629AA-539F-48B9-9084-1DDB65BDEB29}"/>
+                <a16:creationId xmlns:a16="http://schemas.microsoft.com/office/drawing/2014/main" id="{1BF3424A-9905-483D-8F3B-3E121365FFD8}"/>
               </a:ext>
             </a:extLst>
           </p:cNvPr>
@@ -10499,21 +10825,161 @@
           <p:nvPr/>
         </p:nvPicPr>
         <p:blipFill>
-          <a:blip r:embed="rId2">
-            <a:extLst>
-              <a:ext uri="{28A0092B-C50C-407E-A947-70E740481C1C}">
-                <a14:useLocalDpi xmlns:a14="http://schemas.microsoft.com/office/drawing/2010/main" val="0"/>
-              </a:ext>
-            </a:extLst>
-          </a:blip>
+          <a:blip r:embed="rId2"/>
           <a:stretch>
             <a:fillRect/>
           </a:stretch>
         </p:blipFill>
         <p:spPr>
+          <a:xfrm rot="21252894">
+            <a:off x="8541109" y="3492015"/>
+            <a:ext cx="1072188" cy="1256577"/>
+          </a:xfrm>
+          <a:prstGeom prst="rect">
+            <a:avLst/>
+          </a:prstGeom>
+        </p:spPr>
+      </p:pic>
+      <p:pic>
+        <p:nvPicPr>
+          <p:cNvPr id="10" name="Рисунок 9">
+            <a:extLst>
+              <a:ext uri="{FF2B5EF4-FFF2-40B4-BE49-F238E27FC236}">
+                <a16:creationId xmlns:a16="http://schemas.microsoft.com/office/drawing/2014/main" id="{63294167-60A1-412D-81B4-2F8A9E695188}"/>
+              </a:ext>
+            </a:extLst>
+          </p:cNvPr>
+          <p:cNvPicPr>
+            <a:picLocks noChangeAspect="1"/>
+          </p:cNvPicPr>
+          <p:nvPr/>
+        </p:nvPicPr>
+        <p:blipFill>
+          <a:blip r:embed="rId2"/>
+          <a:stretch>
+            <a:fillRect/>
+          </a:stretch>
+        </p:blipFill>
+        <p:spPr>
+          <a:xfrm rot="4804076">
+            <a:off x="2452428" y="1690859"/>
+            <a:ext cx="1325316" cy="1553236"/>
+          </a:xfrm>
+          <a:prstGeom prst="rect">
+            <a:avLst/>
+          </a:prstGeom>
+        </p:spPr>
+      </p:pic>
+      <p:pic>
+        <p:nvPicPr>
+          <p:cNvPr id="11" name="Рисунок 10">
+            <a:extLst>
+              <a:ext uri="{FF2B5EF4-FFF2-40B4-BE49-F238E27FC236}">
+                <a16:creationId xmlns:a16="http://schemas.microsoft.com/office/drawing/2014/main" id="{B2683DB0-B74B-4ED6-B806-8337BA4DABA4}"/>
+              </a:ext>
+            </a:extLst>
+          </p:cNvPr>
+          <p:cNvPicPr>
+            <a:picLocks noChangeAspect="1"/>
+          </p:cNvPicPr>
+          <p:nvPr/>
+        </p:nvPicPr>
+        <p:blipFill rotWithShape="1">
+          <a:blip r:embed="rId3"/>
+          <a:srcRect l="64051" t="5929" r="7391" b="66186"/>
+          <a:stretch/>
+        </p:blipFill>
+        <p:spPr>
           <a:xfrm>
-            <a:off x="783348" y="1136505"/>
-            <a:ext cx="10625303" cy="5079737"/>
+            <a:off x="8480508" y="2708336"/>
+            <a:ext cx="474657" cy="463489"/>
+          </a:xfrm>
+          <a:prstGeom prst="rect">
+            <a:avLst/>
+          </a:prstGeom>
+        </p:spPr>
+      </p:pic>
+      <p:pic>
+        <p:nvPicPr>
+          <p:cNvPr id="12" name="Рисунок 11">
+            <a:extLst>
+              <a:ext uri="{FF2B5EF4-FFF2-40B4-BE49-F238E27FC236}">
+                <a16:creationId xmlns:a16="http://schemas.microsoft.com/office/drawing/2014/main" id="{FBBBC255-75DE-42DB-839A-E7E441A715B8}"/>
+              </a:ext>
+            </a:extLst>
+          </p:cNvPr>
+          <p:cNvPicPr>
+            <a:picLocks noChangeAspect="1"/>
+          </p:cNvPicPr>
+          <p:nvPr/>
+        </p:nvPicPr>
+        <p:blipFill rotWithShape="1">
+          <a:blip r:embed="rId3"/>
+          <a:srcRect l="64051" t="5929" r="7391" b="66186"/>
+          <a:stretch/>
+        </p:blipFill>
+        <p:spPr>
+          <a:xfrm>
+            <a:off x="8801100" y="2142574"/>
+            <a:ext cx="828675" cy="809179"/>
+          </a:xfrm>
+          <a:prstGeom prst="rect">
+            <a:avLst/>
+          </a:prstGeom>
+        </p:spPr>
+      </p:pic>
+      <p:pic>
+        <p:nvPicPr>
+          <p:cNvPr id="6" name="Рисунок 5">
+            <a:extLst>
+              <a:ext uri="{FF2B5EF4-FFF2-40B4-BE49-F238E27FC236}">
+                <a16:creationId xmlns:a16="http://schemas.microsoft.com/office/drawing/2014/main" id="{3B5D3176-6590-4FB1-98C2-F982D4D6B5BB}"/>
+              </a:ext>
+            </a:extLst>
+          </p:cNvPr>
+          <p:cNvPicPr>
+            <a:picLocks noChangeAspect="1"/>
+          </p:cNvPicPr>
+          <p:nvPr/>
+        </p:nvPicPr>
+        <p:blipFill rotWithShape="1">
+          <a:blip r:embed="rId3"/>
+          <a:srcRect l="64051" t="5929" r="7391" b="66186"/>
+          <a:stretch/>
+        </p:blipFill>
+        <p:spPr>
+          <a:xfrm>
+            <a:off x="2950695" y="3476015"/>
+            <a:ext cx="436612" cy="426340"/>
+          </a:xfrm>
+          <a:prstGeom prst="rect">
+            <a:avLst/>
+          </a:prstGeom>
+        </p:spPr>
+      </p:pic>
+      <p:pic>
+        <p:nvPicPr>
+          <p:cNvPr id="13" name="Рисунок 12">
+            <a:extLst>
+              <a:ext uri="{FF2B5EF4-FFF2-40B4-BE49-F238E27FC236}">
+                <a16:creationId xmlns:a16="http://schemas.microsoft.com/office/drawing/2014/main" id="{6C2F57A9-B2B7-47B3-9A48-51D5C5DD74B4}"/>
+              </a:ext>
+            </a:extLst>
+          </p:cNvPr>
+          <p:cNvPicPr>
+            <a:picLocks noChangeAspect="1"/>
+          </p:cNvPicPr>
+          <p:nvPr/>
+        </p:nvPicPr>
+        <p:blipFill rotWithShape="1">
+          <a:blip r:embed="rId3"/>
+          <a:srcRect l="64051" t="5929" r="7391" b="66186"/>
+          <a:stretch/>
+        </p:blipFill>
+        <p:spPr>
+          <a:xfrm>
+            <a:off x="3194202" y="3765595"/>
+            <a:ext cx="754588" cy="736835"/>
           </a:xfrm>
           <a:prstGeom prst="rect">
             <a:avLst/>
@@ -10523,7 +10989,7 @@
     </p:spTree>
     <p:extLst>
       <p:ext uri="{BB962C8B-B14F-4D97-AF65-F5344CB8AC3E}">
-        <p14:creationId xmlns:p14="http://schemas.microsoft.com/office/powerpoint/2010/main" val="1177266689"/>
+        <p14:creationId xmlns:p14="http://schemas.microsoft.com/office/powerpoint/2010/main" val="3060085501"/>
       </p:ext>
     </p:extLst>
   </p:cSld>
@@ -10534,453 +11000,6 @@
 </file>
 
 <file path=ppt/slides/slide14.xml><?xml version="1.0" encoding="utf-8"?>
-<p:sld xmlns:a="http://schemas.openxmlformats.org/drawingml/2006/main" xmlns:r="http://schemas.openxmlformats.org/officeDocument/2006/relationships" xmlns:p="http://schemas.openxmlformats.org/presentationml/2006/main">
-  <p:cSld>
-    <p:spTree>
-      <p:nvGrpSpPr>
-        <p:cNvPr id="1" name=""/>
-        <p:cNvGrpSpPr/>
-        <p:nvPr/>
-      </p:nvGrpSpPr>
-      <p:grpSpPr>
-        <a:xfrm>
-          <a:off x="0" y="0"/>
-          <a:ext cx="0" cy="0"/>
-          <a:chOff x="0" y="0"/>
-          <a:chExt cx="0" cy="0"/>
-        </a:xfrm>
-      </p:grpSpPr>
-      <p:sp>
-        <p:nvSpPr>
-          <p:cNvPr id="2" name="Заголовок 1">
-            <a:extLst>
-              <a:ext uri="{FF2B5EF4-FFF2-40B4-BE49-F238E27FC236}">
-                <a16:creationId xmlns:a16="http://schemas.microsoft.com/office/drawing/2014/main" id="{6D2043EB-560B-44F4-8826-DC4A8C92371B}"/>
-              </a:ext>
-            </a:extLst>
-          </p:cNvPr>
-          <p:cNvSpPr>
-            <a:spLocks noGrp="1"/>
-          </p:cNvSpPr>
-          <p:nvPr>
-            <p:ph type="title"/>
-          </p:nvPr>
-        </p:nvSpPr>
-        <p:spPr>
-          <a:xfrm>
-            <a:off x="838200" y="0"/>
-            <a:ext cx="10515600" cy="943558"/>
-          </a:xfrm>
-        </p:spPr>
-        <p:txBody>
-          <a:bodyPr>
-            <a:normAutofit/>
-          </a:bodyPr>
-          <a:lstStyle/>
-          <a:p>
-            <a:pPr algn="ctr"/>
-            <a:r>
-              <a:rPr lang="ru-RU" sz="3600" b="1" dirty="0">
-                <a:solidFill>
-                  <a:schemeClr val="accent2">
-                    <a:lumMod val="50000"/>
-                  </a:schemeClr>
-                </a:solidFill>
-              </a:rPr>
-              <a:t>Интерфейс</a:t>
-            </a:r>
-          </a:p>
-        </p:txBody>
-      </p:sp>
-      <p:pic>
-        <p:nvPicPr>
-          <p:cNvPr id="4" name="Рисунок 3">
-            <a:extLst>
-              <a:ext uri="{FF2B5EF4-FFF2-40B4-BE49-F238E27FC236}">
-                <a16:creationId xmlns:a16="http://schemas.microsoft.com/office/drawing/2014/main" id="{7F315741-0190-480E-B7EF-677880A969EF}"/>
-              </a:ext>
-            </a:extLst>
-          </p:cNvPr>
-          <p:cNvPicPr>
-            <a:picLocks noChangeAspect="1"/>
-          </p:cNvPicPr>
-          <p:nvPr/>
-        </p:nvPicPr>
-        <p:blipFill>
-          <a:blip r:embed="rId2">
-            <a:extLst>
-              <a:ext uri="{28A0092B-C50C-407E-A947-70E740481C1C}">
-                <a14:useLocalDpi xmlns:a14="http://schemas.microsoft.com/office/drawing/2010/main" val="0"/>
-              </a:ext>
-            </a:extLst>
-          </a:blip>
-          <a:stretch>
-            <a:fillRect/>
-          </a:stretch>
-        </p:blipFill>
-        <p:spPr>
-          <a:xfrm>
-            <a:off x="1515611" y="943558"/>
-            <a:ext cx="9160778" cy="5610015"/>
-          </a:xfrm>
-          <a:prstGeom prst="rect">
-            <a:avLst/>
-          </a:prstGeom>
-        </p:spPr>
-      </p:pic>
-    </p:spTree>
-    <p:extLst>
-      <p:ext uri="{BB962C8B-B14F-4D97-AF65-F5344CB8AC3E}">
-        <p14:creationId xmlns:p14="http://schemas.microsoft.com/office/powerpoint/2010/main" val="2667829031"/>
-      </p:ext>
-    </p:extLst>
-  </p:cSld>
-  <p:clrMapOvr>
-    <a:masterClrMapping/>
-  </p:clrMapOvr>
-</p:sld>
-</file>
-
-<file path=ppt/slides/slide15.xml><?xml version="1.0" encoding="utf-8"?>
-<p:sld xmlns:a="http://schemas.openxmlformats.org/drawingml/2006/main" xmlns:r="http://schemas.openxmlformats.org/officeDocument/2006/relationships" xmlns:p="http://schemas.openxmlformats.org/presentationml/2006/main">
-  <p:cSld>
-    <p:spTree>
-      <p:nvGrpSpPr>
-        <p:cNvPr id="1" name=""/>
-        <p:cNvGrpSpPr/>
-        <p:nvPr/>
-      </p:nvGrpSpPr>
-      <p:grpSpPr>
-        <a:xfrm>
-          <a:off x="0" y="0"/>
-          <a:ext cx="0" cy="0"/>
-          <a:chOff x="0" y="0"/>
-          <a:chExt cx="0" cy="0"/>
-        </a:xfrm>
-      </p:grpSpPr>
-      <p:sp>
-        <p:nvSpPr>
-          <p:cNvPr id="2" name="Заголовок 1">
-            <a:extLst>
-              <a:ext uri="{FF2B5EF4-FFF2-40B4-BE49-F238E27FC236}">
-                <a16:creationId xmlns:a16="http://schemas.microsoft.com/office/drawing/2014/main" id="{6D2043EB-560B-44F4-8826-DC4A8C92371B}"/>
-              </a:ext>
-            </a:extLst>
-          </p:cNvPr>
-          <p:cNvSpPr>
-            <a:spLocks noGrp="1"/>
-          </p:cNvSpPr>
-          <p:nvPr>
-            <p:ph type="title"/>
-          </p:nvPr>
-        </p:nvSpPr>
-        <p:spPr>
-          <a:xfrm>
-            <a:off x="838200" y="0"/>
-            <a:ext cx="10515600" cy="943558"/>
-          </a:xfrm>
-        </p:spPr>
-        <p:txBody>
-          <a:bodyPr>
-            <a:normAutofit/>
-          </a:bodyPr>
-          <a:lstStyle/>
-          <a:p>
-            <a:pPr algn="ctr"/>
-            <a:r>
-              <a:rPr lang="ru-RU" sz="3600" b="1" dirty="0">
-                <a:solidFill>
-                  <a:schemeClr val="accent2">
-                    <a:lumMod val="50000"/>
-                  </a:schemeClr>
-                </a:solidFill>
-              </a:rPr>
-              <a:t>Интерфейс</a:t>
-            </a:r>
-          </a:p>
-        </p:txBody>
-      </p:sp>
-      <p:pic>
-        <p:nvPicPr>
-          <p:cNvPr id="4" name="Рисунок 3">
-            <a:extLst>
-              <a:ext uri="{FF2B5EF4-FFF2-40B4-BE49-F238E27FC236}">
-                <a16:creationId xmlns:a16="http://schemas.microsoft.com/office/drawing/2014/main" id="{DF2D1AE8-FD91-4082-A87B-DABA6CCD30B2}"/>
-              </a:ext>
-            </a:extLst>
-          </p:cNvPr>
-          <p:cNvPicPr>
-            <a:picLocks noChangeAspect="1"/>
-          </p:cNvPicPr>
-          <p:nvPr/>
-        </p:nvPicPr>
-        <p:blipFill>
-          <a:blip r:embed="rId2">
-            <a:extLst>
-              <a:ext uri="{28A0092B-C50C-407E-A947-70E740481C1C}">
-                <a14:useLocalDpi xmlns:a14="http://schemas.microsoft.com/office/drawing/2010/main" val="0"/>
-              </a:ext>
-            </a:extLst>
-          </a:blip>
-          <a:stretch>
-            <a:fillRect/>
-          </a:stretch>
-        </p:blipFill>
-        <p:spPr>
-          <a:xfrm>
-            <a:off x="524312" y="1082358"/>
-            <a:ext cx="11143376" cy="5291938"/>
-          </a:xfrm>
-          <a:prstGeom prst="rect">
-            <a:avLst/>
-          </a:prstGeom>
-        </p:spPr>
-      </p:pic>
-    </p:spTree>
-    <p:extLst>
-      <p:ext uri="{BB962C8B-B14F-4D97-AF65-F5344CB8AC3E}">
-        <p14:creationId xmlns:p14="http://schemas.microsoft.com/office/powerpoint/2010/main" val="3847107569"/>
-      </p:ext>
-    </p:extLst>
-  </p:cSld>
-  <p:clrMapOvr>
-    <a:masterClrMapping/>
-  </p:clrMapOvr>
-</p:sld>
-</file>
-
-<file path=ppt/slides/slide16.xml><?xml version="1.0" encoding="utf-8"?>
-<p:sld xmlns:a="http://schemas.openxmlformats.org/drawingml/2006/main" xmlns:r="http://schemas.openxmlformats.org/officeDocument/2006/relationships" xmlns:p="http://schemas.openxmlformats.org/presentationml/2006/main">
-  <p:cSld>
-    <p:spTree>
-      <p:nvGrpSpPr>
-        <p:cNvPr id="1" name=""/>
-        <p:cNvGrpSpPr/>
-        <p:nvPr/>
-      </p:nvGrpSpPr>
-      <p:grpSpPr>
-        <a:xfrm>
-          <a:off x="0" y="0"/>
-          <a:ext cx="0" cy="0"/>
-          <a:chOff x="0" y="0"/>
-          <a:chExt cx="0" cy="0"/>
-        </a:xfrm>
-      </p:grpSpPr>
-      <p:sp>
-        <p:nvSpPr>
-          <p:cNvPr id="2" name="Заголовок 1">
-            <a:extLst>
-              <a:ext uri="{FF2B5EF4-FFF2-40B4-BE49-F238E27FC236}">
-                <a16:creationId xmlns:a16="http://schemas.microsoft.com/office/drawing/2014/main" id="{E2A4DF2C-A67D-4AEA-B504-621F51BCF9B0}"/>
-              </a:ext>
-            </a:extLst>
-          </p:cNvPr>
-          <p:cNvSpPr>
-            <a:spLocks noGrp="1"/>
-          </p:cNvSpPr>
-          <p:nvPr>
-            <p:ph type="title"/>
-          </p:nvPr>
-        </p:nvSpPr>
-        <p:spPr>
-          <a:xfrm>
-            <a:off x="838200" y="214795"/>
-            <a:ext cx="10515600" cy="983411"/>
-          </a:xfrm>
-        </p:spPr>
-        <p:txBody>
-          <a:bodyPr>
-            <a:normAutofit/>
-          </a:bodyPr>
-          <a:lstStyle/>
-          <a:p>
-            <a:pPr algn="ctr"/>
-            <a:r>
-              <a:rPr lang="ru-RU" sz="3600" b="1" dirty="0">
-                <a:solidFill>
-                  <a:schemeClr val="accent2">
-                    <a:lumMod val="50000"/>
-                  </a:schemeClr>
-                </a:solidFill>
-              </a:rPr>
-              <a:t>Состояние работы</a:t>
-            </a:r>
-          </a:p>
-        </p:txBody>
-      </p:sp>
-      <p:sp>
-        <p:nvSpPr>
-          <p:cNvPr id="4" name="Прямоугольник 3">
-            <a:extLst>
-              <a:ext uri="{FF2B5EF4-FFF2-40B4-BE49-F238E27FC236}">
-                <a16:creationId xmlns:a16="http://schemas.microsoft.com/office/drawing/2014/main" id="{A4282C4B-5994-452F-8133-8CEDF9999E33}"/>
-              </a:ext>
-            </a:extLst>
-          </p:cNvPr>
-          <p:cNvSpPr/>
-          <p:nvPr/>
-        </p:nvSpPr>
-        <p:spPr>
-          <a:xfrm>
-            <a:off x="1622845" y="1180953"/>
-            <a:ext cx="8946310" cy="5262979"/>
-          </a:xfrm>
-          <a:prstGeom prst="rect">
-            <a:avLst/>
-          </a:prstGeom>
-        </p:spPr>
-        <p:txBody>
-          <a:bodyPr wrap="square">
-            <a:spAutoFit/>
-          </a:bodyPr>
-          <a:lstStyle/>
-          <a:p>
-            <a:r>
-              <a:rPr lang="ru-RU" sz="2400" b="1" dirty="0">
-                <a:solidFill>
-                  <a:schemeClr val="accent2">
-                    <a:lumMod val="50000"/>
-                  </a:schemeClr>
-                </a:solidFill>
-              </a:rPr>
-              <a:t>На текущем этапе выполнено:</a:t>
-            </a:r>
-            <a:endParaRPr lang="ru-RU" sz="2400" dirty="0">
-              <a:solidFill>
-                <a:schemeClr val="accent2">
-                  <a:lumMod val="50000"/>
-                </a:schemeClr>
-              </a:solidFill>
-            </a:endParaRPr>
-          </a:p>
-          <a:p>
-            <a:pPr marL="514350" indent="-514350">
-              <a:buFont typeface="+mj-lt"/>
-              <a:buAutoNum type="arabicPeriod"/>
-            </a:pPr>
-            <a:r>
-              <a:rPr lang="ru-RU" sz="2400" dirty="0"/>
-              <a:t>Проведен анализ предметной области;</a:t>
-            </a:r>
-          </a:p>
-          <a:p>
-            <a:pPr marL="514350" indent="-514350">
-              <a:buFont typeface="+mj-lt"/>
-              <a:buAutoNum type="arabicPeriod"/>
-            </a:pPr>
-            <a:r>
-              <a:rPr lang="ru-RU" sz="2400" dirty="0"/>
-              <a:t>Разработан комплект моделей: IDEF0, IDEF3, DFD;</a:t>
-            </a:r>
-          </a:p>
-          <a:p>
-            <a:pPr marL="514350" indent="-514350">
-              <a:buFont typeface="+mj-lt"/>
-              <a:buAutoNum type="arabicPeriod"/>
-            </a:pPr>
-            <a:r>
-              <a:rPr lang="ru-RU" sz="2400" dirty="0"/>
-              <a:t>Разработаны диаграммы процессов (UML);</a:t>
-            </a:r>
-          </a:p>
-          <a:p>
-            <a:pPr marL="514350" indent="-514350">
-              <a:buFont typeface="+mj-lt"/>
-              <a:buAutoNum type="arabicPeriod"/>
-            </a:pPr>
-            <a:r>
-              <a:rPr lang="ru-RU" sz="2400" dirty="0"/>
-              <a:t>Спроектирована архитектура системы;</a:t>
-            </a:r>
-          </a:p>
-          <a:p>
-            <a:pPr marL="514350" indent="-514350">
-              <a:buFont typeface="+mj-lt"/>
-              <a:buAutoNum type="arabicPeriod"/>
-            </a:pPr>
-            <a:r>
-              <a:rPr lang="ru-RU" sz="2400" dirty="0"/>
-              <a:t>Определен технологический стек для практической реализации;</a:t>
-            </a:r>
-          </a:p>
-          <a:p>
-            <a:pPr marL="514350" indent="-514350">
-              <a:buFont typeface="+mj-lt"/>
-              <a:buAutoNum type="arabicPeriod"/>
-            </a:pPr>
-            <a:r>
-              <a:rPr lang="ru-RU" sz="2400" dirty="0"/>
-              <a:t>Разработан прототип интерфейса.</a:t>
-            </a:r>
-          </a:p>
-          <a:p>
-            <a:endParaRPr lang="ru-RU" sz="2400" dirty="0"/>
-          </a:p>
-          <a:p>
-            <a:r>
-              <a:rPr lang="ru-RU" sz="2400" b="1" dirty="0">
-                <a:solidFill>
-                  <a:schemeClr val="accent2">
-                    <a:lumMod val="50000"/>
-                  </a:schemeClr>
-                </a:solidFill>
-              </a:rPr>
-              <a:t>Планируется к выполнению на следующем этапе:</a:t>
-            </a:r>
-            <a:endParaRPr lang="ru-RU" sz="2400" dirty="0">
-              <a:solidFill>
-                <a:schemeClr val="accent2">
-                  <a:lumMod val="50000"/>
-                </a:schemeClr>
-              </a:solidFill>
-            </a:endParaRPr>
-          </a:p>
-          <a:p>
-            <a:pPr marL="514350" indent="-514350">
-              <a:buFont typeface="+mj-lt"/>
-              <a:buAutoNum type="arabicPeriod"/>
-            </a:pPr>
-            <a:r>
-              <a:rPr lang="ru-RU" sz="2400" dirty="0"/>
-              <a:t>Разработка модуля базовой интеграции с источниками данных;</a:t>
-            </a:r>
-          </a:p>
-          <a:p>
-            <a:pPr marL="514350" indent="-514350">
-              <a:buFont typeface="+mj-lt"/>
-              <a:buAutoNum type="arabicPeriod"/>
-            </a:pPr>
-            <a:r>
-              <a:rPr lang="ru-RU" sz="2400" dirty="0"/>
-              <a:t>Детальное проектирование базы данных;</a:t>
-            </a:r>
-          </a:p>
-          <a:p>
-            <a:pPr marL="514350" indent="-514350">
-              <a:buFont typeface="+mj-lt"/>
-              <a:buAutoNum type="arabicPeriod"/>
-            </a:pPr>
-            <a:r>
-              <a:rPr lang="ru-RU" sz="2400" dirty="0"/>
-              <a:t>Разработка ПО.</a:t>
-            </a:r>
-          </a:p>
-        </p:txBody>
-      </p:sp>
-    </p:spTree>
-    <p:extLst>
-      <p:ext uri="{BB962C8B-B14F-4D97-AF65-F5344CB8AC3E}">
-        <p14:creationId xmlns:p14="http://schemas.microsoft.com/office/powerpoint/2010/main" val="860325995"/>
-      </p:ext>
-    </p:extLst>
-  </p:cSld>
-  <p:clrMapOvr>
-    <a:masterClrMapping/>
-  </p:clrMapOvr>
-</p:sld>
-</file>
-
-<file path=ppt/slides/slide17.xml><?xml version="1.0" encoding="utf-8"?>
 <p:sld xmlns:a="http://schemas.openxmlformats.org/drawingml/2006/main" xmlns:r="http://schemas.openxmlformats.org/officeDocument/2006/relationships" xmlns:p="http://schemas.openxmlformats.org/presentationml/2006/main">
   <p:cSld>
     <p:spTree>
@@ -11011,7 +11030,7 @@
           </p:cNvPicPr>
           <p:nvPr/>
         </p:nvPicPr>
-        <p:blipFill>
+        <p:blipFill rotWithShape="1">
           <a:blip r:embed="rId2">
             <a:extLst>
               <a:ext uri="{28A0092B-C50C-407E-A947-70E740481C1C}">
@@ -11019,14 +11038,13 @@
               </a:ext>
             </a:extLst>
           </a:blip>
-          <a:stretch>
-            <a:fillRect/>
-          </a:stretch>
+          <a:srcRect l="5296" t="25247" r="28724" b="20425"/>
+          <a:stretch/>
         </p:blipFill>
         <p:spPr>
           <a:xfrm>
-            <a:off x="2335305" y="215658"/>
-            <a:ext cx="7521388" cy="7521388"/>
+            <a:off x="3095624" y="1485900"/>
+            <a:ext cx="6000750" cy="4941117"/>
           </a:xfrm>
           <a:prstGeom prst="rect">
             <a:avLst/>
@@ -11047,8 +11065,8 @@
         </p:nvSpPr>
         <p:spPr>
           <a:xfrm>
-            <a:off x="2519655" y="1042949"/>
-            <a:ext cx="7152689" cy="769441"/>
+            <a:off x="2519654" y="778014"/>
+            <a:ext cx="7152689" cy="707886"/>
           </a:xfrm>
           <a:prstGeom prst="rect">
             <a:avLst/>
@@ -11063,7 +11081,7 @@
           <a:p>
             <a:pPr algn="ctr"/>
             <a:r>
-              <a:rPr lang="ru-RU" sz="4400" b="1" dirty="0">
+              <a:rPr lang="ru-RU" sz="4000" b="1" dirty="0">
                 <a:solidFill>
                   <a:schemeClr val="accent2">
                     <a:lumMod val="50000"/>
@@ -11071,11 +11089,127 @@
                 </a:solidFill>
                 <a:latin typeface="+mj-lt"/>
               </a:rPr>
-              <a:t>Спасибо за внимание!</a:t>
+              <a:t>СПАСИБО ЗА ВНИМАНИЕ!</a:t>
             </a:r>
           </a:p>
         </p:txBody>
       </p:sp>
+      <p:pic>
+        <p:nvPicPr>
+          <p:cNvPr id="5" name="Рисунок 4">
+            <a:extLst>
+              <a:ext uri="{FF2B5EF4-FFF2-40B4-BE49-F238E27FC236}">
+                <a16:creationId xmlns:a16="http://schemas.microsoft.com/office/drawing/2014/main" id="{48F2B40B-20A9-4864-807A-D6B3D8BC9CD7}"/>
+              </a:ext>
+            </a:extLst>
+          </p:cNvPr>
+          <p:cNvPicPr>
+            <a:picLocks noChangeAspect="1"/>
+          </p:cNvPicPr>
+          <p:nvPr/>
+        </p:nvPicPr>
+        <p:blipFill rotWithShape="1">
+          <a:blip r:embed="rId3"/>
+          <a:srcRect l="64051" t="5929" r="7391" b="66186"/>
+          <a:stretch/>
+        </p:blipFill>
+        <p:spPr>
+          <a:xfrm>
+            <a:off x="8529722" y="1724845"/>
+            <a:ext cx="680953" cy="664933"/>
+          </a:xfrm>
+          <a:prstGeom prst="rect">
+            <a:avLst/>
+          </a:prstGeom>
+        </p:spPr>
+      </p:pic>
+      <p:pic>
+        <p:nvPicPr>
+          <p:cNvPr id="6" name="Рисунок 5">
+            <a:extLst>
+              <a:ext uri="{FF2B5EF4-FFF2-40B4-BE49-F238E27FC236}">
+                <a16:creationId xmlns:a16="http://schemas.microsoft.com/office/drawing/2014/main" id="{1A6321CD-BCA3-497A-BE04-E43F4A5EFCDF}"/>
+              </a:ext>
+            </a:extLst>
+          </p:cNvPr>
+          <p:cNvPicPr>
+            <a:picLocks noChangeAspect="1"/>
+          </p:cNvPicPr>
+          <p:nvPr/>
+        </p:nvPicPr>
+        <p:blipFill rotWithShape="1">
+          <a:blip r:embed="rId3"/>
+          <a:srcRect l="64051" t="5929" r="7391" b="66186"/>
+          <a:stretch/>
+        </p:blipFill>
+        <p:spPr>
+          <a:xfrm>
+            <a:off x="8143875" y="2272621"/>
+            <a:ext cx="466725" cy="455744"/>
+          </a:xfrm>
+          <a:prstGeom prst="rect">
+            <a:avLst/>
+          </a:prstGeom>
+        </p:spPr>
+      </p:pic>
+      <p:pic>
+        <p:nvPicPr>
+          <p:cNvPr id="7" name="Рисунок 6">
+            <a:extLst>
+              <a:ext uri="{FF2B5EF4-FFF2-40B4-BE49-F238E27FC236}">
+                <a16:creationId xmlns:a16="http://schemas.microsoft.com/office/drawing/2014/main" id="{100E7ADA-9291-4BF5-AED7-ADCDAA78D486}"/>
+              </a:ext>
+            </a:extLst>
+          </p:cNvPr>
+          <p:cNvPicPr>
+            <a:picLocks noChangeAspect="1"/>
+          </p:cNvPicPr>
+          <p:nvPr/>
+        </p:nvPicPr>
+        <p:blipFill rotWithShape="1">
+          <a:blip r:embed="rId3"/>
+          <a:srcRect l="64051" t="5929" r="7391" b="66186"/>
+          <a:stretch/>
+        </p:blipFill>
+        <p:spPr>
+          <a:xfrm>
+            <a:off x="2479359" y="3724275"/>
+            <a:ext cx="730566" cy="713378"/>
+          </a:xfrm>
+          <a:prstGeom prst="rect">
+            <a:avLst/>
+          </a:prstGeom>
+        </p:spPr>
+      </p:pic>
+      <p:pic>
+        <p:nvPicPr>
+          <p:cNvPr id="8" name="Рисунок 7">
+            <a:extLst>
+              <a:ext uri="{FF2B5EF4-FFF2-40B4-BE49-F238E27FC236}">
+                <a16:creationId xmlns:a16="http://schemas.microsoft.com/office/drawing/2014/main" id="{ED5E3F17-669B-4036-B4E9-B1F7CB80BA66}"/>
+              </a:ext>
+            </a:extLst>
+          </p:cNvPr>
+          <p:cNvPicPr>
+            <a:picLocks noChangeAspect="1"/>
+          </p:cNvPicPr>
+          <p:nvPr/>
+        </p:nvPicPr>
+        <p:blipFill rotWithShape="1">
+          <a:blip r:embed="rId3"/>
+          <a:srcRect l="64051" t="5929" r="7391" b="66186"/>
+          <a:stretch/>
+        </p:blipFill>
+        <p:spPr>
+          <a:xfrm>
+            <a:off x="4643398" y="5535369"/>
+            <a:ext cx="462002" cy="451132"/>
+          </a:xfrm>
+          <a:prstGeom prst="rect">
+            <a:avLst/>
+          </a:prstGeom>
+        </p:spPr>
+      </p:pic>
     </p:spTree>
     <p:extLst>
       <p:ext uri="{BB962C8B-B14F-4D97-AF65-F5344CB8AC3E}">
@@ -11124,13 +11258,13 @@
         </p:nvSpPr>
         <p:spPr>
           <a:xfrm>
-            <a:off x="838200" y="0"/>
-            <a:ext cx="10515600" cy="939567"/>
+            <a:off x="838200" y="563447"/>
+            <a:ext cx="10515600" cy="582877"/>
           </a:xfrm>
         </p:spPr>
         <p:txBody>
           <a:bodyPr>
-            <a:normAutofit/>
+            <a:noAutofit/>
           </a:bodyPr>
           <a:lstStyle/>
           <a:p>
@@ -11143,7 +11277,7 @@
                   </a:schemeClr>
                 </a:solidFill>
               </a:rPr>
-              <a:t>Актуальность</a:t>
+              <a:t>АКТУАЛЬНОСТЬ</a:t>
             </a:r>
           </a:p>
         </p:txBody>
@@ -11343,48 +11477,9 @@
             <a:pPr marL="0" indent="0">
               <a:buNone/>
             </a:pPr>
-            <a:r>
-              <a:rPr lang="ru-RU" sz="2400" b="1" dirty="0">
-                <a:solidFill>
-                  <a:schemeClr val="accent2">
-                    <a:lumMod val="50000"/>
-                  </a:schemeClr>
-                </a:solidFill>
-              </a:rPr>
-              <a:t>Проблематика</a:t>
-            </a:r>
-          </a:p>
-          <a:p>
-            <a:r>
-              <a:rPr lang="ru-RU" sz="1800" dirty="0">
-                <a:cs typeface="Times New Roman" panose="02020603050405020304" pitchFamily="18" charset="0"/>
-              </a:rPr>
-              <a:t>Данные о качестве металла хранятся в разных системах без централизованного доступа;</a:t>
-            </a:r>
-          </a:p>
-          <a:p>
-            <a:r>
-              <a:rPr lang="ru-RU" sz="1800" dirty="0">
-                <a:cs typeface="Times New Roman" panose="02020603050405020304" pitchFamily="18" charset="0"/>
-              </a:rPr>
-              <a:t>Разнородность форматов;</a:t>
-            </a:r>
-          </a:p>
-          <a:p>
-            <a:r>
-              <a:rPr lang="ru-RU" sz="1800" dirty="0">
-                <a:cs typeface="Times New Roman" panose="02020603050405020304" pitchFamily="18" charset="0"/>
-              </a:rPr>
-              <a:t>Задержки при передаче информации;</a:t>
-            </a:r>
-          </a:p>
-          <a:p>
-            <a:r>
-              <a:rPr lang="ru-RU" sz="1800" dirty="0">
-                <a:cs typeface="Times New Roman" panose="02020603050405020304" pitchFamily="18" charset="0"/>
-              </a:rPr>
-              <a:t>Отсутствие поддержки принятия решений.</a:t>
-            </a:r>
+            <a:endParaRPr lang="ru-RU" sz="1800" dirty="0">
+              <a:cs typeface="Times New Roman" panose="02020603050405020304" pitchFamily="18" charset="0"/>
+            </a:endParaRPr>
           </a:p>
         </p:txBody>
       </p:sp>
@@ -11402,8 +11497,8 @@
         </p:nvSpPr>
         <p:spPr>
           <a:xfrm>
-            <a:off x="838200" y="677255"/>
-            <a:ext cx="10788242" cy="3917676"/>
+            <a:off x="838200" y="1557082"/>
+            <a:ext cx="10515600" cy="4308872"/>
           </a:xfrm>
           <a:prstGeom prst="rect">
             <a:avLst/>
@@ -11416,15 +11511,12 @@
           <a:lstStyle/>
           <a:p>
             <a:pPr>
-              <a:lnSpc>
-                <a:spcPct val="150000"/>
-              </a:lnSpc>
               <a:spcAft>
                 <a:spcPts val="0"/>
               </a:spcAft>
             </a:pPr>
             <a:r>
-              <a:rPr lang="ru-RU" sz="2400" b="1" dirty="0">
+              <a:rPr lang="ru-RU" sz="2800" b="1" dirty="0">
                 <a:solidFill>
                   <a:schemeClr val="accent2">
                     <a:lumMod val="50000"/>
@@ -11437,29 +11529,31 @@
           </a:p>
           <a:p>
             <a:pPr>
-              <a:lnSpc>
-                <a:spcPct val="150000"/>
-              </a:lnSpc>
               <a:spcAft>
                 <a:spcPts val="0"/>
               </a:spcAft>
             </a:pPr>
             <a:r>
-              <a:rPr lang="ru-RU" dirty="0"/>
+              <a:rPr lang="ru-RU" sz="2000" dirty="0"/>
               <a:t>Управление качеством металлопродукции на крупном промышленном предприятии – это одна из наиболее актуальных задач цифровизации в металлургии сегодня.</a:t>
             </a:r>
           </a:p>
           <a:p>
             <a:pPr>
-              <a:lnSpc>
-                <a:spcPct val="150000"/>
-              </a:lnSpc>
+              <a:spcAft>
+                <a:spcPts val="0"/>
+              </a:spcAft>
+            </a:pPr>
+            <a:endParaRPr lang="ru-RU" sz="2000" dirty="0"/>
+          </a:p>
+          <a:p>
+            <a:pPr>
               <a:spcAft>
                 <a:spcPts val="0"/>
               </a:spcAft>
             </a:pPr>
             <a:r>
-              <a:rPr lang="ru-RU" dirty="0">
+              <a:rPr lang="ru-RU" sz="2000" dirty="0">
                 <a:solidFill>
                   <a:srgbClr val="000000"/>
                 </a:solidFill>
@@ -11469,10 +11563,33 @@
             </a:r>
           </a:p>
           <a:p>
+            <a:pPr marL="285750" indent="-285750">
+              <a:buFont typeface="Arial" panose="020B0604020202020204" pitchFamily="34" charset="0"/>
+              <a:buChar char="•"/>
+            </a:pPr>
+            <a:r>
+              <a:rPr lang="ru-RU" sz="2000" dirty="0">
+                <a:solidFill>
+                  <a:srgbClr val="000000"/>
+                </a:solidFill>
+                <a:ea typeface="Arial Unicode MS"/>
+              </a:rPr>
+              <a:t>Производственные системы (MES, SCADA) </a:t>
+            </a:r>
+          </a:p>
+          <a:p>
+            <a:r>
+              <a:rPr lang="ru-RU" sz="2000" dirty="0">
+                <a:solidFill>
+                  <a:srgbClr val="000000"/>
+                </a:solidFill>
+                <a:ea typeface="Arial Unicode MS"/>
+              </a:rPr>
+              <a:t>	– для мониторинга технологических параметров в реальном времени;</a:t>
+            </a:r>
+          </a:p>
+          <a:p>
             <a:pPr marL="285750" lvl="0" indent="-285750">
-              <a:lnSpc>
-                <a:spcPct val="150000"/>
-              </a:lnSpc>
               <a:spcAft>
                 <a:spcPts val="0"/>
               </a:spcAft>
@@ -11480,56 +11597,85 @@
               <a:buChar char="•"/>
             </a:pPr>
             <a:r>
-              <a:rPr lang="ru-RU" dirty="0">
+              <a:rPr lang="ru-RU" sz="2000" dirty="0">
                 <a:solidFill>
                   <a:srgbClr val="000000"/>
                 </a:solidFill>
                 <a:ea typeface="Arial Unicode MS"/>
               </a:rPr>
-              <a:t>Лабораторные системы (LIMS) – для анализа проб и регистрации результатов испытаний;</a:t>
+              <a:t>Лабораторные системы (LIMS) </a:t>
             </a:r>
           </a:p>
           <a:p>
-            <a:pPr marL="285750" lvl="0" indent="-285750">
-              <a:lnSpc>
-                <a:spcPct val="150000"/>
-              </a:lnSpc>
+            <a:pPr lvl="0">
               <a:spcAft>
                 <a:spcPts val="0"/>
               </a:spcAft>
-              <a:buFont typeface="Arial" panose="020B0604020202020204" pitchFamily="34" charset="0"/>
-              <a:buChar char="•"/>
             </a:pPr>
             <a:r>
-              <a:rPr lang="ru-RU" dirty="0">
+              <a:rPr lang="ru-RU" sz="2000" dirty="0">
                 <a:solidFill>
                   <a:srgbClr val="000000"/>
                 </a:solidFill>
                 <a:ea typeface="Arial Unicode MS"/>
               </a:rPr>
-              <a:t>Производственные MES/SCADA-системы – для мониторинга технологических параметров в реальном времени;</a:t>
+              <a:t>	– для анализа проб и регистрации результатов испытаний.</a:t>
             </a:r>
           </a:p>
           <a:p>
-            <a:pPr marL="285750" lvl="0" indent="-285750">
-              <a:lnSpc>
-                <a:spcPct val="150000"/>
-              </a:lnSpc>
+            <a:pPr lvl="0">
               <a:spcAft>
                 <a:spcPts val="0"/>
               </a:spcAft>
+            </a:pPr>
+            <a:endParaRPr lang="ru-RU" dirty="0">
+              <a:solidFill>
+                <a:srgbClr val="000000"/>
+              </a:solidFill>
+              <a:ea typeface="Arial Unicode MS"/>
+            </a:endParaRPr>
+          </a:p>
+          <a:p>
+            <a:r>
+              <a:rPr lang="ru-RU" sz="2800" b="1" dirty="0">
+                <a:solidFill>
+                  <a:schemeClr val="accent2">
+                    <a:lumMod val="50000"/>
+                  </a:schemeClr>
+                </a:solidFill>
+              </a:rPr>
+              <a:t>Проблематика</a:t>
+            </a:r>
+          </a:p>
+          <a:p>
+            <a:pPr marL="342900" indent="-342900">
               <a:buFont typeface="Arial" panose="020B0604020202020204" pitchFamily="34" charset="0"/>
               <a:buChar char="•"/>
             </a:pPr>
             <a:r>
-              <a:rPr lang="ru-RU" dirty="0">
-                <a:solidFill>
-                  <a:srgbClr val="000000"/>
-                </a:solidFill>
-                <a:ea typeface="Arial Unicode MS"/>
+              <a:rPr lang="ru-RU" sz="2000" dirty="0">
+                <a:cs typeface="Times New Roman" panose="02020603050405020304" pitchFamily="18" charset="0"/>
               </a:rPr>
-              <a:t>ERP-системы (SAP, 1C и др.) – для учёта, планирования и отчётности.</a:t>
+              <a:t>Данные о партиях металла хранятся в разных системах без централизованного доступа;</a:t>
             </a:r>
+          </a:p>
+          <a:p>
+            <a:pPr marL="342900" indent="-342900">
+              <a:buFont typeface="Arial" panose="020B0604020202020204" pitchFamily="34" charset="0"/>
+              <a:buChar char="•"/>
+            </a:pPr>
+            <a:r>
+              <a:rPr lang="ru-RU" sz="2000" dirty="0">
+                <a:cs typeface="Times New Roman" panose="02020603050405020304" pitchFamily="18" charset="0"/>
+              </a:rPr>
+              <a:t>Необходимость в оперативности принятия решений.</a:t>
+            </a:r>
+            <a:endParaRPr lang="ru-RU" sz="2000" dirty="0">
+              <a:solidFill>
+                <a:srgbClr val="000000"/>
+              </a:solidFill>
+              <a:ea typeface="Arial Unicode MS"/>
+            </a:endParaRPr>
           </a:p>
         </p:txBody>
       </p:sp>
@@ -11581,13 +11727,13 @@
         </p:nvSpPr>
         <p:spPr>
           <a:xfrm>
-            <a:off x="838199" y="-21748"/>
-            <a:ext cx="10515600" cy="1091142"/>
+            <a:off x="838199" y="551113"/>
+            <a:ext cx="10515600" cy="452195"/>
           </a:xfrm>
         </p:spPr>
         <p:txBody>
           <a:bodyPr>
-            <a:normAutofit/>
+            <a:noAutofit/>
           </a:bodyPr>
           <a:lstStyle/>
           <a:p>
@@ -11600,7 +11746,7 @@
                   </a:schemeClr>
                 </a:solidFill>
               </a:rPr>
-              <a:t>Цель и задачи</a:t>
+              <a:t>ЦЕЛЬ И ЗАДАЧИ</a:t>
             </a:r>
           </a:p>
         </p:txBody>
@@ -11800,16 +11946,13 @@
             <a:pPr marL="0" indent="0">
               <a:buNone/>
             </a:pPr>
-            <a:r>
-              <a:rPr lang="ru-RU" sz="2400" b="1" dirty="0">
-                <a:solidFill>
-                  <a:schemeClr val="accent2">
-                    <a:lumMod val="50000"/>
-                  </a:schemeClr>
-                </a:solidFill>
-              </a:rPr>
-              <a:t>Задачи для разработки</a:t>
-            </a:r>
+            <a:endParaRPr lang="ru-RU" b="1" dirty="0">
+              <a:solidFill>
+                <a:schemeClr val="accent2">
+                  <a:lumMod val="50000"/>
+                </a:schemeClr>
+              </a:solidFill>
+            </a:endParaRPr>
           </a:p>
         </p:txBody>
       </p:sp>
@@ -11823,11 +11966,17 @@
             </a:extLst>
           </p:cNvPr>
           <p:cNvGraphicFramePr/>
-          <p:nvPr/>
+          <p:nvPr>
+            <p:extLst>
+              <p:ext uri="{D42A27DB-BD31-4B8C-83A1-F6EECF244321}">
+                <p14:modId xmlns:p14="http://schemas.microsoft.com/office/powerpoint/2010/main" val="2827134054"/>
+              </p:ext>
+            </p:extLst>
+          </p:nvPr>
         </p:nvGraphicFramePr>
         <p:xfrm>
-          <a:off x="1937349" y="2924355"/>
-          <a:ext cx="8317301" cy="3465002"/>
+          <a:off x="838199" y="3429000"/>
+          <a:ext cx="10515599" cy="3162846"/>
         </p:xfrm>
         <a:graphic>
           <a:graphicData uri="http://schemas.openxmlformats.org/drawingml/2006/diagram">
@@ -11849,8 +11998,8 @@
         </p:nvSpPr>
         <p:spPr>
           <a:xfrm>
-            <a:off x="838199" y="920838"/>
-            <a:ext cx="10938136" cy="1292662"/>
+            <a:off x="838199" y="1382134"/>
+            <a:ext cx="10515600" cy="2492990"/>
           </a:xfrm>
           <a:prstGeom prst="rect">
             <a:avLst/>
@@ -11863,7 +12012,7 @@
           <a:lstStyle/>
           <a:p>
             <a:r>
-              <a:rPr lang="ru-RU" sz="2400" b="1" dirty="0">
+              <a:rPr lang="ru-RU" sz="2800" b="1" dirty="0">
                 <a:solidFill>
                   <a:schemeClr val="accent2">
                     <a:lumMod val="50000"/>
@@ -11875,17 +12024,28 @@
           </a:p>
           <a:p>
             <a:r>
-              <a:rPr lang="ru-RU" dirty="0"/>
-              <a:t>Разработка интегрированной витрины данных о качестве металла, объединяющей информацию из лабораторий, производственных систем, с обеспечением </a:t>
+              <a:rPr lang="ru-RU" sz="2000" dirty="0"/>
+              <a:t>Разработка информационной системы витрины качества металла, объединяющей информацию из производственных и лабораторных систем, с обеспечением ролевого разграничения доступа, оперативного выявления отклонений и отчетности.</a:t>
             </a:r>
+          </a:p>
+          <a:p>
+            <a:endParaRPr lang="ru-RU" sz="2000" dirty="0"/>
+          </a:p>
+          <a:p>
+            <a:endParaRPr lang="ru-RU" sz="2000" dirty="0"/>
+          </a:p>
+          <a:p>
             <a:r>
-              <a:rPr lang="ru-RU" dirty="0" err="1"/>
-              <a:t>real-time</a:t>
+              <a:rPr lang="ru-RU" sz="2800" b="1" dirty="0">
+                <a:solidFill>
+                  <a:schemeClr val="accent2">
+                    <a:lumMod val="50000"/>
+                  </a:schemeClr>
+                </a:solidFill>
+              </a:rPr>
+              <a:t>Задачи на разработку</a:t>
             </a:r>
-            <a:r>
-              <a:rPr lang="ru-RU" dirty="0"/>
-              <a:t> доступа, аналитики и поддержки принятия решений.</a:t>
-            </a:r>
+            <a:endParaRPr lang="ru-RU" sz="2000" dirty="0"/>
           </a:p>
         </p:txBody>
       </p:sp>
@@ -11937,7 +12097,7 @@
         </p:nvSpPr>
         <p:spPr>
           <a:xfrm>
-            <a:off x="838200" y="365126"/>
+            <a:off x="838200" y="562533"/>
             <a:ext cx="10515600" cy="516024"/>
           </a:xfrm>
         </p:spPr>
@@ -11956,170 +12116,149 @@
                   </a:schemeClr>
                 </a:solidFill>
               </a:rPr>
-              <a:t>Сравнение аналогов</a:t>
+              <a:t>СРАВНЕНИЕ АНАЛОГОВ</a:t>
             </a:r>
-          </a:p>
-        </p:txBody>
-      </p:sp>
-      <p:sp>
-        <p:nvSpPr>
-          <p:cNvPr id="6" name="Rectangle 1">
-            <a:extLst>
-              <a:ext uri="{FF2B5EF4-FFF2-40B4-BE49-F238E27FC236}">
-                <a16:creationId xmlns:a16="http://schemas.microsoft.com/office/drawing/2014/main" id="{A98A4377-0903-4141-9077-054DEE72EB7E}"/>
-              </a:ext>
-            </a:extLst>
-          </p:cNvPr>
-          <p:cNvSpPr>
-            <a:spLocks noChangeArrowheads="1"/>
-          </p:cNvSpPr>
-          <p:nvPr/>
-        </p:nvSpPr>
-        <p:spPr bwMode="auto">
-          <a:xfrm>
-            <a:off x="838200" y="1887538"/>
-            <a:ext cx="12192000" cy="457200"/>
-          </a:xfrm>
-          <a:prstGeom prst="rect">
-            <a:avLst/>
-          </a:prstGeom>
-          <a:noFill/>
-          <a:ln>
-            <a:noFill/>
-          </a:ln>
-          <a:effectLst/>
-          <a:extLst>
-            <a:ext uri="{909E8E84-426E-40DD-AFC4-6F175D3DCCD1}">
-              <a14:hiddenFill xmlns:a14="http://schemas.microsoft.com/office/drawing/2010/main">
-                <a:solidFill>
-                  <a:schemeClr val="accent1"/>
-                </a:solidFill>
-              </a14:hiddenFill>
-            </a:ext>
-            <a:ext uri="{91240B29-F687-4F45-9708-019B960494DF}">
-              <a14:hiddenLine xmlns:a14="http://schemas.microsoft.com/office/drawing/2010/main" w="9525">
-                <a:solidFill>
-                  <a:schemeClr val="tx1"/>
-                </a:solidFill>
-                <a:miter lim="800000"/>
-                <a:headEnd/>
-                <a:tailEnd/>
-              </a14:hiddenLine>
-            </a:ext>
-            <a:ext uri="{AF507438-7753-43E0-B8FC-AC1667EBCBE1}">
-              <a14:hiddenEffects xmlns:a14="http://schemas.microsoft.com/office/drawing/2010/main">
-                <a:effectLst>
-                  <a:outerShdw dist="35921" dir="2700000" algn="ctr" rotWithShape="0">
-                    <a:schemeClr val="bg2"/>
-                  </a:outerShdw>
-                </a:effectLst>
-              </a14:hiddenEffects>
-            </a:ext>
-          </a:extLst>
-        </p:spPr>
-        <p:txBody>
-          <a:bodyPr vert="horz" wrap="none" lIns="91440" tIns="45720" rIns="91440" bIns="45720" numCol="1" anchor="ctr" anchorCtr="0" compatLnSpc="1">
-            <a:prstTxWarp prst="textNoShape">
-              <a:avLst/>
-            </a:prstTxWarp>
-            <a:spAutoFit/>
-          </a:bodyPr>
-          <a:lstStyle/>
-          <a:p>
-            <a:endParaRPr lang="ru-RU"/>
           </a:p>
         </p:txBody>
       </p:sp>
       <p:graphicFrame>
         <p:nvGraphicFramePr>
-          <p:cNvPr id="3" name="Таблица 2">
+          <p:cNvPr id="4" name="Таблица 3">
             <a:extLst>
               <a:ext uri="{FF2B5EF4-FFF2-40B4-BE49-F238E27FC236}">
-                <a16:creationId xmlns:a16="http://schemas.microsoft.com/office/drawing/2014/main" id="{541AEE7F-7E12-439C-A2F8-0DF37B5E9E2A}"/>
+                <a16:creationId xmlns:a16="http://schemas.microsoft.com/office/drawing/2014/main" id="{AC5939E2-0608-47D6-9752-F1AA13B30E10}"/>
               </a:ext>
             </a:extLst>
           </p:cNvPr>
           <p:cNvGraphicFramePr>
             <a:graphicFrameLocks noGrp="1"/>
           </p:cNvGraphicFramePr>
-          <p:nvPr/>
+          <p:nvPr>
+            <p:extLst>
+              <p:ext uri="{D42A27DB-BD31-4B8C-83A1-F6EECF244321}">
+                <p14:modId xmlns:p14="http://schemas.microsoft.com/office/powerpoint/2010/main" val="1211790960"/>
+              </p:ext>
+            </p:extLst>
+          </p:nvPr>
         </p:nvGraphicFramePr>
         <p:xfrm>
-          <a:off x="838200" y="1052425"/>
-          <a:ext cx="10515600" cy="5304726"/>
+          <a:off x="838202" y="1523080"/>
+          <a:ext cx="10515598" cy="4537444"/>
         </p:xfrm>
         <a:graphic>
           <a:graphicData uri="http://schemas.openxmlformats.org/drawingml/2006/table">
             <a:tbl>
               <a:tblPr firstRow="1" firstCol="1" bandRow="1">
-                <a:tableStyleId>{9DCAF9ED-07DC-4A11-8D7F-57B35C25682E}</a:tableStyleId>
+                <a:tableStyleId>{0E3FDE45-AF77-4B5C-9715-49D594BDF05E}</a:tableStyleId>
               </a:tblPr>
               <a:tblGrid>
-                <a:gridCol w="3505200">
+                <a:gridCol w="3569206">
                   <a:extLst>
                     <a:ext uri="{9D8B030D-6E8A-4147-A177-3AD203B41FA5}">
-                      <a16:colId xmlns:a16="http://schemas.microsoft.com/office/drawing/2014/main" val="2648741701"/>
+                      <a16:colId xmlns:a16="http://schemas.microsoft.com/office/drawing/2014/main" val="4146102766"/>
                     </a:ext>
                   </a:extLst>
                 </a:gridCol>
-                <a:gridCol w="3505200">
+                <a:gridCol w="1380744">
                   <a:extLst>
                     <a:ext uri="{9D8B030D-6E8A-4147-A177-3AD203B41FA5}">
-                      <a16:colId xmlns:a16="http://schemas.microsoft.com/office/drawing/2014/main" val="3107124542"/>
+                      <a16:colId xmlns:a16="http://schemas.microsoft.com/office/drawing/2014/main" val="1341788233"/>
                     </a:ext>
                   </a:extLst>
                 </a:gridCol>
-                <a:gridCol w="3505200">
+                <a:gridCol w="1325880">
                   <a:extLst>
                     <a:ext uri="{9D8B030D-6E8A-4147-A177-3AD203B41FA5}">
-                      <a16:colId xmlns:a16="http://schemas.microsoft.com/office/drawing/2014/main" val="426607555"/>
+                      <a16:colId xmlns:a16="http://schemas.microsoft.com/office/drawing/2014/main" val="198659613"/>
+                    </a:ext>
+                  </a:extLst>
+                </a:gridCol>
+                <a:gridCol w="1280160">
+                  <a:extLst>
+                    <a:ext uri="{9D8B030D-6E8A-4147-A177-3AD203B41FA5}">
+                      <a16:colId xmlns:a16="http://schemas.microsoft.com/office/drawing/2014/main" val="1003349798"/>
+                    </a:ext>
+                  </a:extLst>
+                </a:gridCol>
+                <a:gridCol w="1216152">
+                  <a:extLst>
+                    <a:ext uri="{9D8B030D-6E8A-4147-A177-3AD203B41FA5}">
+                      <a16:colId xmlns:a16="http://schemas.microsoft.com/office/drawing/2014/main" val="57249604"/>
+                    </a:ext>
+                  </a:extLst>
+                </a:gridCol>
+                <a:gridCol w="1743456">
+                  <a:extLst>
+                    <a:ext uri="{9D8B030D-6E8A-4147-A177-3AD203B41FA5}">
+                      <a16:colId xmlns:a16="http://schemas.microsoft.com/office/drawing/2014/main" val="2278799490"/>
                     </a:ext>
                   </a:extLst>
                 </a:gridCol>
               </a:tblGrid>
-              <a:tr h="471928">
+              <a:tr h="756931">
                 <a:tc>
                   <a:txBody>
                     <a:bodyPr/>
                     <a:lstStyle/>
                     <a:p>
-                      <a:pPr indent="0" algn="ctr">
+                      <a:pPr marL="0" indent="0" algn="ctr">
                         <a:lnSpc>
-                          <a:spcPct val="150000"/>
+                          <a:spcPct val="100000"/>
                         </a:lnSpc>
                         <a:spcAft>
                           <a:spcPts val="0"/>
                         </a:spcAft>
                       </a:pPr>
                       <a:r>
-                        <a:rPr lang="ru-RU" sz="1400" dirty="0">
+                        <a:rPr lang="ru-RU" sz="1800" b="1" dirty="0">
                           <a:effectLst/>
-                          <a:latin typeface="+mn-lt"/>
                         </a:rPr>
-                        <a:t>Система</a:t>
+                        <a:t>Критерий</a:t>
                       </a:r>
-                      <a:endParaRPr lang="ru-RU" sz="1400" dirty="0">
-                        <a:solidFill>
-                          <a:srgbClr val="000000"/>
-                        </a:solidFill>
+                      <a:endParaRPr lang="ru-RU" sz="1800" b="1" dirty="0">
                         <a:effectLst/>
-                        <a:latin typeface="+mn-lt"/>
-                        <a:ea typeface="Arial Unicode MS"/>
+                        <a:latin typeface="Times New Roman" panose="02020603050405020304" pitchFamily="18" charset="0"/>
+                        <a:ea typeface="Times New Roman" panose="02020603050405020304" pitchFamily="18" charset="0"/>
                         <a:cs typeface="Times New Roman" panose="02020603050405020304" pitchFamily="18" charset="0"/>
                       </a:endParaRPr>
                     </a:p>
                   </a:txBody>
-                  <a:tcPr marL="68580" marR="68580" marT="0" marB="0">
-                    <a:lnB w="12700" cap="flat" cmpd="sng" algn="ctr">
-                      <a:solidFill>
-                        <a:schemeClr val="accent2"/>
-                      </a:solidFill>
-                      <a:prstDash val="solid"/>
-                      <a:round/>
-                      <a:headEnd type="none" w="med" len="med"/>
-                      <a:tailEnd type="none" w="med" len="med"/>
-                    </a:lnB>
-                  </a:tcPr>
+                  <a:tcPr marL="47461" marR="47461" marT="0" marB="0"/>
+                </a:tc>
+                <a:tc>
+                  <a:txBody>
+                    <a:bodyPr/>
+                    <a:lstStyle/>
+                    <a:p>
+                      <a:pPr marL="0" indent="0" algn="ctr">
+                        <a:lnSpc>
+                          <a:spcPct val="100000"/>
+                        </a:lnSpc>
+                        <a:spcAft>
+                          <a:spcPts val="0"/>
+                        </a:spcAft>
+                      </a:pPr>
+                      <a:r>
+                        <a:rPr lang="ru-RU" sz="1800" b="1" dirty="0">
+                          <a:effectLst/>
+                        </a:rPr>
+                        <a:t>AVEVA PI </a:t>
+                      </a:r>
+                      <a:r>
+                        <a:rPr lang="ru-RU" sz="1800" b="1" dirty="0" err="1">
+                          <a:effectLst/>
+                        </a:rPr>
+                        <a:t>System</a:t>
+                      </a:r>
+                      <a:endParaRPr lang="ru-RU" sz="1800" b="1" dirty="0">
+                        <a:effectLst/>
+                        <a:latin typeface="Times New Roman" panose="02020603050405020304" pitchFamily="18" charset="0"/>
+                        <a:ea typeface="Times New Roman" panose="02020603050405020304" pitchFamily="18" charset="0"/>
+                        <a:cs typeface="Times New Roman" panose="02020603050405020304" pitchFamily="18" charset="0"/>
+                      </a:endParaRPr>
+                    </a:p>
+                  </a:txBody>
+                  <a:tcPr marL="47461" marR="47461" marT="0" marB="0"/>
                 </a:tc>
                 <a:tc>
                   <a:txBody>
@@ -12128,41 +12267,27 @@
                     <a:p>
                       <a:pPr indent="0" algn="ctr">
                         <a:lnSpc>
-                          <a:spcPct val="150000"/>
+                          <a:spcPct val="100000"/>
                         </a:lnSpc>
                         <a:spcAft>
                           <a:spcPts val="0"/>
                         </a:spcAft>
                       </a:pPr>
                       <a:r>
-                        <a:rPr lang="ru-RU" sz="1400" dirty="0">
+                        <a:rPr lang="ru-RU" sz="1800" b="1" dirty="0" err="1">
                           <a:effectLst/>
-                          <a:latin typeface="+mn-lt"/>
                         </a:rPr>
-                        <a:t>Достоинства</a:t>
+                        <a:t>dataPARC</a:t>
                       </a:r>
-                      <a:endParaRPr lang="ru-RU" sz="1400" dirty="0">
-                        <a:solidFill>
-                          <a:srgbClr val="000000"/>
-                        </a:solidFill>
+                      <a:endParaRPr lang="ru-RU" sz="1800" b="1" dirty="0">
                         <a:effectLst/>
-                        <a:latin typeface="+mn-lt"/>
-                        <a:ea typeface="Arial Unicode MS"/>
+                        <a:latin typeface="Times New Roman" panose="02020603050405020304" pitchFamily="18" charset="0"/>
+                        <a:ea typeface="Times New Roman" panose="02020603050405020304" pitchFamily="18" charset="0"/>
                         <a:cs typeface="Times New Roman" panose="02020603050405020304" pitchFamily="18" charset="0"/>
                       </a:endParaRPr>
                     </a:p>
                   </a:txBody>
-                  <a:tcPr marL="68580" marR="68580" marT="0" marB="0">
-                    <a:lnB w="12700" cap="flat" cmpd="sng" algn="ctr">
-                      <a:solidFill>
-                        <a:schemeClr val="accent2"/>
-                      </a:solidFill>
-                      <a:prstDash val="solid"/>
-                      <a:round/>
-                      <a:headEnd type="none" w="med" len="med"/>
-                      <a:tailEnd type="none" w="med" len="med"/>
-                    </a:lnB>
-                  </a:tcPr>
+                  <a:tcPr marL="47461" marR="47461" marT="0" marB="0"/>
                 </a:tc>
                 <a:tc>
                   <a:txBody>
@@ -12171,941 +12296,1573 @@
                     <a:p>
                       <a:pPr indent="0" algn="ctr">
                         <a:lnSpc>
-                          <a:spcPct val="150000"/>
+                          <a:spcPct val="100000"/>
                         </a:lnSpc>
                         <a:spcAft>
                           <a:spcPts val="0"/>
                         </a:spcAft>
                       </a:pPr>
                       <a:r>
-                        <a:rPr lang="ru-RU" sz="1400" dirty="0">
+                        <a:rPr lang="ru-RU" sz="1800" b="1" dirty="0" err="1">
                           <a:effectLst/>
-                          <a:latin typeface="+mn-lt"/>
                         </a:rPr>
-                        <a:t>Недостатки</a:t>
+                        <a:t>Primetals</a:t>
                       </a:r>
-                      <a:endParaRPr lang="ru-RU" sz="1400" dirty="0">
-                        <a:solidFill>
-                          <a:srgbClr val="000000"/>
-                        </a:solidFill>
+                      <a:r>
+                        <a:rPr lang="ru-RU" sz="1800" b="1" dirty="0">
+                          <a:effectLst/>
+                        </a:rPr>
+                        <a:t> QS</a:t>
+                      </a:r>
+                      <a:endParaRPr lang="ru-RU" sz="1800" b="1" dirty="0">
                         <a:effectLst/>
-                        <a:latin typeface="+mn-lt"/>
-                        <a:ea typeface="Arial Unicode MS"/>
+                        <a:latin typeface="Times New Roman" panose="02020603050405020304" pitchFamily="18" charset="0"/>
+                        <a:ea typeface="Times New Roman" panose="02020603050405020304" pitchFamily="18" charset="0"/>
                         <a:cs typeface="Times New Roman" panose="02020603050405020304" pitchFamily="18" charset="0"/>
                       </a:endParaRPr>
                     </a:p>
                   </a:txBody>
-                  <a:tcPr marL="68580" marR="68580" marT="0" marB="0">
-                    <a:lnB w="12700" cap="flat" cmpd="sng" algn="ctr">
-                      <a:solidFill>
-                        <a:schemeClr val="accent2"/>
-                      </a:solidFill>
-                      <a:prstDash val="solid"/>
-                      <a:round/>
-                      <a:headEnd type="none" w="med" len="med"/>
-                      <a:tailEnd type="none" w="med" len="med"/>
-                    </a:lnB>
-                  </a:tcPr>
+                  <a:tcPr marL="47461" marR="47461" marT="0" marB="0"/>
                 </a:tc>
-                <a:extLst>
-                  <a:ext uri="{0D108BD9-81ED-4DB2-BD59-A6C34878D82A}">
-                    <a16:rowId xmlns:a16="http://schemas.microsoft.com/office/drawing/2014/main" val="103360571"/>
-                  </a:ext>
-                </a:extLst>
-              </a:tr>
-              <a:tr h="1556359">
                 <a:tc>
                   <a:txBody>
                     <a:bodyPr/>
                     <a:lstStyle/>
                     <a:p>
-                      <a:pPr indent="0" algn="l">
+                      <a:pPr indent="0" algn="ctr">
                         <a:lnSpc>
-                          <a:spcPct val="150000"/>
+                          <a:spcPct val="100000"/>
                         </a:lnSpc>
                         <a:spcAft>
                           <a:spcPts val="0"/>
                         </a:spcAft>
                       </a:pPr>
                       <a:r>
-                        <a:rPr lang="ru-RU" sz="1400" b="0" dirty="0">
+                        <a:rPr lang="ru-RU" sz="1800" b="1" dirty="0">
                           <a:effectLst/>
-                          <a:latin typeface="+mn-lt"/>
                         </a:rPr>
-                        <a:t>Промышленные платформы (</a:t>
+                        <a:t>SMS X-</a:t>
                       </a:r>
                       <a:r>
-                        <a:rPr lang="en-US" sz="1400" b="0" dirty="0">
+                        <a:rPr lang="ru-RU" sz="1800" b="1" dirty="0" err="1">
                           <a:effectLst/>
-                          <a:latin typeface="+mn-lt"/>
                         </a:rPr>
-                        <a:t>AVEVA PI)</a:t>
+                        <a:t>Pact</a:t>
                       </a:r>
-                      <a:endParaRPr lang="ru-RU" sz="1400" b="0" dirty="0">
-                        <a:solidFill>
-                          <a:srgbClr val="000000"/>
-                        </a:solidFill>
+                      <a:endParaRPr lang="ru-RU" sz="1800" b="1" dirty="0">
                         <a:effectLst/>
-                        <a:latin typeface="+mn-lt"/>
-                        <a:ea typeface="Arial Unicode MS"/>
+                        <a:latin typeface="Times New Roman" panose="02020603050405020304" pitchFamily="18" charset="0"/>
+                        <a:ea typeface="Times New Roman" panose="02020603050405020304" pitchFamily="18" charset="0"/>
                         <a:cs typeface="Times New Roman" panose="02020603050405020304" pitchFamily="18" charset="0"/>
                       </a:endParaRPr>
                     </a:p>
                   </a:txBody>
-                  <a:tcPr marL="68580" marR="68580" marT="0" marB="0">
-                    <a:lnL w="12700" cap="flat" cmpd="sng" algn="ctr">
-                      <a:solidFill>
-                        <a:schemeClr val="accent2"/>
-                      </a:solidFill>
-                      <a:prstDash val="solid"/>
-                      <a:round/>
-                      <a:headEnd type="none" w="med" len="med"/>
-                      <a:tailEnd type="none" w="med" len="med"/>
-                    </a:lnL>
-                    <a:lnR w="12700" cap="flat" cmpd="sng" algn="ctr">
-                      <a:solidFill>
-                        <a:schemeClr val="accent2"/>
-                      </a:solidFill>
-                      <a:prstDash val="solid"/>
-                      <a:round/>
-                      <a:headEnd type="none" w="med" len="med"/>
-                      <a:tailEnd type="none" w="med" len="med"/>
-                    </a:lnR>
-                    <a:lnT w="12700" cap="flat" cmpd="sng" algn="ctr">
-                      <a:solidFill>
-                        <a:schemeClr val="accent2"/>
-                      </a:solidFill>
-                      <a:prstDash val="solid"/>
-                      <a:round/>
-                      <a:headEnd type="none" w="med" len="med"/>
-                      <a:tailEnd type="none" w="med" len="med"/>
-                    </a:lnT>
-                    <a:lnB w="12700" cap="flat" cmpd="sng" algn="ctr">
-                      <a:solidFill>
-                        <a:schemeClr val="accent2"/>
-                      </a:solidFill>
-                      <a:prstDash val="solid"/>
-                      <a:round/>
-                      <a:headEnd type="none" w="med" len="med"/>
-                      <a:tailEnd type="none" w="med" len="med"/>
-                    </a:lnB>
-                  </a:tcPr>
+                  <a:tcPr marL="47461" marR="47461" marT="0" marB="0"/>
                 </a:tc>
                 <a:tc>
                   <a:txBody>
                     <a:bodyPr/>
                     <a:lstStyle/>
                     <a:p>
-                      <a:pPr indent="0" algn="l">
+                      <a:pPr indent="0" algn="ctr">
                         <a:lnSpc>
-                          <a:spcPct val="150000"/>
+                          <a:spcPct val="100000"/>
                         </a:lnSpc>
                         <a:spcAft>
                           <a:spcPts val="0"/>
                         </a:spcAft>
                       </a:pPr>
                       <a:r>
-                        <a:rPr lang="ru-RU" sz="1400" dirty="0">
+                        <a:rPr lang="ru-RU" sz="1800" b="1" dirty="0" err="1">
                           <a:effectLst/>
-                          <a:latin typeface="+mn-lt"/>
                         </a:rPr>
-                        <a:t>Высокая скорость работы с потоковыми данными, интеграция с промышленными датчиками</a:t>
+                        <a:t>Siemens</a:t>
                       </a:r>
-                      <a:endParaRPr lang="ru-RU" sz="1400" dirty="0">
-                        <a:solidFill>
-                          <a:srgbClr val="000000"/>
-                        </a:solidFill>
+                      <a:r>
+                        <a:rPr lang="ru-RU" sz="1800" b="1" dirty="0">
+                          <a:effectLst/>
+                        </a:rPr>
+                        <a:t> </a:t>
+                      </a:r>
+                      <a:r>
+                        <a:rPr lang="ru-RU" sz="1800" b="1" dirty="0" err="1">
+                          <a:effectLst/>
+                        </a:rPr>
+                        <a:t>Opcenter</a:t>
+                      </a:r>
+                      <a:r>
+                        <a:rPr lang="ru-RU" sz="1800" b="1" dirty="0">
+                          <a:effectLst/>
+                        </a:rPr>
+                        <a:t> </a:t>
+                      </a:r>
+                      <a:r>
+                        <a:rPr lang="ru-RU" sz="1800" b="1" dirty="0" err="1">
+                          <a:effectLst/>
+                        </a:rPr>
+                        <a:t>Quality</a:t>
+                      </a:r>
+                      <a:endParaRPr lang="ru-RU" sz="1800" b="1" dirty="0">
                         <a:effectLst/>
-                        <a:latin typeface="+mn-lt"/>
-                        <a:ea typeface="Arial Unicode MS"/>
+                        <a:latin typeface="Times New Roman" panose="02020603050405020304" pitchFamily="18" charset="0"/>
+                        <a:ea typeface="Times New Roman" panose="02020603050405020304" pitchFamily="18" charset="0"/>
                         <a:cs typeface="Times New Roman" panose="02020603050405020304" pitchFamily="18" charset="0"/>
                       </a:endParaRPr>
                     </a:p>
                   </a:txBody>
-                  <a:tcPr marL="68580" marR="68580" marT="0" marB="0">
-                    <a:lnL w="12700" cap="flat" cmpd="sng" algn="ctr">
-                      <a:solidFill>
-                        <a:schemeClr val="accent2"/>
-                      </a:solidFill>
-                      <a:prstDash val="solid"/>
-                      <a:round/>
-                      <a:headEnd type="none" w="med" len="med"/>
-                      <a:tailEnd type="none" w="med" len="med"/>
-                    </a:lnL>
-                    <a:lnR w="12700" cap="flat" cmpd="sng" algn="ctr">
-                      <a:solidFill>
-                        <a:schemeClr val="accent2"/>
-                      </a:solidFill>
-                      <a:prstDash val="solid"/>
-                      <a:round/>
-                      <a:headEnd type="none" w="med" len="med"/>
-                      <a:tailEnd type="none" w="med" len="med"/>
-                    </a:lnR>
-                    <a:lnT w="12700" cap="flat" cmpd="sng" algn="ctr">
-                      <a:solidFill>
-                        <a:schemeClr val="accent2"/>
-                      </a:solidFill>
-                      <a:prstDash val="solid"/>
-                      <a:round/>
-                      <a:headEnd type="none" w="med" len="med"/>
-                      <a:tailEnd type="none" w="med" len="med"/>
-                    </a:lnT>
-                    <a:lnB w="12700" cap="flat" cmpd="sng" algn="ctr">
-                      <a:solidFill>
-                        <a:schemeClr val="accent2"/>
-                      </a:solidFill>
-                      <a:prstDash val="solid"/>
-                      <a:round/>
-                      <a:headEnd type="none" w="med" len="med"/>
-                      <a:tailEnd type="none" w="med" len="med"/>
-                    </a:lnB>
-                  </a:tcPr>
+                  <a:tcPr marL="47461" marR="47461" marT="0" marB="0"/>
+                </a:tc>
+                <a:extLst>
+                  <a:ext uri="{0D108BD9-81ED-4DB2-BD59-A6C34878D82A}">
+                    <a16:rowId xmlns:a16="http://schemas.microsoft.com/office/drawing/2014/main" val="690827942"/>
+                  </a:ext>
+                </a:extLst>
+              </a:tr>
+              <a:tr h="561851">
+                <a:tc>
+                  <a:txBody>
+                    <a:bodyPr/>
+                    <a:lstStyle/>
+                    <a:p>
+                      <a:pPr indent="0" algn="ctr">
+                        <a:lnSpc>
+                          <a:spcPct val="100000"/>
+                        </a:lnSpc>
+                        <a:spcAft>
+                          <a:spcPts val="0"/>
+                        </a:spcAft>
+                      </a:pPr>
+                      <a:r>
+                        <a:rPr lang="ru-RU" sz="1800" b="0" dirty="0">
+                          <a:effectLst/>
+                        </a:rPr>
+                        <a:t>Интеграция MES+SCADA+LIMS в единый интерфейс</a:t>
+                      </a:r>
+                      <a:endParaRPr lang="ru-RU" sz="1800" b="0" dirty="0">
+                        <a:effectLst/>
+                        <a:latin typeface="Times New Roman" panose="02020603050405020304" pitchFamily="18" charset="0"/>
+                        <a:ea typeface="Times New Roman" panose="02020603050405020304" pitchFamily="18" charset="0"/>
+                        <a:cs typeface="Times New Roman" panose="02020603050405020304" pitchFamily="18" charset="0"/>
+                      </a:endParaRPr>
+                    </a:p>
+                  </a:txBody>
+                  <a:tcPr marL="47461" marR="47461" marT="0" marB="0"/>
                 </a:tc>
                 <a:tc>
                   <a:txBody>
                     <a:bodyPr/>
                     <a:lstStyle/>
                     <a:p>
-                      <a:pPr indent="0" algn="l">
+                      <a:pPr indent="0" algn="ctr">
                         <a:lnSpc>
-                          <a:spcPct val="150000"/>
+                          <a:spcPct val="100000"/>
                         </a:lnSpc>
                         <a:spcAft>
                           <a:spcPts val="0"/>
                         </a:spcAft>
                       </a:pPr>
                       <a:r>
-                        <a:rPr lang="ru-RU" sz="1400" dirty="0">
+                        <a:rPr lang="ru-RU" sz="1800" b="0" dirty="0">
                           <a:effectLst/>
-                          <a:latin typeface="+mn-lt"/>
                         </a:rPr>
-                        <a:t>Высокая стоимость, сложность адаптации к конкретным металлургическим процессам и данным лабораторий.</a:t>
+                        <a:t>Частично</a:t>
                       </a:r>
-                      <a:endParaRPr lang="ru-RU" sz="1400" dirty="0">
-                        <a:solidFill>
-                          <a:srgbClr val="000000"/>
-                        </a:solidFill>
+                      <a:endParaRPr lang="ru-RU" sz="1800" b="0" dirty="0">
                         <a:effectLst/>
-                        <a:latin typeface="+mn-lt"/>
-                        <a:ea typeface="Arial Unicode MS"/>
+                        <a:latin typeface="Times New Roman" panose="02020603050405020304" pitchFamily="18" charset="0"/>
+                        <a:ea typeface="Times New Roman" panose="02020603050405020304" pitchFamily="18" charset="0"/>
                         <a:cs typeface="Times New Roman" panose="02020603050405020304" pitchFamily="18" charset="0"/>
                       </a:endParaRPr>
                     </a:p>
                   </a:txBody>
-                  <a:tcPr marL="68580" marR="68580" marT="0" marB="0">
-                    <a:lnL w="12700" cap="flat" cmpd="sng" algn="ctr">
-                      <a:solidFill>
-                        <a:schemeClr val="accent2"/>
-                      </a:solidFill>
-                      <a:prstDash val="solid"/>
-                      <a:round/>
-                      <a:headEnd type="none" w="med" len="med"/>
-                      <a:tailEnd type="none" w="med" len="med"/>
-                    </a:lnL>
-                    <a:lnR w="12700" cap="flat" cmpd="sng" algn="ctr">
-                      <a:solidFill>
-                        <a:schemeClr val="accent2"/>
-                      </a:solidFill>
-                      <a:prstDash val="solid"/>
-                      <a:round/>
-                      <a:headEnd type="none" w="med" len="med"/>
-                      <a:tailEnd type="none" w="med" len="med"/>
-                    </a:lnR>
-                    <a:lnT w="12700" cap="flat" cmpd="sng" algn="ctr">
-                      <a:solidFill>
-                        <a:schemeClr val="accent2"/>
-                      </a:solidFill>
-                      <a:prstDash val="solid"/>
-                      <a:round/>
-                      <a:headEnd type="none" w="med" len="med"/>
-                      <a:tailEnd type="none" w="med" len="med"/>
-                    </a:lnT>
-                    <a:lnB w="12700" cap="flat" cmpd="sng" algn="ctr">
-                      <a:solidFill>
-                        <a:schemeClr val="accent2"/>
-                      </a:solidFill>
-                      <a:prstDash val="solid"/>
-                      <a:round/>
-                      <a:headEnd type="none" w="med" len="med"/>
-                      <a:tailEnd type="none" w="med" len="med"/>
-                    </a:lnB>
-                  </a:tcPr>
+                  <a:tcPr marL="47461" marR="47461" marT="0" marB="0"/>
                 </a:tc>
-                <a:extLst>
-                  <a:ext uri="{0D108BD9-81ED-4DB2-BD59-A6C34878D82A}">
-                    <a16:rowId xmlns:a16="http://schemas.microsoft.com/office/drawing/2014/main" val="1008181802"/>
-                  </a:ext>
-                </a:extLst>
-              </a:tr>
-              <a:tr h="1014681">
                 <a:tc>
                   <a:txBody>
                     <a:bodyPr/>
                     <a:lstStyle/>
                     <a:p>
-                      <a:pPr indent="0" algn="l">
+                      <a:pPr indent="0" algn="ctr">
                         <a:lnSpc>
-                          <a:spcPct val="150000"/>
+                          <a:spcPct val="100000"/>
                         </a:lnSpc>
                         <a:spcAft>
                           <a:spcPts val="0"/>
                         </a:spcAft>
                       </a:pPr>
                       <a:r>
-                        <a:rPr lang="ru-RU" sz="1400" b="0" dirty="0">
+                        <a:rPr lang="ru-RU" sz="1800" b="0" dirty="0">
                           <a:effectLst/>
-                          <a:latin typeface="+mn-lt"/>
                         </a:rPr>
-                        <a:t>Специализированные </a:t>
+                        <a:t>Частично</a:t>
                       </a:r>
-                      <a:r>
-                        <a:rPr lang="en-US" sz="1400" b="0" dirty="0">
-                          <a:effectLst/>
-                          <a:latin typeface="+mn-lt"/>
-                        </a:rPr>
-                        <a:t>MES (Siemens </a:t>
-                      </a:r>
-                      <a:r>
-                        <a:rPr lang="en-US" sz="1400" b="0" dirty="0" err="1">
-                          <a:effectLst/>
-                          <a:latin typeface="+mn-lt"/>
-                        </a:rPr>
-                        <a:t>Opcenter</a:t>
-                      </a:r>
-                      <a:r>
-                        <a:rPr lang="en-US" sz="1400" b="0" dirty="0">
-                          <a:effectLst/>
-                          <a:latin typeface="+mn-lt"/>
-                        </a:rPr>
-                        <a:t>)</a:t>
-                      </a:r>
-                      <a:endParaRPr lang="ru-RU" sz="1400" b="0" dirty="0">
-                        <a:solidFill>
-                          <a:srgbClr val="000000"/>
-                        </a:solidFill>
+                      <a:endParaRPr lang="ru-RU" sz="1800" b="0" dirty="0">
                         <a:effectLst/>
-                        <a:latin typeface="+mn-lt"/>
-                        <a:ea typeface="Arial Unicode MS"/>
+                        <a:latin typeface="Times New Roman" panose="02020603050405020304" pitchFamily="18" charset="0"/>
+                        <a:ea typeface="Times New Roman" panose="02020603050405020304" pitchFamily="18" charset="0"/>
                         <a:cs typeface="Times New Roman" panose="02020603050405020304" pitchFamily="18" charset="0"/>
                       </a:endParaRPr>
                     </a:p>
                   </a:txBody>
-                  <a:tcPr marL="68580" marR="68580" marT="0" marB="0">
-                    <a:lnL w="12700" cap="flat" cmpd="sng" algn="ctr">
-                      <a:solidFill>
-                        <a:schemeClr val="accent2"/>
-                      </a:solidFill>
-                      <a:prstDash val="solid"/>
-                      <a:round/>
-                      <a:headEnd type="none" w="med" len="med"/>
-                      <a:tailEnd type="none" w="med" len="med"/>
-                    </a:lnL>
-                    <a:lnR w="12700" cap="flat" cmpd="sng" algn="ctr">
-                      <a:solidFill>
-                        <a:schemeClr val="accent2"/>
-                      </a:solidFill>
-                      <a:prstDash val="solid"/>
-                      <a:round/>
-                      <a:headEnd type="none" w="med" len="med"/>
-                      <a:tailEnd type="none" w="med" len="med"/>
-                    </a:lnR>
-                    <a:lnT w="12700" cap="flat" cmpd="sng" algn="ctr">
-                      <a:solidFill>
-                        <a:schemeClr val="accent2"/>
-                      </a:solidFill>
-                      <a:prstDash val="solid"/>
-                      <a:round/>
-                      <a:headEnd type="none" w="med" len="med"/>
-                      <a:tailEnd type="none" w="med" len="med"/>
-                    </a:lnT>
-                    <a:lnB w="12700" cap="flat" cmpd="sng" algn="ctr">
-                      <a:solidFill>
-                        <a:schemeClr val="accent2"/>
-                      </a:solidFill>
-                      <a:prstDash val="solid"/>
-                      <a:round/>
-                      <a:headEnd type="none" w="med" len="med"/>
-                      <a:tailEnd type="none" w="med" len="med"/>
-                    </a:lnB>
-                  </a:tcPr>
+                  <a:tcPr marL="47461" marR="47461" marT="0" marB="0"/>
                 </a:tc>
                 <a:tc>
                   <a:txBody>
                     <a:bodyPr/>
                     <a:lstStyle/>
                     <a:p>
-                      <a:pPr indent="0" algn="l">
+                      <a:pPr indent="0" algn="ctr">
                         <a:lnSpc>
-                          <a:spcPct val="150000"/>
+                          <a:spcPct val="100000"/>
                         </a:lnSpc>
                         <a:spcAft>
                           <a:spcPts val="0"/>
                         </a:spcAft>
                       </a:pPr>
                       <a:r>
-                        <a:rPr lang="ru-RU" sz="1400">
+                        <a:rPr lang="ru-RU" sz="1800" b="0" dirty="0">
                           <a:effectLst/>
-                          <a:latin typeface="+mn-lt"/>
                         </a:rPr>
-                        <a:t>Мощный модуль анализа качества, интеграция с MES</a:t>
+                        <a:t>Частично</a:t>
                       </a:r>
-                      <a:endParaRPr lang="ru-RU" sz="1400">
-                        <a:solidFill>
-                          <a:srgbClr val="000000"/>
-                        </a:solidFill>
+                      <a:endParaRPr lang="ru-RU" sz="1800" b="0" dirty="0">
                         <a:effectLst/>
-                        <a:latin typeface="+mn-lt"/>
-                        <a:ea typeface="Arial Unicode MS"/>
+                        <a:latin typeface="Times New Roman" panose="02020603050405020304" pitchFamily="18" charset="0"/>
+                        <a:ea typeface="Times New Roman" panose="02020603050405020304" pitchFamily="18" charset="0"/>
                         <a:cs typeface="Times New Roman" panose="02020603050405020304" pitchFamily="18" charset="0"/>
                       </a:endParaRPr>
                     </a:p>
                   </a:txBody>
-                  <a:tcPr marL="68580" marR="68580" marT="0" marB="0">
-                    <a:lnL w="12700" cap="flat" cmpd="sng" algn="ctr">
-                      <a:solidFill>
-                        <a:schemeClr val="accent2"/>
-                      </a:solidFill>
-                      <a:prstDash val="solid"/>
-                      <a:round/>
-                      <a:headEnd type="none" w="med" len="med"/>
-                      <a:tailEnd type="none" w="med" len="med"/>
-                    </a:lnL>
-                    <a:lnR w="12700" cap="flat" cmpd="sng" algn="ctr">
-                      <a:solidFill>
-                        <a:schemeClr val="accent2"/>
-                      </a:solidFill>
-                      <a:prstDash val="solid"/>
-                      <a:round/>
-                      <a:headEnd type="none" w="med" len="med"/>
-                      <a:tailEnd type="none" w="med" len="med"/>
-                    </a:lnR>
-                    <a:lnT w="12700" cap="flat" cmpd="sng" algn="ctr">
-                      <a:solidFill>
-                        <a:schemeClr val="accent2"/>
-                      </a:solidFill>
-                      <a:prstDash val="solid"/>
-                      <a:round/>
-                      <a:headEnd type="none" w="med" len="med"/>
-                      <a:tailEnd type="none" w="med" len="med"/>
-                    </a:lnT>
-                    <a:lnB w="12700" cap="flat" cmpd="sng" algn="ctr">
-                      <a:solidFill>
-                        <a:schemeClr val="accent2"/>
-                      </a:solidFill>
-                      <a:prstDash val="solid"/>
-                      <a:round/>
-                      <a:headEnd type="none" w="med" len="med"/>
-                      <a:tailEnd type="none" w="med" len="med"/>
-                    </a:lnB>
-                  </a:tcPr>
+                  <a:tcPr marL="47461" marR="47461" marT="0" marB="0"/>
                 </a:tc>
                 <a:tc>
                   <a:txBody>
                     <a:bodyPr/>
                     <a:lstStyle/>
                     <a:p>
-                      <a:pPr indent="0" algn="l">
+                      <a:pPr indent="0" algn="ctr">
                         <a:lnSpc>
-                          <a:spcPct val="150000"/>
+                          <a:spcPct val="100000"/>
                         </a:lnSpc>
                         <a:spcAft>
                           <a:spcPts val="0"/>
                         </a:spcAft>
                       </a:pPr>
                       <a:r>
-                        <a:rPr lang="ru-RU" sz="1400" dirty="0">
+                        <a:rPr lang="ru-RU" sz="1800" b="0">
                           <a:effectLst/>
-                          <a:latin typeface="+mn-lt"/>
                         </a:rPr>
-                        <a:t>Требует глубокой и дорогостоящей интеграции в существующий ИТ-ландшафт предприятия.</a:t>
+                        <a:t>Нет</a:t>
                       </a:r>
-                      <a:endParaRPr lang="ru-RU" sz="1400" dirty="0">
-                        <a:solidFill>
-                          <a:srgbClr val="000000"/>
-                        </a:solidFill>
+                      <a:endParaRPr lang="ru-RU" sz="1800" b="0">
                         <a:effectLst/>
-                        <a:latin typeface="+mn-lt"/>
-                        <a:ea typeface="Arial Unicode MS"/>
+                        <a:latin typeface="Times New Roman" panose="02020603050405020304" pitchFamily="18" charset="0"/>
+                        <a:ea typeface="Times New Roman" panose="02020603050405020304" pitchFamily="18" charset="0"/>
                         <a:cs typeface="Times New Roman" panose="02020603050405020304" pitchFamily="18" charset="0"/>
                       </a:endParaRPr>
                     </a:p>
                   </a:txBody>
-                  <a:tcPr marL="68580" marR="68580" marT="0" marB="0">
-                    <a:lnL w="12700" cap="flat" cmpd="sng" algn="ctr">
-                      <a:solidFill>
-                        <a:schemeClr val="accent2"/>
-                      </a:solidFill>
-                      <a:prstDash val="solid"/>
-                      <a:round/>
-                      <a:headEnd type="none" w="med" len="med"/>
-                      <a:tailEnd type="none" w="med" len="med"/>
-                    </a:lnL>
-                    <a:lnR w="12700" cap="flat" cmpd="sng" algn="ctr">
-                      <a:solidFill>
-                        <a:schemeClr val="accent2"/>
-                      </a:solidFill>
-                      <a:prstDash val="solid"/>
-                      <a:round/>
-                      <a:headEnd type="none" w="med" len="med"/>
-                      <a:tailEnd type="none" w="med" len="med"/>
-                    </a:lnR>
-                    <a:lnT w="12700" cap="flat" cmpd="sng" algn="ctr">
-                      <a:solidFill>
-                        <a:schemeClr val="accent2"/>
-                      </a:solidFill>
-                      <a:prstDash val="solid"/>
-                      <a:round/>
-                      <a:headEnd type="none" w="med" len="med"/>
-                      <a:tailEnd type="none" w="med" len="med"/>
-                    </a:lnT>
-                    <a:lnB w="12700" cap="flat" cmpd="sng" algn="ctr">
-                      <a:solidFill>
-                        <a:schemeClr val="accent2"/>
-                      </a:solidFill>
-                      <a:prstDash val="solid"/>
-                      <a:round/>
-                      <a:headEnd type="none" w="med" len="med"/>
-                      <a:tailEnd type="none" w="med" len="med"/>
-                    </a:lnB>
-                  </a:tcPr>
+                  <a:tcPr marL="47461" marR="47461" marT="0" marB="0"/>
                 </a:tc>
-                <a:extLst>
-                  <a:ext uri="{0D108BD9-81ED-4DB2-BD59-A6C34878D82A}">
-                    <a16:rowId xmlns:a16="http://schemas.microsoft.com/office/drawing/2014/main" val="1962064597"/>
-                  </a:ext>
-                </a:extLst>
-              </a:tr>
-              <a:tr h="1014681">
                 <a:tc>
                   <a:txBody>
                     <a:bodyPr/>
                     <a:lstStyle/>
                     <a:p>
-                      <a:pPr indent="0" algn="l">
+                      <a:pPr indent="0" algn="ctr">
                         <a:lnSpc>
-                          <a:spcPct val="150000"/>
+                          <a:spcPct val="100000"/>
                         </a:lnSpc>
                         <a:spcAft>
                           <a:spcPts val="0"/>
                         </a:spcAft>
                       </a:pPr>
                       <a:r>
-                        <a:rPr lang="ru-RU" sz="1400" b="0">
+                        <a:rPr lang="ru-RU" sz="1800" b="0">
                           <a:effectLst/>
-                          <a:latin typeface="+mn-lt"/>
                         </a:rPr>
-                        <a:t>SAP QM</a:t>
+                        <a:t>Да</a:t>
                       </a:r>
-                      <a:endParaRPr lang="ru-RU" sz="1400" b="0">
-                        <a:solidFill>
-                          <a:srgbClr val="000000"/>
-                        </a:solidFill>
+                      <a:endParaRPr lang="ru-RU" sz="1800" b="0">
                         <a:effectLst/>
-                        <a:latin typeface="+mn-lt"/>
-                        <a:ea typeface="Arial Unicode MS"/>
+                        <a:latin typeface="Times New Roman" panose="02020603050405020304" pitchFamily="18" charset="0"/>
+                        <a:ea typeface="Times New Roman" panose="02020603050405020304" pitchFamily="18" charset="0"/>
                         <a:cs typeface="Times New Roman" panose="02020603050405020304" pitchFamily="18" charset="0"/>
                       </a:endParaRPr>
                     </a:p>
                   </a:txBody>
-                  <a:tcPr marL="68580" marR="68580" marT="0" marB="0">
-                    <a:lnL w="12700" cap="flat" cmpd="sng" algn="ctr">
-                      <a:solidFill>
-                        <a:schemeClr val="accent2"/>
-                      </a:solidFill>
-                      <a:prstDash val="solid"/>
-                      <a:round/>
-                      <a:headEnd type="none" w="med" len="med"/>
-                      <a:tailEnd type="none" w="med" len="med"/>
-                    </a:lnL>
-                    <a:lnR w="12700" cap="flat" cmpd="sng" algn="ctr">
-                      <a:solidFill>
-                        <a:schemeClr val="accent2"/>
-                      </a:solidFill>
-                      <a:prstDash val="solid"/>
-                      <a:round/>
-                      <a:headEnd type="none" w="med" len="med"/>
-                      <a:tailEnd type="none" w="med" len="med"/>
-                    </a:lnR>
-                    <a:lnT w="12700" cap="flat" cmpd="sng" algn="ctr">
-                      <a:solidFill>
-                        <a:schemeClr val="accent2"/>
-                      </a:solidFill>
-                      <a:prstDash val="solid"/>
-                      <a:round/>
-                      <a:headEnd type="none" w="med" len="med"/>
-                      <a:tailEnd type="none" w="med" len="med"/>
-                    </a:lnT>
-                    <a:lnB w="12700" cap="flat" cmpd="sng" algn="ctr">
-                      <a:solidFill>
-                        <a:schemeClr val="accent2"/>
-                      </a:solidFill>
-                      <a:prstDash val="solid"/>
-                      <a:round/>
-                      <a:headEnd type="none" w="med" len="med"/>
-                      <a:tailEnd type="none" w="med" len="med"/>
-                    </a:lnB>
-                  </a:tcPr>
+                  <a:tcPr marL="47461" marR="47461" marT="0" marB="0"/>
+                </a:tc>
+                <a:extLst>
+                  <a:ext uri="{0D108BD9-81ED-4DB2-BD59-A6C34878D82A}">
+                    <a16:rowId xmlns:a16="http://schemas.microsoft.com/office/drawing/2014/main" val="140717963"/>
+                  </a:ext>
+                </a:extLst>
+              </a:tr>
+              <a:tr h="366770">
+                <a:tc>
+                  <a:txBody>
+                    <a:bodyPr/>
+                    <a:lstStyle/>
+                    <a:p>
+                      <a:pPr indent="0" algn="ctr">
+                        <a:lnSpc>
+                          <a:spcPct val="100000"/>
+                        </a:lnSpc>
+                        <a:spcAft>
+                          <a:spcPts val="0"/>
+                        </a:spcAft>
+                      </a:pPr>
+                      <a:r>
+                        <a:rPr lang="ru-RU" sz="1800" b="0" dirty="0">
+                          <a:effectLst/>
+                        </a:rPr>
+                        <a:t>Ролевые витрины данных</a:t>
+                      </a:r>
+                      <a:endParaRPr lang="ru-RU" sz="1800" b="0" dirty="0">
+                        <a:effectLst/>
+                        <a:latin typeface="Times New Roman" panose="02020603050405020304" pitchFamily="18" charset="0"/>
+                        <a:ea typeface="Times New Roman" panose="02020603050405020304" pitchFamily="18" charset="0"/>
+                        <a:cs typeface="Times New Roman" panose="02020603050405020304" pitchFamily="18" charset="0"/>
+                      </a:endParaRPr>
+                    </a:p>
+                  </a:txBody>
+                  <a:tcPr marL="47461" marR="47461" marT="0" marB="0"/>
                 </a:tc>
                 <a:tc>
                   <a:txBody>
                     <a:bodyPr/>
                     <a:lstStyle/>
                     <a:p>
-                      <a:pPr indent="0" algn="l">
+                      <a:pPr indent="0" algn="ctr">
                         <a:lnSpc>
-                          <a:spcPct val="150000"/>
+                          <a:spcPct val="100000"/>
                         </a:lnSpc>
                         <a:spcAft>
                           <a:spcPts val="0"/>
                         </a:spcAft>
                       </a:pPr>
                       <a:r>
-                        <a:rPr lang="ru-RU" sz="1400">
+                        <a:rPr lang="ru-RU" sz="1800" b="0" dirty="0">
                           <a:effectLst/>
-                          <a:latin typeface="+mn-lt"/>
                         </a:rPr>
-                        <a:t>Встроен в ERP, поддерживает сертификацию и аудит</a:t>
+                        <a:t>Нет</a:t>
                       </a:r>
-                      <a:endParaRPr lang="ru-RU" sz="1400">
-                        <a:solidFill>
-                          <a:srgbClr val="000000"/>
-                        </a:solidFill>
+                      <a:endParaRPr lang="ru-RU" sz="1800" b="0" dirty="0">
                         <a:effectLst/>
-                        <a:latin typeface="+mn-lt"/>
-                        <a:ea typeface="Arial Unicode MS"/>
+                        <a:latin typeface="Times New Roman" panose="02020603050405020304" pitchFamily="18" charset="0"/>
+                        <a:ea typeface="Times New Roman" panose="02020603050405020304" pitchFamily="18" charset="0"/>
                         <a:cs typeface="Times New Roman" panose="02020603050405020304" pitchFamily="18" charset="0"/>
                       </a:endParaRPr>
                     </a:p>
                   </a:txBody>
-                  <a:tcPr marL="68580" marR="68580" marT="0" marB="0">
-                    <a:lnL w="12700" cap="flat" cmpd="sng" algn="ctr">
-                      <a:solidFill>
-                        <a:schemeClr val="accent2"/>
-                      </a:solidFill>
-                      <a:prstDash val="solid"/>
-                      <a:round/>
-                      <a:headEnd type="none" w="med" len="med"/>
-                      <a:tailEnd type="none" w="med" len="med"/>
-                    </a:lnL>
-                    <a:lnR w="12700" cap="flat" cmpd="sng" algn="ctr">
-                      <a:solidFill>
-                        <a:schemeClr val="accent2"/>
-                      </a:solidFill>
-                      <a:prstDash val="solid"/>
-                      <a:round/>
-                      <a:headEnd type="none" w="med" len="med"/>
-                      <a:tailEnd type="none" w="med" len="med"/>
-                    </a:lnR>
-                    <a:lnT w="12700" cap="flat" cmpd="sng" algn="ctr">
-                      <a:solidFill>
-                        <a:schemeClr val="accent2"/>
-                      </a:solidFill>
-                      <a:prstDash val="solid"/>
-                      <a:round/>
-                      <a:headEnd type="none" w="med" len="med"/>
-                      <a:tailEnd type="none" w="med" len="med"/>
-                    </a:lnT>
-                    <a:lnB w="12700" cap="flat" cmpd="sng" algn="ctr">
-                      <a:solidFill>
-                        <a:schemeClr val="accent2"/>
-                      </a:solidFill>
-                      <a:prstDash val="solid"/>
-                      <a:round/>
-                      <a:headEnd type="none" w="med" len="med"/>
-                      <a:tailEnd type="none" w="med" len="med"/>
-                    </a:lnB>
-                  </a:tcPr>
+                  <a:tcPr marL="47461" marR="47461" marT="0" marB="0"/>
                 </a:tc>
                 <a:tc>
                   <a:txBody>
                     <a:bodyPr/>
                     <a:lstStyle/>
                     <a:p>
-                      <a:pPr indent="0" algn="l">
+                      <a:pPr indent="0" algn="ctr">
                         <a:lnSpc>
-                          <a:spcPct val="150000"/>
+                          <a:spcPct val="100000"/>
                         </a:lnSpc>
                         <a:spcAft>
                           <a:spcPts val="0"/>
                         </a:spcAft>
                       </a:pPr>
                       <a:r>
-                        <a:rPr lang="ru-RU" sz="1400" dirty="0">
+                        <a:rPr lang="ru-RU" sz="1800" b="0" dirty="0">
                           <a:effectLst/>
-                          <a:latin typeface="+mn-lt"/>
                         </a:rPr>
-                        <a:t>Не предназначен для оперативного анализа больших объемов производственных и лабораторных данных в реальном времени.</a:t>
+                        <a:t>Нет</a:t>
                       </a:r>
-                      <a:endParaRPr lang="ru-RU" sz="1400" dirty="0">
-                        <a:solidFill>
-                          <a:srgbClr val="000000"/>
-                        </a:solidFill>
+                      <a:endParaRPr lang="ru-RU" sz="1800" b="0" dirty="0">
                         <a:effectLst/>
-                        <a:latin typeface="+mn-lt"/>
-                        <a:ea typeface="Arial Unicode MS"/>
+                        <a:latin typeface="Times New Roman" panose="02020603050405020304" pitchFamily="18" charset="0"/>
+                        <a:ea typeface="Times New Roman" panose="02020603050405020304" pitchFamily="18" charset="0"/>
                         <a:cs typeface="Times New Roman" panose="02020603050405020304" pitchFamily="18" charset="0"/>
                       </a:endParaRPr>
                     </a:p>
                   </a:txBody>
-                  <a:tcPr marL="68580" marR="68580" marT="0" marB="0">
-                    <a:lnL w="12700" cap="flat" cmpd="sng" algn="ctr">
-                      <a:solidFill>
-                        <a:schemeClr val="accent2"/>
-                      </a:solidFill>
-                      <a:prstDash val="solid"/>
-                      <a:round/>
-                      <a:headEnd type="none" w="med" len="med"/>
-                      <a:tailEnd type="none" w="med" len="med"/>
-                    </a:lnL>
-                    <a:lnR w="12700" cap="flat" cmpd="sng" algn="ctr">
-                      <a:solidFill>
-                        <a:schemeClr val="accent2"/>
-                      </a:solidFill>
-                      <a:prstDash val="solid"/>
-                      <a:round/>
-                      <a:headEnd type="none" w="med" len="med"/>
-                      <a:tailEnd type="none" w="med" len="med"/>
-                    </a:lnR>
-                    <a:lnT w="12700" cap="flat" cmpd="sng" algn="ctr">
-                      <a:solidFill>
-                        <a:schemeClr val="accent2"/>
-                      </a:solidFill>
-                      <a:prstDash val="solid"/>
-                      <a:round/>
-                      <a:headEnd type="none" w="med" len="med"/>
-                      <a:tailEnd type="none" w="med" len="med"/>
-                    </a:lnT>
-                    <a:lnB w="12700" cap="flat" cmpd="sng" algn="ctr">
-                      <a:solidFill>
-                        <a:schemeClr val="accent2"/>
-                      </a:solidFill>
-                      <a:prstDash val="solid"/>
-                      <a:round/>
-                      <a:headEnd type="none" w="med" len="med"/>
-                      <a:tailEnd type="none" w="med" len="med"/>
-                    </a:lnB>
-                  </a:tcPr>
+                  <a:tcPr marL="47461" marR="47461" marT="0" marB="0"/>
                 </a:tc>
-                <a:extLst>
-                  <a:ext uri="{0D108BD9-81ED-4DB2-BD59-A6C34878D82A}">
-                    <a16:rowId xmlns:a16="http://schemas.microsoft.com/office/drawing/2014/main" val="552548168"/>
-                  </a:ext>
-                </a:extLst>
-              </a:tr>
-              <a:tr h="1014681">
                 <a:tc>
                   <a:txBody>
                     <a:bodyPr/>
                     <a:lstStyle/>
                     <a:p>
-                      <a:pPr indent="0" algn="l">
+                      <a:pPr indent="0" algn="ctr">
                         <a:lnSpc>
-                          <a:spcPct val="150000"/>
+                          <a:spcPct val="100000"/>
                         </a:lnSpc>
                         <a:spcAft>
                           <a:spcPts val="0"/>
                         </a:spcAft>
                       </a:pPr>
                       <a:r>
-                        <a:rPr lang="ru-RU" sz="1400" b="0" dirty="0">
+                        <a:rPr lang="ru-RU" sz="1800" b="0" dirty="0">
                           <a:effectLst/>
-                          <a:latin typeface="+mn-lt"/>
                         </a:rPr>
-                        <a:t>Каталоги данных</a:t>
+                        <a:t>Нет</a:t>
                       </a:r>
-                      <a:endParaRPr lang="ru-RU" sz="1400" b="0" dirty="0">
-                        <a:solidFill>
-                          <a:srgbClr val="000000"/>
-                        </a:solidFill>
+                      <a:endParaRPr lang="ru-RU" sz="1800" b="0" dirty="0">
                         <a:effectLst/>
-                        <a:latin typeface="+mn-lt"/>
-                        <a:ea typeface="Arial Unicode MS"/>
+                        <a:latin typeface="Times New Roman" panose="02020603050405020304" pitchFamily="18" charset="0"/>
+                        <a:ea typeface="Times New Roman" panose="02020603050405020304" pitchFamily="18" charset="0"/>
                         <a:cs typeface="Times New Roman" panose="02020603050405020304" pitchFamily="18" charset="0"/>
                       </a:endParaRPr>
                     </a:p>
                   </a:txBody>
-                  <a:tcPr marL="68580" marR="68580" marT="0" marB="0">
-                    <a:lnL w="12700" cap="flat" cmpd="sng" algn="ctr">
-                      <a:solidFill>
-                        <a:schemeClr val="accent2"/>
-                      </a:solidFill>
-                      <a:prstDash val="solid"/>
-                      <a:round/>
-                      <a:headEnd type="none" w="med" len="med"/>
-                      <a:tailEnd type="none" w="med" len="med"/>
-                    </a:lnL>
-                    <a:lnR w="12700" cap="flat" cmpd="sng" algn="ctr">
-                      <a:solidFill>
-                        <a:schemeClr val="accent2"/>
-                      </a:solidFill>
-                      <a:prstDash val="solid"/>
-                      <a:round/>
-                      <a:headEnd type="none" w="med" len="med"/>
-                      <a:tailEnd type="none" w="med" len="med"/>
-                    </a:lnR>
-                    <a:lnT w="12700" cap="flat" cmpd="sng" algn="ctr">
-                      <a:solidFill>
-                        <a:schemeClr val="accent2"/>
-                      </a:solidFill>
-                      <a:prstDash val="solid"/>
-                      <a:round/>
-                      <a:headEnd type="none" w="med" len="med"/>
-                      <a:tailEnd type="none" w="med" len="med"/>
-                    </a:lnT>
-                    <a:lnB w="12700" cap="flat" cmpd="sng" algn="ctr">
-                      <a:solidFill>
-                        <a:schemeClr val="accent2"/>
-                      </a:solidFill>
-                      <a:prstDash val="solid"/>
-                      <a:round/>
-                      <a:headEnd type="none" w="med" len="med"/>
-                      <a:tailEnd type="none" w="med" len="med"/>
-                    </a:lnB>
-                  </a:tcPr>
+                  <a:tcPr marL="47461" marR="47461" marT="0" marB="0"/>
                 </a:tc>
                 <a:tc>
                   <a:txBody>
                     <a:bodyPr/>
                     <a:lstStyle/>
                     <a:p>
-                      <a:pPr indent="0" algn="l">
+                      <a:pPr indent="0" algn="ctr">
                         <a:lnSpc>
-                          <a:spcPct val="150000"/>
+                          <a:spcPct val="100000"/>
                         </a:lnSpc>
                         <a:spcAft>
                           <a:spcPts val="0"/>
                         </a:spcAft>
                       </a:pPr>
                       <a:r>
-                        <a:rPr lang="ru-RU" sz="1400">
+                        <a:rPr lang="ru-RU" sz="1800" b="0">
                           <a:effectLst/>
-                          <a:latin typeface="+mn-lt"/>
                         </a:rPr>
-                        <a:t>Адаптированы под внутренние процессы</a:t>
+                        <a:t>Нет</a:t>
                       </a:r>
-                      <a:endParaRPr lang="ru-RU" sz="1400">
-                        <a:solidFill>
-                          <a:srgbClr val="000000"/>
-                        </a:solidFill>
+                      <a:endParaRPr lang="ru-RU" sz="1800" b="0">
                         <a:effectLst/>
-                        <a:latin typeface="+mn-lt"/>
-                        <a:ea typeface="Arial Unicode MS"/>
+                        <a:latin typeface="Times New Roman" panose="02020603050405020304" pitchFamily="18" charset="0"/>
+                        <a:ea typeface="Times New Roman" panose="02020603050405020304" pitchFamily="18" charset="0"/>
                         <a:cs typeface="Times New Roman" panose="02020603050405020304" pitchFamily="18" charset="0"/>
                       </a:endParaRPr>
                     </a:p>
                   </a:txBody>
-                  <a:tcPr marL="68580" marR="68580" marT="0" marB="0">
-                    <a:lnL w="12700" cap="flat" cmpd="sng" algn="ctr">
-                      <a:solidFill>
-                        <a:schemeClr val="accent2"/>
-                      </a:solidFill>
-                      <a:prstDash val="solid"/>
-                      <a:round/>
-                      <a:headEnd type="none" w="med" len="med"/>
-                      <a:tailEnd type="none" w="med" len="med"/>
-                    </a:lnL>
-                    <a:lnR w="12700" cap="flat" cmpd="sng" algn="ctr">
-                      <a:solidFill>
-                        <a:schemeClr val="accent2"/>
-                      </a:solidFill>
-                      <a:prstDash val="solid"/>
-                      <a:round/>
-                      <a:headEnd type="none" w="med" len="med"/>
-                      <a:tailEnd type="none" w="med" len="med"/>
-                    </a:lnR>
-                    <a:lnT w="12700" cap="flat" cmpd="sng" algn="ctr">
-                      <a:solidFill>
-                        <a:schemeClr val="accent2"/>
-                      </a:solidFill>
-                      <a:prstDash val="solid"/>
-                      <a:round/>
-                      <a:headEnd type="none" w="med" len="med"/>
-                      <a:tailEnd type="none" w="med" len="med"/>
-                    </a:lnT>
-                    <a:lnB w="12700" cap="flat" cmpd="sng" algn="ctr">
-                      <a:solidFill>
-                        <a:schemeClr val="accent2"/>
-                      </a:solidFill>
-                      <a:prstDash val="solid"/>
-                      <a:round/>
-                      <a:headEnd type="none" w="med" len="med"/>
-                      <a:tailEnd type="none" w="med" len="med"/>
-                    </a:lnB>
-                  </a:tcPr>
+                  <a:tcPr marL="47461" marR="47461" marT="0" marB="0"/>
                 </a:tc>
                 <a:tc>
                   <a:txBody>
                     <a:bodyPr/>
                     <a:lstStyle/>
                     <a:p>
-                      <a:pPr indent="0" algn="l">
+                      <a:pPr indent="0" algn="ctr">
                         <a:lnSpc>
-                          <a:spcPct val="150000"/>
+                          <a:spcPct val="100000"/>
                         </a:lnSpc>
                         <a:spcAft>
                           <a:spcPts val="0"/>
                         </a:spcAft>
                       </a:pPr>
                       <a:r>
-                        <a:rPr lang="ru-RU" sz="1400" dirty="0">
+                        <a:rPr lang="ru-RU" sz="1800" b="0">
                           <a:effectLst/>
-                          <a:latin typeface="+mn-lt"/>
                         </a:rPr>
-                        <a:t>Это инфраструктурное решение, а не готовое аналитическое приложение для конечных пользователей.</a:t>
+                        <a:t>Нет</a:t>
                       </a:r>
-                      <a:endParaRPr lang="ru-RU" sz="1400" dirty="0">
-                        <a:solidFill>
-                          <a:srgbClr val="000000"/>
-                        </a:solidFill>
+                      <a:endParaRPr lang="ru-RU" sz="1800" b="0">
                         <a:effectLst/>
-                        <a:latin typeface="+mn-lt"/>
-                        <a:ea typeface="Arial Unicode MS"/>
+                        <a:latin typeface="Times New Roman" panose="02020603050405020304" pitchFamily="18" charset="0"/>
+                        <a:ea typeface="Times New Roman" panose="02020603050405020304" pitchFamily="18" charset="0"/>
                         <a:cs typeface="Times New Roman" panose="02020603050405020304" pitchFamily="18" charset="0"/>
                       </a:endParaRPr>
                     </a:p>
                   </a:txBody>
-                  <a:tcPr marL="68580" marR="68580" marT="0" marB="0">
-                    <a:lnL w="12700" cap="flat" cmpd="sng" algn="ctr">
-                      <a:solidFill>
-                        <a:schemeClr val="accent2"/>
-                      </a:solidFill>
-                      <a:prstDash val="solid"/>
-                      <a:round/>
-                      <a:headEnd type="none" w="med" len="med"/>
-                      <a:tailEnd type="none" w="med" len="med"/>
-                    </a:lnL>
-                    <a:lnR w="12700" cap="flat" cmpd="sng" algn="ctr">
-                      <a:solidFill>
-                        <a:schemeClr val="accent2"/>
-                      </a:solidFill>
-                      <a:prstDash val="solid"/>
-                      <a:round/>
-                      <a:headEnd type="none" w="med" len="med"/>
-                      <a:tailEnd type="none" w="med" len="med"/>
-                    </a:lnR>
-                    <a:lnT w="12700" cap="flat" cmpd="sng" algn="ctr">
-                      <a:solidFill>
-                        <a:schemeClr val="accent2"/>
-                      </a:solidFill>
-                      <a:prstDash val="solid"/>
-                      <a:round/>
-                      <a:headEnd type="none" w="med" len="med"/>
-                      <a:tailEnd type="none" w="med" len="med"/>
-                    </a:lnT>
-                    <a:lnB w="12700" cap="flat" cmpd="sng" algn="ctr">
-                      <a:solidFill>
-                        <a:schemeClr val="accent2"/>
-                      </a:solidFill>
-                      <a:prstDash val="solid"/>
-                      <a:round/>
-                      <a:headEnd type="none" w="med" len="med"/>
-                      <a:tailEnd type="none" w="med" len="med"/>
-                    </a:lnB>
-                  </a:tcPr>
+                  <a:tcPr marL="47461" marR="47461" marT="0" marB="0"/>
                 </a:tc>
                 <a:extLst>
                   <a:ext uri="{0D108BD9-81ED-4DB2-BD59-A6C34878D82A}">
-                    <a16:rowId xmlns:a16="http://schemas.microsoft.com/office/drawing/2014/main" val="70278947"/>
+                    <a16:rowId xmlns:a16="http://schemas.microsoft.com/office/drawing/2014/main" val="15140954"/>
+                  </a:ext>
+                </a:extLst>
+              </a:tr>
+              <a:tr h="561851">
+                <a:tc>
+                  <a:txBody>
+                    <a:bodyPr/>
+                    <a:lstStyle/>
+                    <a:p>
+                      <a:pPr indent="0" algn="ctr">
+                        <a:lnSpc>
+                          <a:spcPct val="100000"/>
+                        </a:lnSpc>
+                        <a:spcAft>
+                          <a:spcPts val="0"/>
+                        </a:spcAft>
+                      </a:pPr>
+                      <a:r>
+                        <a:rPr lang="ru-RU" sz="1800" b="0" dirty="0">
+                          <a:effectLst/>
+                        </a:rPr>
+                        <a:t>Мониторинг отклонений в реальном времени</a:t>
+                      </a:r>
+                      <a:endParaRPr lang="ru-RU" sz="1800" b="0" dirty="0">
+                        <a:effectLst/>
+                        <a:latin typeface="Times New Roman" panose="02020603050405020304" pitchFamily="18" charset="0"/>
+                        <a:ea typeface="Times New Roman" panose="02020603050405020304" pitchFamily="18" charset="0"/>
+                        <a:cs typeface="Times New Roman" panose="02020603050405020304" pitchFamily="18" charset="0"/>
+                      </a:endParaRPr>
+                    </a:p>
+                  </a:txBody>
+                  <a:tcPr marL="47461" marR="47461" marT="0" marB="0"/>
+                </a:tc>
+                <a:tc>
+                  <a:txBody>
+                    <a:bodyPr/>
+                    <a:lstStyle/>
+                    <a:p>
+                      <a:pPr indent="0" algn="ctr">
+                        <a:lnSpc>
+                          <a:spcPct val="100000"/>
+                        </a:lnSpc>
+                        <a:spcAft>
+                          <a:spcPts val="0"/>
+                        </a:spcAft>
+                      </a:pPr>
+                      <a:r>
+                        <a:rPr lang="ru-RU" sz="1800" b="0" dirty="0">
+                          <a:effectLst/>
+                        </a:rPr>
+                        <a:t>Да</a:t>
+                      </a:r>
+                      <a:endParaRPr lang="ru-RU" sz="1800" b="0" dirty="0">
+                        <a:effectLst/>
+                        <a:latin typeface="Times New Roman" panose="02020603050405020304" pitchFamily="18" charset="0"/>
+                        <a:ea typeface="Times New Roman" panose="02020603050405020304" pitchFamily="18" charset="0"/>
+                        <a:cs typeface="Times New Roman" panose="02020603050405020304" pitchFamily="18" charset="0"/>
+                      </a:endParaRPr>
+                    </a:p>
+                  </a:txBody>
+                  <a:tcPr marL="47461" marR="47461" marT="0" marB="0"/>
+                </a:tc>
+                <a:tc>
+                  <a:txBody>
+                    <a:bodyPr/>
+                    <a:lstStyle/>
+                    <a:p>
+                      <a:pPr indent="0" algn="ctr">
+                        <a:lnSpc>
+                          <a:spcPct val="100000"/>
+                        </a:lnSpc>
+                        <a:spcAft>
+                          <a:spcPts val="0"/>
+                        </a:spcAft>
+                      </a:pPr>
+                      <a:r>
+                        <a:rPr lang="ru-RU" sz="1800" b="0" dirty="0">
+                          <a:effectLst/>
+                        </a:rPr>
+                        <a:t>Да</a:t>
+                      </a:r>
+                      <a:endParaRPr lang="ru-RU" sz="1800" b="0" dirty="0">
+                        <a:effectLst/>
+                        <a:latin typeface="Times New Roman" panose="02020603050405020304" pitchFamily="18" charset="0"/>
+                        <a:ea typeface="Times New Roman" panose="02020603050405020304" pitchFamily="18" charset="0"/>
+                        <a:cs typeface="Times New Roman" panose="02020603050405020304" pitchFamily="18" charset="0"/>
+                      </a:endParaRPr>
+                    </a:p>
+                  </a:txBody>
+                  <a:tcPr marL="47461" marR="47461" marT="0" marB="0"/>
+                </a:tc>
+                <a:tc>
+                  <a:txBody>
+                    <a:bodyPr/>
+                    <a:lstStyle/>
+                    <a:p>
+                      <a:pPr indent="0" algn="ctr">
+                        <a:lnSpc>
+                          <a:spcPct val="100000"/>
+                        </a:lnSpc>
+                        <a:spcAft>
+                          <a:spcPts val="0"/>
+                        </a:spcAft>
+                      </a:pPr>
+                      <a:r>
+                        <a:rPr lang="ru-RU" sz="1800" b="0" dirty="0">
+                          <a:effectLst/>
+                        </a:rPr>
+                        <a:t>Да</a:t>
+                      </a:r>
+                      <a:endParaRPr lang="ru-RU" sz="1800" b="0" dirty="0">
+                        <a:effectLst/>
+                        <a:latin typeface="Times New Roman" panose="02020603050405020304" pitchFamily="18" charset="0"/>
+                        <a:ea typeface="Times New Roman" panose="02020603050405020304" pitchFamily="18" charset="0"/>
+                        <a:cs typeface="Times New Roman" panose="02020603050405020304" pitchFamily="18" charset="0"/>
+                      </a:endParaRPr>
+                    </a:p>
+                  </a:txBody>
+                  <a:tcPr marL="47461" marR="47461" marT="0" marB="0"/>
+                </a:tc>
+                <a:tc>
+                  <a:txBody>
+                    <a:bodyPr/>
+                    <a:lstStyle/>
+                    <a:p>
+                      <a:pPr indent="0" algn="ctr">
+                        <a:lnSpc>
+                          <a:spcPct val="100000"/>
+                        </a:lnSpc>
+                        <a:spcAft>
+                          <a:spcPts val="0"/>
+                        </a:spcAft>
+                      </a:pPr>
+                      <a:r>
+                        <a:rPr lang="ru-RU" sz="1800" b="0" dirty="0">
+                          <a:effectLst/>
+                        </a:rPr>
+                        <a:t>Да</a:t>
+                      </a:r>
+                      <a:endParaRPr lang="ru-RU" sz="1800" b="0" dirty="0">
+                        <a:effectLst/>
+                        <a:latin typeface="Times New Roman" panose="02020603050405020304" pitchFamily="18" charset="0"/>
+                        <a:ea typeface="Times New Roman" panose="02020603050405020304" pitchFamily="18" charset="0"/>
+                        <a:cs typeface="Times New Roman" panose="02020603050405020304" pitchFamily="18" charset="0"/>
+                      </a:endParaRPr>
+                    </a:p>
+                  </a:txBody>
+                  <a:tcPr marL="47461" marR="47461" marT="0" marB="0"/>
+                </a:tc>
+                <a:tc>
+                  <a:txBody>
+                    <a:bodyPr/>
+                    <a:lstStyle/>
+                    <a:p>
+                      <a:pPr indent="0" algn="ctr">
+                        <a:lnSpc>
+                          <a:spcPct val="100000"/>
+                        </a:lnSpc>
+                        <a:spcAft>
+                          <a:spcPts val="0"/>
+                        </a:spcAft>
+                      </a:pPr>
+                      <a:r>
+                        <a:rPr lang="ru-RU" sz="1800" b="0" dirty="0">
+                          <a:effectLst/>
+                        </a:rPr>
+                        <a:t>Да</a:t>
+                      </a:r>
+                      <a:endParaRPr lang="ru-RU" sz="1800" b="0" dirty="0">
+                        <a:effectLst/>
+                        <a:latin typeface="Times New Roman" panose="02020603050405020304" pitchFamily="18" charset="0"/>
+                        <a:ea typeface="Times New Roman" panose="02020603050405020304" pitchFamily="18" charset="0"/>
+                        <a:cs typeface="Times New Roman" panose="02020603050405020304" pitchFamily="18" charset="0"/>
+                      </a:endParaRPr>
+                    </a:p>
+                  </a:txBody>
+                  <a:tcPr marL="47461" marR="47461" marT="0" marB="0"/>
+                </a:tc>
+                <a:extLst>
+                  <a:ext uri="{0D108BD9-81ED-4DB2-BD59-A6C34878D82A}">
+                    <a16:rowId xmlns:a16="http://schemas.microsoft.com/office/drawing/2014/main" val="3141618997"/>
+                  </a:ext>
+                </a:extLst>
+              </a:tr>
+              <a:tr h="366770">
+                <a:tc>
+                  <a:txBody>
+                    <a:bodyPr/>
+                    <a:lstStyle/>
+                    <a:p>
+                      <a:pPr indent="0" algn="ctr">
+                        <a:lnSpc>
+                          <a:spcPct val="100000"/>
+                        </a:lnSpc>
+                        <a:spcAft>
+                          <a:spcPts val="0"/>
+                        </a:spcAft>
+                      </a:pPr>
+                      <a:r>
+                        <a:rPr lang="ru-RU" sz="1800" b="0" dirty="0">
+                          <a:effectLst/>
+                        </a:rPr>
+                        <a:t>Уведомления об отклонениях</a:t>
+                      </a:r>
+                      <a:endParaRPr lang="ru-RU" sz="1800" b="0" dirty="0">
+                        <a:effectLst/>
+                        <a:latin typeface="Times New Roman" panose="02020603050405020304" pitchFamily="18" charset="0"/>
+                        <a:ea typeface="Times New Roman" panose="02020603050405020304" pitchFamily="18" charset="0"/>
+                        <a:cs typeface="Times New Roman" panose="02020603050405020304" pitchFamily="18" charset="0"/>
+                      </a:endParaRPr>
+                    </a:p>
+                  </a:txBody>
+                  <a:tcPr marL="47461" marR="47461" marT="0" marB="0"/>
+                </a:tc>
+                <a:tc>
+                  <a:txBody>
+                    <a:bodyPr/>
+                    <a:lstStyle/>
+                    <a:p>
+                      <a:pPr indent="0" algn="ctr">
+                        <a:lnSpc>
+                          <a:spcPct val="100000"/>
+                        </a:lnSpc>
+                        <a:spcAft>
+                          <a:spcPts val="0"/>
+                        </a:spcAft>
+                      </a:pPr>
+                      <a:r>
+                        <a:rPr lang="ru-RU" sz="1800" b="0">
+                          <a:effectLst/>
+                        </a:rPr>
+                        <a:t>Нет</a:t>
+                      </a:r>
+                      <a:endParaRPr lang="ru-RU" sz="1800" b="0">
+                        <a:effectLst/>
+                        <a:latin typeface="Times New Roman" panose="02020603050405020304" pitchFamily="18" charset="0"/>
+                        <a:ea typeface="Times New Roman" panose="02020603050405020304" pitchFamily="18" charset="0"/>
+                        <a:cs typeface="Times New Roman" panose="02020603050405020304" pitchFamily="18" charset="0"/>
+                      </a:endParaRPr>
+                    </a:p>
+                  </a:txBody>
+                  <a:tcPr marL="47461" marR="47461" marT="0" marB="0"/>
+                </a:tc>
+                <a:tc>
+                  <a:txBody>
+                    <a:bodyPr/>
+                    <a:lstStyle/>
+                    <a:p>
+                      <a:pPr indent="0" algn="ctr">
+                        <a:lnSpc>
+                          <a:spcPct val="100000"/>
+                        </a:lnSpc>
+                        <a:spcAft>
+                          <a:spcPts val="0"/>
+                        </a:spcAft>
+                      </a:pPr>
+                      <a:r>
+                        <a:rPr lang="ru-RU" sz="1800" b="0" dirty="0">
+                          <a:effectLst/>
+                        </a:rPr>
+                        <a:t>Нет</a:t>
+                      </a:r>
+                      <a:endParaRPr lang="ru-RU" sz="1800" b="0" dirty="0">
+                        <a:effectLst/>
+                        <a:latin typeface="Times New Roman" panose="02020603050405020304" pitchFamily="18" charset="0"/>
+                        <a:ea typeface="Times New Roman" panose="02020603050405020304" pitchFamily="18" charset="0"/>
+                        <a:cs typeface="Times New Roman" panose="02020603050405020304" pitchFamily="18" charset="0"/>
+                      </a:endParaRPr>
+                    </a:p>
+                  </a:txBody>
+                  <a:tcPr marL="47461" marR="47461" marT="0" marB="0"/>
+                </a:tc>
+                <a:tc>
+                  <a:txBody>
+                    <a:bodyPr/>
+                    <a:lstStyle/>
+                    <a:p>
+                      <a:pPr indent="0" algn="ctr">
+                        <a:lnSpc>
+                          <a:spcPct val="100000"/>
+                        </a:lnSpc>
+                        <a:spcAft>
+                          <a:spcPts val="0"/>
+                        </a:spcAft>
+                      </a:pPr>
+                      <a:r>
+                        <a:rPr lang="ru-RU" sz="1800" b="0" dirty="0">
+                          <a:effectLst/>
+                        </a:rPr>
+                        <a:t>Нет</a:t>
+                      </a:r>
+                      <a:endParaRPr lang="ru-RU" sz="1800" b="0" dirty="0">
+                        <a:effectLst/>
+                        <a:latin typeface="Times New Roman" panose="02020603050405020304" pitchFamily="18" charset="0"/>
+                        <a:ea typeface="Times New Roman" panose="02020603050405020304" pitchFamily="18" charset="0"/>
+                        <a:cs typeface="Times New Roman" panose="02020603050405020304" pitchFamily="18" charset="0"/>
+                      </a:endParaRPr>
+                    </a:p>
+                  </a:txBody>
+                  <a:tcPr marL="47461" marR="47461" marT="0" marB="0"/>
+                </a:tc>
+                <a:tc>
+                  <a:txBody>
+                    <a:bodyPr/>
+                    <a:lstStyle/>
+                    <a:p>
+                      <a:pPr indent="0" algn="ctr">
+                        <a:lnSpc>
+                          <a:spcPct val="100000"/>
+                        </a:lnSpc>
+                        <a:spcAft>
+                          <a:spcPts val="0"/>
+                        </a:spcAft>
+                      </a:pPr>
+                      <a:r>
+                        <a:rPr lang="ru-RU" sz="1800" b="0" dirty="0">
+                          <a:effectLst/>
+                        </a:rPr>
+                        <a:t>Нет</a:t>
+                      </a:r>
+                      <a:endParaRPr lang="ru-RU" sz="1800" b="0" dirty="0">
+                        <a:effectLst/>
+                        <a:latin typeface="Times New Roman" panose="02020603050405020304" pitchFamily="18" charset="0"/>
+                        <a:ea typeface="Times New Roman" panose="02020603050405020304" pitchFamily="18" charset="0"/>
+                        <a:cs typeface="Times New Roman" panose="02020603050405020304" pitchFamily="18" charset="0"/>
+                      </a:endParaRPr>
+                    </a:p>
+                  </a:txBody>
+                  <a:tcPr marL="47461" marR="47461" marT="0" marB="0"/>
+                </a:tc>
+                <a:tc>
+                  <a:txBody>
+                    <a:bodyPr/>
+                    <a:lstStyle/>
+                    <a:p>
+                      <a:pPr indent="0" algn="ctr">
+                        <a:lnSpc>
+                          <a:spcPct val="100000"/>
+                        </a:lnSpc>
+                        <a:spcAft>
+                          <a:spcPts val="0"/>
+                        </a:spcAft>
+                      </a:pPr>
+                      <a:r>
+                        <a:rPr lang="ru-RU" sz="1800" b="0">
+                          <a:effectLst/>
+                        </a:rPr>
+                        <a:t>Да</a:t>
+                      </a:r>
+                      <a:endParaRPr lang="ru-RU" sz="1800" b="0">
+                        <a:effectLst/>
+                        <a:latin typeface="Times New Roman" panose="02020603050405020304" pitchFamily="18" charset="0"/>
+                        <a:ea typeface="Times New Roman" panose="02020603050405020304" pitchFamily="18" charset="0"/>
+                        <a:cs typeface="Times New Roman" panose="02020603050405020304" pitchFamily="18" charset="0"/>
+                      </a:endParaRPr>
+                    </a:p>
+                  </a:txBody>
+                  <a:tcPr marL="47461" marR="47461" marT="0" marB="0"/>
+                </a:tc>
+                <a:extLst>
+                  <a:ext uri="{0D108BD9-81ED-4DB2-BD59-A6C34878D82A}">
+                    <a16:rowId xmlns:a16="http://schemas.microsoft.com/office/drawing/2014/main" val="3578090264"/>
+                  </a:ext>
+                </a:extLst>
+              </a:tr>
+              <a:tr h="561851">
+                <a:tc>
+                  <a:txBody>
+                    <a:bodyPr/>
+                    <a:lstStyle/>
+                    <a:p>
+                      <a:pPr indent="0" algn="ctr">
+                        <a:lnSpc>
+                          <a:spcPct val="100000"/>
+                        </a:lnSpc>
+                        <a:spcAft>
+                          <a:spcPts val="0"/>
+                        </a:spcAft>
+                      </a:pPr>
+                      <a:r>
+                        <a:rPr lang="ru-RU" sz="1800" b="0" dirty="0">
+                          <a:effectLst/>
+                        </a:rPr>
+                        <a:t>Управление реестром уведомлений о сбоях</a:t>
+                      </a:r>
+                      <a:endParaRPr lang="ru-RU" sz="1800" b="0" dirty="0">
+                        <a:effectLst/>
+                        <a:latin typeface="Times New Roman" panose="02020603050405020304" pitchFamily="18" charset="0"/>
+                        <a:ea typeface="Times New Roman" panose="02020603050405020304" pitchFamily="18" charset="0"/>
+                        <a:cs typeface="Times New Roman" panose="02020603050405020304" pitchFamily="18" charset="0"/>
+                      </a:endParaRPr>
+                    </a:p>
+                  </a:txBody>
+                  <a:tcPr marL="47461" marR="47461" marT="0" marB="0"/>
+                </a:tc>
+                <a:tc>
+                  <a:txBody>
+                    <a:bodyPr/>
+                    <a:lstStyle/>
+                    <a:p>
+                      <a:pPr indent="0" algn="ctr">
+                        <a:lnSpc>
+                          <a:spcPct val="100000"/>
+                        </a:lnSpc>
+                        <a:spcAft>
+                          <a:spcPts val="0"/>
+                        </a:spcAft>
+                      </a:pPr>
+                      <a:r>
+                        <a:rPr lang="ru-RU" sz="1800" b="0">
+                          <a:effectLst/>
+                        </a:rPr>
+                        <a:t>Нет</a:t>
+                      </a:r>
+                      <a:endParaRPr lang="ru-RU" sz="1800" b="0">
+                        <a:effectLst/>
+                        <a:latin typeface="Times New Roman" panose="02020603050405020304" pitchFamily="18" charset="0"/>
+                        <a:ea typeface="Times New Roman" panose="02020603050405020304" pitchFamily="18" charset="0"/>
+                        <a:cs typeface="Times New Roman" panose="02020603050405020304" pitchFamily="18" charset="0"/>
+                      </a:endParaRPr>
+                    </a:p>
+                  </a:txBody>
+                  <a:tcPr marL="47461" marR="47461" marT="0" marB="0"/>
+                </a:tc>
+                <a:tc>
+                  <a:txBody>
+                    <a:bodyPr/>
+                    <a:lstStyle/>
+                    <a:p>
+                      <a:pPr indent="0" algn="ctr">
+                        <a:lnSpc>
+                          <a:spcPct val="100000"/>
+                        </a:lnSpc>
+                        <a:spcAft>
+                          <a:spcPts val="0"/>
+                        </a:spcAft>
+                      </a:pPr>
+                      <a:r>
+                        <a:rPr lang="ru-RU" sz="1800" b="0">
+                          <a:effectLst/>
+                        </a:rPr>
+                        <a:t>Нет</a:t>
+                      </a:r>
+                      <a:endParaRPr lang="ru-RU" sz="1800" b="0">
+                        <a:effectLst/>
+                        <a:latin typeface="Times New Roman" panose="02020603050405020304" pitchFamily="18" charset="0"/>
+                        <a:ea typeface="Times New Roman" panose="02020603050405020304" pitchFamily="18" charset="0"/>
+                        <a:cs typeface="Times New Roman" panose="02020603050405020304" pitchFamily="18" charset="0"/>
+                      </a:endParaRPr>
+                    </a:p>
+                  </a:txBody>
+                  <a:tcPr marL="47461" marR="47461" marT="0" marB="0"/>
+                </a:tc>
+                <a:tc>
+                  <a:txBody>
+                    <a:bodyPr/>
+                    <a:lstStyle/>
+                    <a:p>
+                      <a:pPr indent="0" algn="ctr">
+                        <a:lnSpc>
+                          <a:spcPct val="100000"/>
+                        </a:lnSpc>
+                        <a:spcAft>
+                          <a:spcPts val="0"/>
+                        </a:spcAft>
+                      </a:pPr>
+                      <a:r>
+                        <a:rPr lang="ru-RU" sz="1800" b="0" dirty="0">
+                          <a:effectLst/>
+                        </a:rPr>
+                        <a:t>Да</a:t>
+                      </a:r>
+                      <a:endParaRPr lang="ru-RU" sz="1800" b="0" dirty="0">
+                        <a:effectLst/>
+                        <a:latin typeface="Times New Roman" panose="02020603050405020304" pitchFamily="18" charset="0"/>
+                        <a:ea typeface="Times New Roman" panose="02020603050405020304" pitchFamily="18" charset="0"/>
+                        <a:cs typeface="Times New Roman" panose="02020603050405020304" pitchFamily="18" charset="0"/>
+                      </a:endParaRPr>
+                    </a:p>
+                  </a:txBody>
+                  <a:tcPr marL="47461" marR="47461" marT="0" marB="0"/>
+                </a:tc>
+                <a:tc>
+                  <a:txBody>
+                    <a:bodyPr/>
+                    <a:lstStyle/>
+                    <a:p>
+                      <a:pPr indent="0" algn="ctr">
+                        <a:lnSpc>
+                          <a:spcPct val="100000"/>
+                        </a:lnSpc>
+                        <a:spcAft>
+                          <a:spcPts val="0"/>
+                        </a:spcAft>
+                      </a:pPr>
+                      <a:r>
+                        <a:rPr lang="ru-RU" sz="1800" b="0" dirty="0">
+                          <a:effectLst/>
+                        </a:rPr>
+                        <a:t>Да</a:t>
+                      </a:r>
+                      <a:endParaRPr lang="ru-RU" sz="1800" b="0" dirty="0">
+                        <a:effectLst/>
+                        <a:latin typeface="Times New Roman" panose="02020603050405020304" pitchFamily="18" charset="0"/>
+                        <a:ea typeface="Times New Roman" panose="02020603050405020304" pitchFamily="18" charset="0"/>
+                        <a:cs typeface="Times New Roman" panose="02020603050405020304" pitchFamily="18" charset="0"/>
+                      </a:endParaRPr>
+                    </a:p>
+                  </a:txBody>
+                  <a:tcPr marL="47461" marR="47461" marT="0" marB="0"/>
+                </a:tc>
+                <a:tc>
+                  <a:txBody>
+                    <a:bodyPr/>
+                    <a:lstStyle/>
+                    <a:p>
+                      <a:pPr indent="0" algn="ctr">
+                        <a:lnSpc>
+                          <a:spcPct val="100000"/>
+                        </a:lnSpc>
+                        <a:spcAft>
+                          <a:spcPts val="0"/>
+                        </a:spcAft>
+                      </a:pPr>
+                      <a:r>
+                        <a:rPr lang="ru-RU" sz="1800" b="0" dirty="0">
+                          <a:effectLst/>
+                        </a:rPr>
+                        <a:t>Да</a:t>
+                      </a:r>
+                      <a:endParaRPr lang="ru-RU" sz="1800" b="0" dirty="0">
+                        <a:effectLst/>
+                        <a:latin typeface="Times New Roman" panose="02020603050405020304" pitchFamily="18" charset="0"/>
+                        <a:ea typeface="Times New Roman" panose="02020603050405020304" pitchFamily="18" charset="0"/>
+                        <a:cs typeface="Times New Roman" panose="02020603050405020304" pitchFamily="18" charset="0"/>
+                      </a:endParaRPr>
+                    </a:p>
+                  </a:txBody>
+                  <a:tcPr marL="47461" marR="47461" marT="0" marB="0"/>
+                </a:tc>
+                <a:extLst>
+                  <a:ext uri="{0D108BD9-81ED-4DB2-BD59-A6C34878D82A}">
+                    <a16:rowId xmlns:a16="http://schemas.microsoft.com/office/drawing/2014/main" val="3489973249"/>
+                  </a:ext>
+                </a:extLst>
+              </a:tr>
+              <a:tr h="561851">
+                <a:tc>
+                  <a:txBody>
+                    <a:bodyPr/>
+                    <a:lstStyle/>
+                    <a:p>
+                      <a:pPr indent="0" algn="ctr">
+                        <a:lnSpc>
+                          <a:spcPct val="100000"/>
+                        </a:lnSpc>
+                        <a:spcAft>
+                          <a:spcPts val="0"/>
+                        </a:spcAft>
+                      </a:pPr>
+                      <a:r>
+                        <a:rPr lang="ru-RU" sz="1800" b="0" dirty="0">
+                          <a:effectLst/>
+                        </a:rPr>
+                        <a:t>Автоматическая генерация PDF-отчётов по партии</a:t>
+                      </a:r>
+                      <a:endParaRPr lang="ru-RU" sz="1800" b="0" dirty="0">
+                        <a:effectLst/>
+                        <a:latin typeface="Times New Roman" panose="02020603050405020304" pitchFamily="18" charset="0"/>
+                        <a:ea typeface="Times New Roman" panose="02020603050405020304" pitchFamily="18" charset="0"/>
+                        <a:cs typeface="Times New Roman" panose="02020603050405020304" pitchFamily="18" charset="0"/>
+                      </a:endParaRPr>
+                    </a:p>
+                  </a:txBody>
+                  <a:tcPr marL="47461" marR="47461" marT="0" marB="0"/>
+                </a:tc>
+                <a:tc>
+                  <a:txBody>
+                    <a:bodyPr/>
+                    <a:lstStyle/>
+                    <a:p>
+                      <a:pPr indent="0" algn="ctr">
+                        <a:lnSpc>
+                          <a:spcPct val="100000"/>
+                        </a:lnSpc>
+                        <a:spcAft>
+                          <a:spcPts val="0"/>
+                        </a:spcAft>
+                      </a:pPr>
+                      <a:r>
+                        <a:rPr lang="ru-RU" sz="1800" b="0">
+                          <a:effectLst/>
+                        </a:rPr>
+                        <a:t>Нет</a:t>
+                      </a:r>
+                      <a:endParaRPr lang="ru-RU" sz="1800" b="0">
+                        <a:effectLst/>
+                        <a:latin typeface="Times New Roman" panose="02020603050405020304" pitchFamily="18" charset="0"/>
+                        <a:ea typeface="Times New Roman" panose="02020603050405020304" pitchFamily="18" charset="0"/>
+                        <a:cs typeface="Times New Roman" panose="02020603050405020304" pitchFamily="18" charset="0"/>
+                      </a:endParaRPr>
+                    </a:p>
+                  </a:txBody>
+                  <a:tcPr marL="47461" marR="47461" marT="0" marB="0"/>
+                </a:tc>
+                <a:tc>
+                  <a:txBody>
+                    <a:bodyPr/>
+                    <a:lstStyle/>
+                    <a:p>
+                      <a:pPr indent="0" algn="ctr">
+                        <a:lnSpc>
+                          <a:spcPct val="100000"/>
+                        </a:lnSpc>
+                        <a:spcAft>
+                          <a:spcPts val="0"/>
+                        </a:spcAft>
+                      </a:pPr>
+                      <a:r>
+                        <a:rPr lang="ru-RU" sz="1800" b="0">
+                          <a:effectLst/>
+                        </a:rPr>
+                        <a:t>Нет</a:t>
+                      </a:r>
+                      <a:endParaRPr lang="ru-RU" sz="1800" b="0">
+                        <a:effectLst/>
+                        <a:latin typeface="Times New Roman" panose="02020603050405020304" pitchFamily="18" charset="0"/>
+                        <a:ea typeface="Times New Roman" panose="02020603050405020304" pitchFamily="18" charset="0"/>
+                        <a:cs typeface="Times New Roman" panose="02020603050405020304" pitchFamily="18" charset="0"/>
+                      </a:endParaRPr>
+                    </a:p>
+                  </a:txBody>
+                  <a:tcPr marL="47461" marR="47461" marT="0" marB="0"/>
+                </a:tc>
+                <a:tc>
+                  <a:txBody>
+                    <a:bodyPr/>
+                    <a:lstStyle/>
+                    <a:p>
+                      <a:pPr indent="0" algn="ctr">
+                        <a:lnSpc>
+                          <a:spcPct val="100000"/>
+                        </a:lnSpc>
+                        <a:spcAft>
+                          <a:spcPts val="0"/>
+                        </a:spcAft>
+                      </a:pPr>
+                      <a:r>
+                        <a:rPr lang="ru-RU" sz="1800" b="0">
+                          <a:effectLst/>
+                        </a:rPr>
+                        <a:t>Да</a:t>
+                      </a:r>
+                      <a:endParaRPr lang="ru-RU" sz="1800" b="0">
+                        <a:effectLst/>
+                        <a:latin typeface="Times New Roman" panose="02020603050405020304" pitchFamily="18" charset="0"/>
+                        <a:ea typeface="Times New Roman" panose="02020603050405020304" pitchFamily="18" charset="0"/>
+                        <a:cs typeface="Times New Roman" panose="02020603050405020304" pitchFamily="18" charset="0"/>
+                      </a:endParaRPr>
+                    </a:p>
+                  </a:txBody>
+                  <a:tcPr marL="47461" marR="47461" marT="0" marB="0"/>
+                </a:tc>
+                <a:tc>
+                  <a:txBody>
+                    <a:bodyPr/>
+                    <a:lstStyle/>
+                    <a:p>
+                      <a:pPr indent="0" algn="ctr">
+                        <a:lnSpc>
+                          <a:spcPct val="100000"/>
+                        </a:lnSpc>
+                        <a:spcAft>
+                          <a:spcPts val="0"/>
+                        </a:spcAft>
+                      </a:pPr>
+                      <a:r>
+                        <a:rPr lang="ru-RU" sz="1800" b="0" dirty="0">
+                          <a:effectLst/>
+                        </a:rPr>
+                        <a:t>Да</a:t>
+                      </a:r>
+                      <a:endParaRPr lang="ru-RU" sz="1800" b="0" dirty="0">
+                        <a:effectLst/>
+                        <a:latin typeface="Times New Roman" panose="02020603050405020304" pitchFamily="18" charset="0"/>
+                        <a:ea typeface="Times New Roman" panose="02020603050405020304" pitchFamily="18" charset="0"/>
+                        <a:cs typeface="Times New Roman" panose="02020603050405020304" pitchFamily="18" charset="0"/>
+                      </a:endParaRPr>
+                    </a:p>
+                  </a:txBody>
+                  <a:tcPr marL="47461" marR="47461" marT="0" marB="0"/>
+                </a:tc>
+                <a:tc>
+                  <a:txBody>
+                    <a:bodyPr/>
+                    <a:lstStyle/>
+                    <a:p>
+                      <a:pPr indent="0" algn="ctr">
+                        <a:lnSpc>
+                          <a:spcPct val="100000"/>
+                        </a:lnSpc>
+                        <a:spcAft>
+                          <a:spcPts val="0"/>
+                        </a:spcAft>
+                      </a:pPr>
+                      <a:r>
+                        <a:rPr lang="ru-RU" sz="1800" b="0" dirty="0">
+                          <a:effectLst/>
+                        </a:rPr>
+                        <a:t>Нет</a:t>
+                      </a:r>
+                      <a:endParaRPr lang="ru-RU" sz="1800" b="0" dirty="0">
+                        <a:effectLst/>
+                        <a:latin typeface="Times New Roman" panose="02020603050405020304" pitchFamily="18" charset="0"/>
+                        <a:ea typeface="Times New Roman" panose="02020603050405020304" pitchFamily="18" charset="0"/>
+                        <a:cs typeface="Times New Roman" panose="02020603050405020304" pitchFamily="18" charset="0"/>
+                      </a:endParaRPr>
+                    </a:p>
+                  </a:txBody>
+                  <a:tcPr marL="47461" marR="47461" marT="0" marB="0"/>
+                </a:tc>
+                <a:extLst>
+                  <a:ext uri="{0D108BD9-81ED-4DB2-BD59-A6C34878D82A}">
+                    <a16:rowId xmlns:a16="http://schemas.microsoft.com/office/drawing/2014/main" val="3156821711"/>
+                  </a:ext>
+                </a:extLst>
+              </a:tr>
+              <a:tr h="366770">
+                <a:tc>
+                  <a:txBody>
+                    <a:bodyPr/>
+                    <a:lstStyle/>
+                    <a:p>
+                      <a:pPr indent="0" algn="ctr">
+                        <a:lnSpc>
+                          <a:spcPct val="100000"/>
+                        </a:lnSpc>
+                        <a:spcAft>
+                          <a:spcPts val="0"/>
+                        </a:spcAft>
+                      </a:pPr>
+                      <a:r>
+                        <a:rPr lang="ru-RU" sz="1800" b="0" dirty="0">
+                          <a:effectLst/>
+                        </a:rPr>
+                        <a:t>Адаптация к цветной металлургии</a:t>
+                      </a:r>
+                      <a:endParaRPr lang="ru-RU" sz="1800" b="0" dirty="0">
+                        <a:effectLst/>
+                        <a:latin typeface="Times New Roman" panose="02020603050405020304" pitchFamily="18" charset="0"/>
+                        <a:ea typeface="Times New Roman" panose="02020603050405020304" pitchFamily="18" charset="0"/>
+                        <a:cs typeface="Times New Roman" panose="02020603050405020304" pitchFamily="18" charset="0"/>
+                      </a:endParaRPr>
+                    </a:p>
+                  </a:txBody>
+                  <a:tcPr marL="47461" marR="47461" marT="0" marB="0"/>
+                </a:tc>
+                <a:tc>
+                  <a:txBody>
+                    <a:bodyPr/>
+                    <a:lstStyle/>
+                    <a:p>
+                      <a:pPr indent="0" algn="ctr">
+                        <a:lnSpc>
+                          <a:spcPct val="100000"/>
+                        </a:lnSpc>
+                        <a:spcAft>
+                          <a:spcPts val="0"/>
+                        </a:spcAft>
+                      </a:pPr>
+                      <a:r>
+                        <a:rPr lang="ru-RU" sz="1800" b="0">
+                          <a:effectLst/>
+                        </a:rPr>
+                        <a:t>Частично</a:t>
+                      </a:r>
+                      <a:endParaRPr lang="ru-RU" sz="1800" b="0">
+                        <a:effectLst/>
+                        <a:latin typeface="Times New Roman" panose="02020603050405020304" pitchFamily="18" charset="0"/>
+                        <a:ea typeface="Times New Roman" panose="02020603050405020304" pitchFamily="18" charset="0"/>
+                        <a:cs typeface="Times New Roman" panose="02020603050405020304" pitchFamily="18" charset="0"/>
+                      </a:endParaRPr>
+                    </a:p>
+                  </a:txBody>
+                  <a:tcPr marL="47461" marR="47461" marT="0" marB="0"/>
+                </a:tc>
+                <a:tc>
+                  <a:txBody>
+                    <a:bodyPr/>
+                    <a:lstStyle/>
+                    <a:p>
+                      <a:pPr indent="0" algn="ctr">
+                        <a:lnSpc>
+                          <a:spcPct val="100000"/>
+                        </a:lnSpc>
+                        <a:spcAft>
+                          <a:spcPts val="0"/>
+                        </a:spcAft>
+                      </a:pPr>
+                      <a:r>
+                        <a:rPr lang="ru-RU" sz="1800" b="0">
+                          <a:effectLst/>
+                        </a:rPr>
+                        <a:t>Частично</a:t>
+                      </a:r>
+                      <a:endParaRPr lang="ru-RU" sz="1800" b="0">
+                        <a:effectLst/>
+                        <a:latin typeface="Times New Roman" panose="02020603050405020304" pitchFamily="18" charset="0"/>
+                        <a:ea typeface="Times New Roman" panose="02020603050405020304" pitchFamily="18" charset="0"/>
+                        <a:cs typeface="Times New Roman" panose="02020603050405020304" pitchFamily="18" charset="0"/>
+                      </a:endParaRPr>
+                    </a:p>
+                  </a:txBody>
+                  <a:tcPr marL="47461" marR="47461" marT="0" marB="0"/>
+                </a:tc>
+                <a:tc>
+                  <a:txBody>
+                    <a:bodyPr/>
+                    <a:lstStyle/>
+                    <a:p>
+                      <a:pPr indent="0" algn="ctr">
+                        <a:lnSpc>
+                          <a:spcPct val="100000"/>
+                        </a:lnSpc>
+                        <a:spcAft>
+                          <a:spcPts val="0"/>
+                        </a:spcAft>
+                      </a:pPr>
+                      <a:r>
+                        <a:rPr lang="ru-RU" sz="1800" b="0">
+                          <a:effectLst/>
+                        </a:rPr>
+                        <a:t>Нет</a:t>
+                      </a:r>
+                      <a:endParaRPr lang="ru-RU" sz="1800" b="0">
+                        <a:effectLst/>
+                        <a:latin typeface="Times New Roman" panose="02020603050405020304" pitchFamily="18" charset="0"/>
+                        <a:ea typeface="Times New Roman" panose="02020603050405020304" pitchFamily="18" charset="0"/>
+                        <a:cs typeface="Times New Roman" panose="02020603050405020304" pitchFamily="18" charset="0"/>
+                      </a:endParaRPr>
+                    </a:p>
+                  </a:txBody>
+                  <a:tcPr marL="47461" marR="47461" marT="0" marB="0"/>
+                </a:tc>
+                <a:tc>
+                  <a:txBody>
+                    <a:bodyPr/>
+                    <a:lstStyle/>
+                    <a:p>
+                      <a:pPr indent="0" algn="ctr">
+                        <a:lnSpc>
+                          <a:spcPct val="100000"/>
+                        </a:lnSpc>
+                        <a:spcAft>
+                          <a:spcPts val="0"/>
+                        </a:spcAft>
+                      </a:pPr>
+                      <a:r>
+                        <a:rPr lang="ru-RU" sz="1800" b="0" dirty="0">
+                          <a:effectLst/>
+                        </a:rPr>
+                        <a:t>Нет</a:t>
+                      </a:r>
+                      <a:endParaRPr lang="ru-RU" sz="1800" b="0" dirty="0">
+                        <a:effectLst/>
+                        <a:latin typeface="Times New Roman" panose="02020603050405020304" pitchFamily="18" charset="0"/>
+                        <a:ea typeface="Times New Roman" panose="02020603050405020304" pitchFamily="18" charset="0"/>
+                        <a:cs typeface="Times New Roman" panose="02020603050405020304" pitchFamily="18" charset="0"/>
+                      </a:endParaRPr>
+                    </a:p>
+                  </a:txBody>
+                  <a:tcPr marL="47461" marR="47461" marT="0" marB="0"/>
+                </a:tc>
+                <a:tc>
+                  <a:txBody>
+                    <a:bodyPr/>
+                    <a:lstStyle/>
+                    <a:p>
+                      <a:pPr indent="0" algn="ctr">
+                        <a:lnSpc>
+                          <a:spcPct val="100000"/>
+                        </a:lnSpc>
+                        <a:spcAft>
+                          <a:spcPts val="0"/>
+                        </a:spcAft>
+                      </a:pPr>
+                      <a:r>
+                        <a:rPr lang="ru-RU" sz="1800" b="0" dirty="0">
+                          <a:effectLst/>
+                        </a:rPr>
+                        <a:t>Частично</a:t>
+                      </a:r>
+                      <a:endParaRPr lang="ru-RU" sz="1800" b="0" dirty="0">
+                        <a:effectLst/>
+                        <a:latin typeface="Times New Roman" panose="02020603050405020304" pitchFamily="18" charset="0"/>
+                        <a:ea typeface="Times New Roman" panose="02020603050405020304" pitchFamily="18" charset="0"/>
+                        <a:cs typeface="Times New Roman" panose="02020603050405020304" pitchFamily="18" charset="0"/>
+                      </a:endParaRPr>
+                    </a:p>
+                  </a:txBody>
+                  <a:tcPr marL="47461" marR="47461" marT="0" marB="0"/>
+                </a:tc>
+                <a:extLst>
+                  <a:ext uri="{0D108BD9-81ED-4DB2-BD59-A6C34878D82A}">
+                    <a16:rowId xmlns:a16="http://schemas.microsoft.com/office/drawing/2014/main" val="3019754515"/>
+                  </a:ext>
+                </a:extLst>
+              </a:tr>
+              <a:tr h="366770">
+                <a:tc>
+                  <a:txBody>
+                    <a:bodyPr/>
+                    <a:lstStyle/>
+                    <a:p>
+                      <a:pPr indent="0" algn="ctr">
+                        <a:lnSpc>
+                          <a:spcPct val="100000"/>
+                        </a:lnSpc>
+                        <a:spcAft>
+                          <a:spcPts val="0"/>
+                        </a:spcAft>
+                      </a:pPr>
+                      <a:r>
+                        <a:rPr lang="ru-RU" sz="1800" b="0" dirty="0">
+                          <a:effectLst/>
+                        </a:rPr>
+                        <a:t>Отсутствие санкционных рисков</a:t>
+                      </a:r>
+                      <a:endParaRPr lang="ru-RU" sz="1800" b="0" dirty="0">
+                        <a:effectLst/>
+                        <a:latin typeface="Times New Roman" panose="02020603050405020304" pitchFamily="18" charset="0"/>
+                        <a:ea typeface="Times New Roman" panose="02020603050405020304" pitchFamily="18" charset="0"/>
+                        <a:cs typeface="Times New Roman" panose="02020603050405020304" pitchFamily="18" charset="0"/>
+                      </a:endParaRPr>
+                    </a:p>
+                  </a:txBody>
+                  <a:tcPr marL="47461" marR="47461" marT="0" marB="0"/>
+                </a:tc>
+                <a:tc>
+                  <a:txBody>
+                    <a:bodyPr/>
+                    <a:lstStyle/>
+                    <a:p>
+                      <a:pPr indent="0" algn="ctr">
+                        <a:lnSpc>
+                          <a:spcPct val="100000"/>
+                        </a:lnSpc>
+                        <a:spcAft>
+                          <a:spcPts val="0"/>
+                        </a:spcAft>
+                      </a:pPr>
+                      <a:r>
+                        <a:rPr lang="ru-RU" sz="1800" b="0">
+                          <a:effectLst/>
+                        </a:rPr>
+                        <a:t>Нет</a:t>
+                      </a:r>
+                      <a:endParaRPr lang="ru-RU" sz="1800" b="0">
+                        <a:effectLst/>
+                        <a:latin typeface="Times New Roman" panose="02020603050405020304" pitchFamily="18" charset="0"/>
+                        <a:ea typeface="Times New Roman" panose="02020603050405020304" pitchFamily="18" charset="0"/>
+                        <a:cs typeface="Times New Roman" panose="02020603050405020304" pitchFamily="18" charset="0"/>
+                      </a:endParaRPr>
+                    </a:p>
+                  </a:txBody>
+                  <a:tcPr marL="47461" marR="47461" marT="0" marB="0"/>
+                </a:tc>
+                <a:tc>
+                  <a:txBody>
+                    <a:bodyPr/>
+                    <a:lstStyle/>
+                    <a:p>
+                      <a:pPr indent="0" algn="ctr">
+                        <a:lnSpc>
+                          <a:spcPct val="100000"/>
+                        </a:lnSpc>
+                        <a:spcAft>
+                          <a:spcPts val="0"/>
+                        </a:spcAft>
+                      </a:pPr>
+                      <a:r>
+                        <a:rPr lang="ru-RU" sz="1800" b="0">
+                          <a:effectLst/>
+                        </a:rPr>
+                        <a:t>Нет</a:t>
+                      </a:r>
+                      <a:endParaRPr lang="ru-RU" sz="1800" b="0">
+                        <a:effectLst/>
+                        <a:latin typeface="Times New Roman" panose="02020603050405020304" pitchFamily="18" charset="0"/>
+                        <a:ea typeface="Times New Roman" panose="02020603050405020304" pitchFamily="18" charset="0"/>
+                        <a:cs typeface="Times New Roman" panose="02020603050405020304" pitchFamily="18" charset="0"/>
+                      </a:endParaRPr>
+                    </a:p>
+                  </a:txBody>
+                  <a:tcPr marL="47461" marR="47461" marT="0" marB="0"/>
+                </a:tc>
+                <a:tc>
+                  <a:txBody>
+                    <a:bodyPr/>
+                    <a:lstStyle/>
+                    <a:p>
+                      <a:pPr indent="0" algn="ctr">
+                        <a:lnSpc>
+                          <a:spcPct val="100000"/>
+                        </a:lnSpc>
+                        <a:spcAft>
+                          <a:spcPts val="0"/>
+                        </a:spcAft>
+                      </a:pPr>
+                      <a:r>
+                        <a:rPr lang="ru-RU" sz="1800" b="0">
+                          <a:effectLst/>
+                        </a:rPr>
+                        <a:t>Нет</a:t>
+                      </a:r>
+                      <a:endParaRPr lang="ru-RU" sz="1800" b="0">
+                        <a:effectLst/>
+                        <a:latin typeface="Times New Roman" panose="02020603050405020304" pitchFamily="18" charset="0"/>
+                        <a:ea typeface="Times New Roman" panose="02020603050405020304" pitchFamily="18" charset="0"/>
+                        <a:cs typeface="Times New Roman" panose="02020603050405020304" pitchFamily="18" charset="0"/>
+                      </a:endParaRPr>
+                    </a:p>
+                  </a:txBody>
+                  <a:tcPr marL="47461" marR="47461" marT="0" marB="0"/>
+                </a:tc>
+                <a:tc>
+                  <a:txBody>
+                    <a:bodyPr/>
+                    <a:lstStyle/>
+                    <a:p>
+                      <a:pPr indent="0" algn="ctr">
+                        <a:lnSpc>
+                          <a:spcPct val="100000"/>
+                        </a:lnSpc>
+                        <a:spcAft>
+                          <a:spcPts val="0"/>
+                        </a:spcAft>
+                      </a:pPr>
+                      <a:r>
+                        <a:rPr lang="ru-RU" sz="1800" b="0">
+                          <a:effectLst/>
+                        </a:rPr>
+                        <a:t>Нет</a:t>
+                      </a:r>
+                      <a:endParaRPr lang="ru-RU" sz="1800" b="0">
+                        <a:effectLst/>
+                        <a:latin typeface="Times New Roman" panose="02020603050405020304" pitchFamily="18" charset="0"/>
+                        <a:ea typeface="Times New Roman" panose="02020603050405020304" pitchFamily="18" charset="0"/>
+                        <a:cs typeface="Times New Roman" panose="02020603050405020304" pitchFamily="18" charset="0"/>
+                      </a:endParaRPr>
+                    </a:p>
+                  </a:txBody>
+                  <a:tcPr marL="47461" marR="47461" marT="0" marB="0"/>
+                </a:tc>
+                <a:tc>
+                  <a:txBody>
+                    <a:bodyPr/>
+                    <a:lstStyle/>
+                    <a:p>
+                      <a:pPr indent="0" algn="ctr">
+                        <a:lnSpc>
+                          <a:spcPct val="100000"/>
+                        </a:lnSpc>
+                        <a:spcAft>
+                          <a:spcPts val="0"/>
+                        </a:spcAft>
+                      </a:pPr>
+                      <a:r>
+                        <a:rPr lang="ru-RU" sz="1800" b="0" dirty="0">
+                          <a:effectLst/>
+                        </a:rPr>
+                        <a:t>Нет</a:t>
+                      </a:r>
+                      <a:endParaRPr lang="ru-RU" sz="1800" b="0" dirty="0">
+                        <a:effectLst/>
+                        <a:latin typeface="Times New Roman" panose="02020603050405020304" pitchFamily="18" charset="0"/>
+                        <a:ea typeface="Times New Roman" panose="02020603050405020304" pitchFamily="18" charset="0"/>
+                        <a:cs typeface="Times New Roman" panose="02020603050405020304" pitchFamily="18" charset="0"/>
+                      </a:endParaRPr>
+                    </a:p>
+                  </a:txBody>
+                  <a:tcPr marL="47461" marR="47461" marT="0" marB="0"/>
+                </a:tc>
+                <a:extLst>
+                  <a:ext uri="{0D108BD9-81ED-4DB2-BD59-A6C34878D82A}">
+                    <a16:rowId xmlns:a16="http://schemas.microsoft.com/office/drawing/2014/main" val="3743801486"/>
                   </a:ext>
                 </a:extLst>
               </a:tr>
@@ -13161,8 +13918,8 @@
         </p:nvSpPr>
         <p:spPr>
           <a:xfrm>
-            <a:off x="838200" y="718808"/>
-            <a:ext cx="10515600" cy="1325563"/>
+            <a:off x="872143" y="704088"/>
+            <a:ext cx="10515600" cy="645339"/>
           </a:xfrm>
         </p:spPr>
         <p:txBody>
@@ -13180,7 +13937,7 @@
                   </a:schemeClr>
                 </a:solidFill>
               </a:rPr>
-              <a:t>Функции системы</a:t>
+              <a:t>ФУНКЦИИ</a:t>
             </a:r>
           </a:p>
         </p:txBody>
@@ -13203,8 +13960,8 @@
         </p:nvSpPr>
         <p:spPr>
           <a:xfrm>
-            <a:off x="838200" y="2044371"/>
-            <a:ext cx="10583487" cy="4486275"/>
+            <a:off x="872143" y="1667637"/>
+            <a:ext cx="10515600" cy="4486275"/>
           </a:xfrm>
         </p:spPr>
         <p:txBody>
@@ -13214,47 +13971,96 @@
           <a:lstStyle/>
           <a:p>
             <a:pPr marL="0" indent="0">
+              <a:lnSpc>
+                <a:spcPct val="100000"/>
+              </a:lnSpc>
               <a:buNone/>
             </a:pPr>
             <a:r>
-              <a:rPr lang="ru-RU" sz="2400" dirty="0"/>
+              <a:rPr lang="ru-RU" sz="2000" dirty="0">
+                <a:latin typeface="Candara" panose="020E0502030303020204" pitchFamily="34" charset="0"/>
+              </a:rPr>
               <a:t>Система предоставляет следующий базовый набор функций:</a:t>
             </a:r>
           </a:p>
           <a:p>
+            <a:pPr lvl="0">
+              <a:lnSpc>
+                <a:spcPct val="100000"/>
+              </a:lnSpc>
+            </a:pPr>
             <a:r>
-              <a:rPr lang="ru-RU" sz="2400" dirty="0"/>
-              <a:t>Просмотр детализированных данных по пробам и партиям, анализ отклонений для конкретной партии и металла;</a:t>
+              <a:rPr lang="ru-RU" sz="2000" dirty="0">
+                <a:latin typeface="Candara" panose="020E0502030303020204" pitchFamily="34" charset="0"/>
+              </a:rPr>
+              <a:t>Разграничение доступа с персонализированными интерфейсами в соответствии с ролью пользователя;</a:t>
             </a:r>
           </a:p>
           <a:p>
+            <a:pPr lvl="0">
+              <a:lnSpc>
+                <a:spcPct val="100000"/>
+              </a:lnSpc>
+            </a:pPr>
             <a:r>
-              <a:rPr lang="ru-RU" sz="2400" dirty="0"/>
-              <a:t>Формирование отчетов, возможность подписки на получение отчетов по определенному металлу;</a:t>
+              <a:rPr lang="ru-RU" sz="2000" dirty="0">
+                <a:latin typeface="Candara" panose="020E0502030303020204" pitchFamily="34" charset="0"/>
+              </a:rPr>
+              <a:t>Мониторинг статусов партий металла в режиме реального времени;</a:t>
             </a:r>
           </a:p>
           <a:p>
+            <a:pPr lvl="0">
+              <a:lnSpc>
+                <a:spcPct val="100000"/>
+              </a:lnSpc>
+            </a:pPr>
             <a:r>
-              <a:rPr lang="ru-RU" sz="2400" dirty="0"/>
-              <a:t>Мониторинг агрегированных KPI качества в реальном времени, работа с интерактивными </a:t>
+              <a:rPr lang="ru-RU" sz="2000" dirty="0">
+                <a:latin typeface="Candara" panose="020E0502030303020204" pitchFamily="34" charset="0"/>
+              </a:rPr>
+              <a:t>Просмотр детальной информации о конкретной партии с временными метками о смене статусов, производственными и лабораторными данными;</a:t>
             </a:r>
+          </a:p>
+          <a:p>
+            <a:pPr lvl="0">
+              <a:lnSpc>
+                <a:spcPct val="100000"/>
+              </a:lnSpc>
+            </a:pPr>
             <a:r>
-              <a:rPr lang="ru-RU" sz="2400" dirty="0" err="1"/>
-              <a:t>дашбордами</a:t>
+              <a:rPr lang="ru-RU" sz="2000" dirty="0">
+                <a:latin typeface="Candara" panose="020E0502030303020204" pitchFamily="34" charset="0"/>
+              </a:rPr>
+              <a:t>Обнаружение отклонений показателей SCADA от нормативных порогов при поступлении данных с отправкой уведомления ответственным пользователям;</a:t>
             </a:r>
+          </a:p>
+          <a:p>
+            <a:pPr lvl="0">
+              <a:lnSpc>
+                <a:spcPct val="100000"/>
+              </a:lnSpc>
+            </a:pPr>
             <a:r>
-              <a:rPr lang="ru-RU" sz="2400" dirty="0"/>
-              <a:t>;</a:t>
+              <a:rPr lang="ru-RU" sz="2000" dirty="0">
+                <a:latin typeface="Candara" panose="020E0502030303020204" pitchFamily="34" charset="0"/>
+              </a:rPr>
+              <a:t>Генерация PDF-отчёта по партии металла со сбором данных MES, SCADA и LIMS, подсчётом количества отклонений от нормы;</a:t>
             </a:r>
           </a:p>
           <a:p>
+            <a:pPr lvl="0">
+              <a:lnSpc>
+                <a:spcPct val="100000"/>
+              </a:lnSpc>
+            </a:pPr>
             <a:r>
-              <a:rPr lang="ru-RU" sz="2400" dirty="0"/>
-              <a:t>Управление источниками данных, настройка прав доступа, мониторинг работы системы.</a:t>
+              <a:rPr lang="ru-RU" sz="2000" dirty="0">
+                <a:latin typeface="Candara" panose="020E0502030303020204" pitchFamily="34" charset="0"/>
+              </a:rPr>
+              <a:t>Управление пользователями и ролями в административном разделе системы.</a:t>
             </a:r>
-          </a:p>
-          <a:p>
-            <a:endParaRPr lang="ru-RU" sz="2400" dirty="0">
+            <a:endParaRPr lang="ru-RU" sz="2000" dirty="0">
               <a:latin typeface="+mj-lt"/>
             </a:endParaRPr>
           </a:p>
@@ -13308,8 +14114,8 @@
         </p:nvSpPr>
         <p:spPr>
           <a:xfrm>
-            <a:off x="838200" y="97706"/>
-            <a:ext cx="10515600" cy="1325563"/>
+            <a:off x="838200" y="592449"/>
+            <a:ext cx="10515600" cy="724529"/>
           </a:xfrm>
         </p:spPr>
         <p:txBody>
@@ -13327,7 +14133,7 @@
                   </a:schemeClr>
                 </a:solidFill>
               </a:rPr>
-              <a:t>Разбиение функций по ролям</a:t>
+              <a:t>РОЛИ</a:t>
             </a:r>
           </a:p>
         </p:txBody>
@@ -13346,11 +14152,16 @@
           </p:cNvGraphicFramePr>
           <p:nvPr>
             <p:ph idx="1"/>
+            <p:extLst>
+              <p:ext uri="{D42A27DB-BD31-4B8C-83A1-F6EECF244321}">
+                <p14:modId xmlns:p14="http://schemas.microsoft.com/office/powerpoint/2010/main" val="4015803757"/>
+              </p:ext>
+            </p:extLst>
           </p:nvPr>
         </p:nvGraphicFramePr>
         <p:xfrm>
-          <a:off x="838200" y="1332613"/>
-          <a:ext cx="10515600" cy="4826647"/>
+          <a:off x="1704975" y="1581150"/>
+          <a:ext cx="8782050" cy="4524375"/>
         </p:xfrm>
         <a:graphic>
           <a:graphicData uri="http://schemas.openxmlformats.org/drawingml/2006/diagram">
@@ -13404,7 +14215,12 @@
             <p:ph type="title"/>
           </p:nvPr>
         </p:nvSpPr>
-        <p:spPr/>
+        <p:spPr>
+          <a:xfrm>
+            <a:off x="838200" y="572226"/>
+            <a:ext cx="10515600" cy="833438"/>
+          </a:xfrm>
+        </p:spPr>
         <p:txBody>
           <a:bodyPr>
             <a:normAutofit/>
@@ -13420,7 +14236,7 @@
                   </a:schemeClr>
                 </a:solidFill>
               </a:rPr>
-              <a:t>Технологии реализации</a:t>
+              <a:t>ТЕХНОЛОГИИ РЕАЛИЗАЦИИ</a:t>
             </a:r>
           </a:p>
         </p:txBody>
@@ -13456,8 +14272,388 @@
         </p:blipFill>
         <p:spPr bwMode="auto">
           <a:xfrm>
-            <a:off x="9498002" y="242471"/>
+            <a:off x="9751222" y="700941"/>
             <a:ext cx="1085863" cy="1990749"/>
+          </a:xfrm>
+          <a:prstGeom prst="rect">
+            <a:avLst/>
+          </a:prstGeom>
+          <a:noFill/>
+          <a:extLst>
+            <a:ext uri="{909E8E84-426E-40DD-AFC4-6F175D3DCCD1}">
+              <a14:hiddenFill xmlns:a14="http://schemas.microsoft.com/office/drawing/2010/main">
+                <a:solidFill>
+                  <a:srgbClr val="FFFFFF"/>
+                </a:solidFill>
+              </a14:hiddenFill>
+            </a:ext>
+          </a:extLst>
+        </p:spPr>
+      </p:pic>
+      <p:pic>
+        <p:nvPicPr>
+          <p:cNvPr id="7" name="Picture 6" descr="Picture background">
+            <a:extLst>
+              <a:ext uri="{FF2B5EF4-FFF2-40B4-BE49-F238E27FC236}">
+                <a16:creationId xmlns:a16="http://schemas.microsoft.com/office/drawing/2014/main" id="{F37DF3E2-1219-47EE-BF57-EADB0A5B6D52}"/>
+              </a:ext>
+            </a:extLst>
+          </p:cNvPr>
+          <p:cNvPicPr>
+            <a:picLocks noChangeAspect="1" noChangeArrowheads="1"/>
+          </p:cNvPicPr>
+          <p:nvPr/>
+        </p:nvPicPr>
+        <p:blipFill>
+          <a:blip r:embed="rId3">
+            <a:extLst>
+              <a:ext uri="{28A0092B-C50C-407E-A947-70E740481C1C}">
+                <a14:useLocalDpi xmlns:a14="http://schemas.microsoft.com/office/drawing/2010/main" val="0"/>
+              </a:ext>
+            </a:extLst>
+          </a:blip>
+          <a:srcRect/>
+          <a:stretch>
+            <a:fillRect/>
+          </a:stretch>
+        </p:blipFill>
+        <p:spPr bwMode="auto">
+          <a:xfrm>
+            <a:off x="6949121" y="3450105"/>
+            <a:ext cx="2484089" cy="1639582"/>
+          </a:xfrm>
+          <a:prstGeom prst="rect">
+            <a:avLst/>
+          </a:prstGeom>
+          <a:noFill/>
+          <a:extLst>
+            <a:ext uri="{909E8E84-426E-40DD-AFC4-6F175D3DCCD1}">
+              <a14:hiddenFill xmlns:a14="http://schemas.microsoft.com/office/drawing/2010/main">
+                <a:solidFill>
+                  <a:srgbClr val="FFFFFF"/>
+                </a:solidFill>
+              </a14:hiddenFill>
+            </a:ext>
+          </a:extLst>
+        </p:spPr>
+      </p:pic>
+      <p:sp>
+        <p:nvSpPr>
+          <p:cNvPr id="3" name="Прямоугольник 2">
+            <a:extLst>
+              <a:ext uri="{FF2B5EF4-FFF2-40B4-BE49-F238E27FC236}">
+                <a16:creationId xmlns:a16="http://schemas.microsoft.com/office/drawing/2014/main" id="{D32E8853-60FA-46BC-8756-DE42BBFD2384}"/>
+              </a:ext>
+            </a:extLst>
+          </p:cNvPr>
+          <p:cNvSpPr/>
+          <p:nvPr/>
+        </p:nvSpPr>
+        <p:spPr>
+          <a:xfrm>
+            <a:off x="838200" y="1511686"/>
+            <a:ext cx="10515600" cy="4832092"/>
+          </a:xfrm>
+          <a:prstGeom prst="rect">
+            <a:avLst/>
+          </a:prstGeom>
+        </p:spPr>
+        <p:txBody>
+          <a:bodyPr wrap="square">
+            <a:spAutoFit/>
+          </a:bodyPr>
+          <a:lstStyle/>
+          <a:p>
+            <a:r>
+              <a:rPr lang="ru-RU" sz="2800" b="1" dirty="0">
+                <a:solidFill>
+                  <a:schemeClr val="accent2">
+                    <a:lumMod val="50000"/>
+                  </a:schemeClr>
+                </a:solidFill>
+              </a:rPr>
+              <a:t>Серверная часть: </a:t>
+            </a:r>
+          </a:p>
+          <a:p>
+            <a:pPr lvl="1"/>
+            <a:r>
+              <a:rPr lang="ru-RU" sz="2000" dirty="0" err="1">
+                <a:solidFill>
+                  <a:srgbClr val="0F1115"/>
+                </a:solidFill>
+              </a:rPr>
+              <a:t>Java</a:t>
+            </a:r>
+            <a:endParaRPr lang="ru-RU" sz="2000" dirty="0">
+              <a:solidFill>
+                <a:srgbClr val="0F1115"/>
+              </a:solidFill>
+            </a:endParaRPr>
+          </a:p>
+          <a:p>
+            <a:pPr lvl="1"/>
+            <a:r>
+              <a:rPr lang="ru-RU" sz="2000" dirty="0" err="1">
+                <a:solidFill>
+                  <a:srgbClr val="0F1115"/>
+                </a:solidFill>
+              </a:rPr>
+              <a:t>Spring</a:t>
+            </a:r>
+            <a:r>
+              <a:rPr lang="ru-RU" sz="2000" dirty="0">
+                <a:solidFill>
+                  <a:srgbClr val="0F1115"/>
+                </a:solidFill>
+              </a:rPr>
+              <a:t> </a:t>
+            </a:r>
+            <a:r>
+              <a:rPr lang="ru-RU" sz="2000" dirty="0" err="1">
+                <a:solidFill>
+                  <a:srgbClr val="0F1115"/>
+                </a:solidFill>
+              </a:rPr>
+              <a:t>Boot</a:t>
+            </a:r>
+            <a:endParaRPr lang="ru-RU" sz="2000" dirty="0">
+              <a:solidFill>
+                <a:srgbClr val="0F1115"/>
+              </a:solidFill>
+            </a:endParaRPr>
+          </a:p>
+          <a:p>
+            <a:pPr lvl="1"/>
+            <a:endParaRPr lang="ru-RU" sz="800" dirty="0">
+              <a:solidFill>
+                <a:srgbClr val="0F1115"/>
+              </a:solidFill>
+            </a:endParaRPr>
+          </a:p>
+          <a:p>
+            <a:r>
+              <a:rPr lang="ru-RU" sz="2800" b="1" dirty="0">
+                <a:solidFill>
+                  <a:schemeClr val="accent2">
+                    <a:lumMod val="50000"/>
+                  </a:schemeClr>
+                </a:solidFill>
+              </a:rPr>
+              <a:t>Клиентская часть: </a:t>
+            </a:r>
+          </a:p>
+          <a:p>
+            <a:pPr lvl="1"/>
+            <a:r>
+              <a:rPr lang="ru-RU" sz="2000" dirty="0" err="1">
+                <a:solidFill>
+                  <a:srgbClr val="0F1115"/>
+                </a:solidFill>
+              </a:rPr>
+              <a:t>React</a:t>
+            </a:r>
+            <a:endParaRPr lang="ru-RU" sz="2000" dirty="0">
+              <a:solidFill>
+                <a:srgbClr val="0F1115"/>
+              </a:solidFill>
+            </a:endParaRPr>
+          </a:p>
+          <a:p>
+            <a:pPr lvl="1"/>
+            <a:endParaRPr lang="ru-RU" sz="800" dirty="0">
+              <a:solidFill>
+                <a:srgbClr val="0F1115"/>
+              </a:solidFill>
+            </a:endParaRPr>
+          </a:p>
+          <a:p>
+            <a:r>
+              <a:rPr lang="ru-RU" sz="2800" b="1" dirty="0">
+                <a:solidFill>
+                  <a:schemeClr val="accent2">
+                    <a:lumMod val="50000"/>
+                  </a:schemeClr>
+                </a:solidFill>
+              </a:rPr>
+              <a:t>База данных: </a:t>
+            </a:r>
+          </a:p>
+          <a:p>
+            <a:pPr lvl="1"/>
+            <a:r>
+              <a:rPr lang="ru-RU" sz="2000" dirty="0" err="1">
+                <a:solidFill>
+                  <a:srgbClr val="0F1115"/>
+                </a:solidFill>
+              </a:rPr>
+              <a:t>PostgreSQL</a:t>
+            </a:r>
+            <a:endParaRPr lang="ru-RU" sz="2000" dirty="0">
+              <a:solidFill>
+                <a:srgbClr val="0F1115"/>
+              </a:solidFill>
+            </a:endParaRPr>
+          </a:p>
+          <a:p>
+            <a:pPr lvl="1"/>
+            <a:endParaRPr lang="ru-RU" sz="800" dirty="0">
+              <a:solidFill>
+                <a:srgbClr val="0F1115"/>
+              </a:solidFill>
+            </a:endParaRPr>
+          </a:p>
+          <a:p>
+            <a:r>
+              <a:rPr lang="ru-RU" sz="2800" b="1" dirty="0">
+                <a:solidFill>
+                  <a:schemeClr val="accent2">
+                    <a:lumMod val="50000"/>
+                  </a:schemeClr>
+                </a:solidFill>
+              </a:rPr>
+              <a:t>Взаимодействие и развертывание: </a:t>
+            </a:r>
+          </a:p>
+          <a:p>
+            <a:pPr lvl="1"/>
+            <a:r>
+              <a:rPr lang="ru-RU" sz="2000" dirty="0">
+                <a:solidFill>
+                  <a:srgbClr val="0F1115"/>
+                </a:solidFill>
+              </a:rPr>
+              <a:t>REST API</a:t>
+            </a:r>
+          </a:p>
+          <a:p>
+            <a:pPr lvl="1"/>
+            <a:r>
+              <a:rPr lang="en-US" sz="2000" dirty="0">
+                <a:solidFill>
+                  <a:srgbClr val="0F1115"/>
+                </a:solidFill>
+              </a:rPr>
+              <a:t>Apache Kafka</a:t>
+            </a:r>
+            <a:endParaRPr lang="ru-RU" sz="2000" dirty="0">
+              <a:solidFill>
+                <a:srgbClr val="0F1115"/>
+              </a:solidFill>
+            </a:endParaRPr>
+          </a:p>
+          <a:p>
+            <a:pPr lvl="1"/>
+            <a:r>
+              <a:rPr lang="en-US" sz="2000" dirty="0">
+                <a:solidFill>
+                  <a:srgbClr val="0F1115"/>
+                </a:solidFill>
+              </a:rPr>
+              <a:t>WebSocket/STOMP</a:t>
+            </a:r>
+            <a:endParaRPr lang="ru-RU" sz="2000" dirty="0">
+              <a:solidFill>
+                <a:srgbClr val="0F1115"/>
+              </a:solidFill>
+            </a:endParaRPr>
+          </a:p>
+          <a:p>
+            <a:pPr lvl="1"/>
+            <a:r>
+              <a:rPr lang="ru-RU" sz="2000" dirty="0" err="1">
+                <a:solidFill>
+                  <a:srgbClr val="0F1115"/>
+                </a:solidFill>
+              </a:rPr>
+              <a:t>Docker</a:t>
+            </a:r>
+            <a:endParaRPr lang="ru-RU" sz="2000" dirty="0">
+              <a:solidFill>
+                <a:srgbClr val="0F1115"/>
+              </a:solidFill>
+            </a:endParaRPr>
+          </a:p>
+        </p:txBody>
+      </p:sp>
+      <p:pic>
+        <p:nvPicPr>
+          <p:cNvPr id="2052" name="Picture 4">
+            <a:extLst>
+              <a:ext uri="{FF2B5EF4-FFF2-40B4-BE49-F238E27FC236}">
+                <a16:creationId xmlns:a16="http://schemas.microsoft.com/office/drawing/2014/main" id="{74BBF544-C127-4220-87C5-CF180A0223D0}"/>
+              </a:ext>
+            </a:extLst>
+          </p:cNvPr>
+          <p:cNvPicPr>
+            <a:picLocks noChangeAspect="1" noChangeArrowheads="1"/>
+          </p:cNvPicPr>
+          <p:nvPr/>
+        </p:nvPicPr>
+        <p:blipFill>
+          <a:blip r:embed="rId4">
+            <a:extLst>
+              <a:ext uri="{28A0092B-C50C-407E-A947-70E740481C1C}">
+                <a14:useLocalDpi xmlns:a14="http://schemas.microsoft.com/office/drawing/2010/main" val="0"/>
+              </a:ext>
+            </a:extLst>
+          </a:blip>
+          <a:srcRect/>
+          <a:stretch>
+            <a:fillRect/>
+          </a:stretch>
+        </p:blipFill>
+        <p:spPr bwMode="auto">
+          <a:xfrm>
+            <a:off x="10019512" y="3023035"/>
+            <a:ext cx="1475616" cy="1343753"/>
+          </a:xfrm>
+          <a:prstGeom prst="rect">
+            <a:avLst/>
+          </a:prstGeom>
+          <a:noFill/>
+          <a:extLst>
+            <a:ext uri="{909E8E84-426E-40DD-AFC4-6F175D3DCCD1}">
+              <a14:hiddenFill xmlns:a14="http://schemas.microsoft.com/office/drawing/2010/main">
+                <a:solidFill>
+                  <a:srgbClr val="FFFFFF"/>
+                </a:solidFill>
+              </a14:hiddenFill>
+            </a:ext>
+          </a:extLst>
+        </p:spPr>
+      </p:pic>
+      <p:pic>
+        <p:nvPicPr>
+          <p:cNvPr id="2056" name="Picture 8" descr="Docker: Getting started">
+            <a:extLst>
+              <a:ext uri="{FF2B5EF4-FFF2-40B4-BE49-F238E27FC236}">
+                <a16:creationId xmlns:a16="http://schemas.microsoft.com/office/drawing/2014/main" id="{C50419DC-D0FA-454C-B928-A3963B0B1945}"/>
+              </a:ext>
+            </a:extLst>
+          </p:cNvPr>
+          <p:cNvPicPr>
+            <a:picLocks noChangeAspect="1" noChangeArrowheads="1"/>
+          </p:cNvPicPr>
+          <p:nvPr/>
+        </p:nvPicPr>
+        <p:blipFill>
+          <a:blip r:embed="rId5">
+            <a:extLst>
+              <a:ext uri="{28A0092B-C50C-407E-A947-70E740481C1C}">
+                <a14:useLocalDpi xmlns:a14="http://schemas.microsoft.com/office/drawing/2010/main" val="0"/>
+              </a:ext>
+            </a:extLst>
+          </a:blip>
+          <a:srcRect/>
+          <a:stretch>
+            <a:fillRect/>
+          </a:stretch>
+        </p:blipFill>
+        <p:spPr bwMode="auto">
+          <a:xfrm>
+            <a:off x="6779436" y="4899984"/>
+            <a:ext cx="2833443" cy="1487558"/>
           </a:xfrm>
           <a:prstGeom prst="rect">
             <a:avLst/>
@@ -13489,7 +14685,7 @@
           <p:nvPr/>
         </p:nvPicPr>
         <p:blipFill>
-          <a:blip r:embed="rId3">
+          <a:blip r:embed="rId6">
             <a:extLst>
               <a:ext uri="{28A0092B-C50C-407E-A947-70E740481C1C}">
                 <a14:useLocalDpi xmlns:a14="http://schemas.microsoft.com/office/drawing/2010/main" val="0"/>
@@ -13503,7 +14699,7 @@
         </p:blipFill>
         <p:spPr bwMode="auto">
           <a:xfrm>
-            <a:off x="7889402" y="1671958"/>
+            <a:off x="7670998" y="1702864"/>
             <a:ext cx="1924529" cy="2163405"/>
           </a:xfrm>
           <a:prstGeom prst="rect">
@@ -13523,398 +14719,10 @@
       </p:pic>
       <p:pic>
         <p:nvPicPr>
-          <p:cNvPr id="7" name="Picture 6" descr="Picture background">
+          <p:cNvPr id="8" name="Picture 4" descr="Apache Kafka - что это и где применяется, основы технологии">
             <a:extLst>
               <a:ext uri="{FF2B5EF4-FFF2-40B4-BE49-F238E27FC236}">
-                <a16:creationId xmlns:a16="http://schemas.microsoft.com/office/drawing/2014/main" id="{F37DF3E2-1219-47EE-BF57-EADB0A5B6D52}"/>
-              </a:ext>
-            </a:extLst>
-          </p:cNvPr>
-          <p:cNvPicPr>
-            <a:picLocks noChangeAspect="1" noChangeArrowheads="1"/>
-          </p:cNvPicPr>
-          <p:nvPr/>
-        </p:nvPicPr>
-        <p:blipFill>
-          <a:blip r:embed="rId4">
-            <a:extLst>
-              <a:ext uri="{28A0092B-C50C-407E-A947-70E740481C1C}">
-                <a14:useLocalDpi xmlns:a14="http://schemas.microsoft.com/office/drawing/2010/main" val="0"/>
-              </a:ext>
-            </a:extLst>
-          </a:blip>
-          <a:srcRect/>
-          <a:stretch>
-            <a:fillRect/>
-          </a:stretch>
-        </p:blipFill>
-        <p:spPr bwMode="auto">
-          <a:xfrm>
-            <a:off x="7160049" y="3470199"/>
-            <a:ext cx="2484089" cy="1639582"/>
-          </a:xfrm>
-          <a:prstGeom prst="rect">
-            <a:avLst/>
-          </a:prstGeom>
-          <a:noFill/>
-          <a:extLst>
-            <a:ext uri="{909E8E84-426E-40DD-AFC4-6F175D3DCCD1}">
-              <a14:hiddenFill xmlns:a14="http://schemas.microsoft.com/office/drawing/2010/main">
-                <a:solidFill>
-                  <a:srgbClr val="FFFFFF"/>
-                </a:solidFill>
-              </a14:hiddenFill>
-            </a:ext>
-          </a:extLst>
-        </p:spPr>
-      </p:pic>
-      <p:sp>
-        <p:nvSpPr>
-          <p:cNvPr id="3" name="Прямоугольник 2">
-            <a:extLst>
-              <a:ext uri="{FF2B5EF4-FFF2-40B4-BE49-F238E27FC236}">
-                <a16:creationId xmlns:a16="http://schemas.microsoft.com/office/drawing/2014/main" id="{D32E8853-60FA-46BC-8756-DE42BBFD2384}"/>
-              </a:ext>
-            </a:extLst>
-          </p:cNvPr>
-          <p:cNvSpPr/>
-          <p:nvPr/>
-        </p:nvSpPr>
-        <p:spPr>
-          <a:xfrm>
-            <a:off x="1145958" y="2024153"/>
-            <a:ext cx="6096000" cy="3416320"/>
-          </a:xfrm>
-          <a:prstGeom prst="rect">
-            <a:avLst/>
-          </a:prstGeom>
-        </p:spPr>
-        <p:txBody>
-          <a:bodyPr wrap="square">
-            <a:spAutoFit/>
-          </a:bodyPr>
-          <a:lstStyle/>
-          <a:p>
-            <a:pPr>
-              <a:buFont typeface="Arial" panose="020B0604020202020204" pitchFamily="34" charset="0"/>
-              <a:buChar char="•"/>
-            </a:pPr>
-            <a:r>
-              <a:rPr lang="ru-RU" sz="2400" dirty="0">
-                <a:solidFill>
-                  <a:srgbClr val="0F1115"/>
-                </a:solidFill>
-              </a:rPr>
-              <a:t> </a:t>
-            </a:r>
-            <a:r>
-              <a:rPr lang="ru-RU" sz="2400" dirty="0" err="1">
-                <a:solidFill>
-                  <a:srgbClr val="0F1115"/>
-                </a:solidFill>
-              </a:rPr>
-              <a:t>Backend</a:t>
-            </a:r>
-            <a:r>
-              <a:rPr lang="ru-RU" sz="2400" dirty="0">
-                <a:solidFill>
-                  <a:srgbClr val="0F1115"/>
-                </a:solidFill>
-              </a:rPr>
-              <a:t>: </a:t>
-            </a:r>
-            <a:r>
-              <a:rPr lang="ru-RU" sz="2400" dirty="0" err="1">
-                <a:solidFill>
-                  <a:srgbClr val="0F1115"/>
-                </a:solidFill>
-              </a:rPr>
-              <a:t>Java</a:t>
-            </a:r>
-            <a:r>
-              <a:rPr lang="ru-RU" sz="2400" dirty="0">
-                <a:solidFill>
-                  <a:srgbClr val="0F1115"/>
-                </a:solidFill>
-              </a:rPr>
-              <a:t> (</a:t>
-            </a:r>
-            <a:r>
-              <a:rPr lang="ru-RU" sz="2400" dirty="0" err="1">
-                <a:solidFill>
-                  <a:srgbClr val="0F1115"/>
-                </a:solidFill>
-              </a:rPr>
-              <a:t>Spring</a:t>
-            </a:r>
-            <a:r>
-              <a:rPr lang="ru-RU" sz="2400" dirty="0">
-                <a:solidFill>
-                  <a:srgbClr val="0F1115"/>
-                </a:solidFill>
-              </a:rPr>
-              <a:t> </a:t>
-            </a:r>
-            <a:r>
-              <a:rPr lang="ru-RU" sz="2400" dirty="0" err="1">
-                <a:solidFill>
-                  <a:srgbClr val="0F1115"/>
-                </a:solidFill>
-              </a:rPr>
-              <a:t>Boot</a:t>
-            </a:r>
-            <a:r>
-              <a:rPr lang="ru-RU" sz="2400" dirty="0">
-                <a:solidFill>
-                  <a:srgbClr val="0F1115"/>
-                </a:solidFill>
-              </a:rPr>
-              <a:t>) для основной бизнес-логики и </a:t>
-            </a:r>
-            <a:r>
-              <a:rPr lang="ru-RU" sz="2400" dirty="0" err="1">
-                <a:solidFill>
-                  <a:srgbClr val="0F1115"/>
-                </a:solidFill>
-              </a:rPr>
-              <a:t>Python</a:t>
-            </a:r>
-            <a:r>
-              <a:rPr lang="ru-RU" sz="2400" dirty="0">
-                <a:solidFill>
-                  <a:srgbClr val="0F1115"/>
-                </a:solidFill>
-              </a:rPr>
-              <a:t> для аналитических задач</a:t>
-            </a:r>
-          </a:p>
-          <a:p>
-            <a:pPr>
-              <a:buFont typeface="Arial" panose="020B0604020202020204" pitchFamily="34" charset="0"/>
-              <a:buChar char="•"/>
-            </a:pPr>
-            <a:r>
-              <a:rPr lang="ru-RU" sz="2400" dirty="0">
-                <a:solidFill>
-                  <a:srgbClr val="0F1115"/>
-                </a:solidFill>
-              </a:rPr>
-              <a:t> </a:t>
-            </a:r>
-            <a:r>
-              <a:rPr lang="ru-RU" sz="2400" dirty="0" err="1">
-                <a:solidFill>
-                  <a:srgbClr val="0F1115"/>
-                </a:solidFill>
-              </a:rPr>
-              <a:t>Frontend</a:t>
-            </a:r>
-            <a:r>
-              <a:rPr lang="ru-RU" sz="2400" dirty="0">
-                <a:solidFill>
-                  <a:srgbClr val="0F1115"/>
-                </a:solidFill>
-              </a:rPr>
-              <a:t>: React.js</a:t>
-            </a:r>
-          </a:p>
-          <a:p>
-            <a:pPr>
-              <a:buFont typeface="Arial" panose="020B0604020202020204" pitchFamily="34" charset="0"/>
-              <a:buChar char="•"/>
-            </a:pPr>
-            <a:r>
-              <a:rPr lang="ru-RU" sz="2400" dirty="0">
-                <a:solidFill>
-                  <a:srgbClr val="0F1115"/>
-                </a:solidFill>
-              </a:rPr>
-              <a:t> База данных: </a:t>
-            </a:r>
-            <a:r>
-              <a:rPr lang="ru-RU" sz="2400" dirty="0" err="1">
-                <a:solidFill>
-                  <a:srgbClr val="0F1115"/>
-                </a:solidFill>
-              </a:rPr>
-              <a:t>PostgreSQL</a:t>
-            </a:r>
-            <a:endParaRPr lang="ru-RU" sz="2400" dirty="0">
-              <a:solidFill>
-                <a:srgbClr val="0F1115"/>
-              </a:solidFill>
-            </a:endParaRPr>
-          </a:p>
-          <a:p>
-            <a:pPr>
-              <a:buFont typeface="Arial" panose="020B0604020202020204" pitchFamily="34" charset="0"/>
-              <a:buChar char="•"/>
-            </a:pPr>
-            <a:r>
-              <a:rPr lang="ru-RU" sz="2400" dirty="0">
-                <a:solidFill>
-                  <a:srgbClr val="0F1115"/>
-                </a:solidFill>
-              </a:rPr>
-              <a:t> Интеграция и развертывание: REST API, </a:t>
-            </a:r>
-            <a:r>
-              <a:rPr lang="ru-RU" sz="2400" dirty="0" err="1">
-                <a:solidFill>
-                  <a:srgbClr val="0F1115"/>
-                </a:solidFill>
-              </a:rPr>
-              <a:t>Apache</a:t>
-            </a:r>
-            <a:r>
-              <a:rPr lang="ru-RU" sz="2400" dirty="0">
-                <a:solidFill>
-                  <a:srgbClr val="0F1115"/>
-                </a:solidFill>
-              </a:rPr>
-              <a:t> </a:t>
-            </a:r>
-            <a:r>
-              <a:rPr lang="ru-RU" sz="2400" dirty="0" err="1">
-                <a:solidFill>
-                  <a:srgbClr val="0F1115"/>
-                </a:solidFill>
-              </a:rPr>
-              <a:t>Airflow</a:t>
-            </a:r>
-            <a:r>
-              <a:rPr lang="ru-RU" sz="2400" dirty="0">
-                <a:solidFill>
-                  <a:srgbClr val="0F1115"/>
-                </a:solidFill>
-              </a:rPr>
-              <a:t> для ETL-процессов, </a:t>
-            </a:r>
-            <a:r>
-              <a:rPr lang="ru-RU" sz="2400" dirty="0" err="1">
-                <a:solidFill>
-                  <a:srgbClr val="0F1115"/>
-                </a:solidFill>
-              </a:rPr>
-              <a:t>Docker</a:t>
-            </a:r>
-            <a:r>
-              <a:rPr lang="ru-RU" sz="2400" dirty="0">
-                <a:solidFill>
-                  <a:srgbClr val="0F1115"/>
-                </a:solidFill>
-              </a:rPr>
-              <a:t> для контейнеризации.</a:t>
-            </a:r>
-            <a:endParaRPr lang="ru-RU" sz="2400" i="0" dirty="0">
-              <a:solidFill>
-                <a:srgbClr val="0F1115"/>
-              </a:solidFill>
-              <a:effectLst/>
-            </a:endParaRPr>
-          </a:p>
-        </p:txBody>
-      </p:sp>
-      <p:pic>
-        <p:nvPicPr>
-          <p:cNvPr id="2050" name="Picture 2" descr="Logging in Python: A Developer's Guide | Product Blog • Sentry">
-            <a:extLst>
-              <a:ext uri="{FF2B5EF4-FFF2-40B4-BE49-F238E27FC236}">
-                <a16:creationId xmlns:a16="http://schemas.microsoft.com/office/drawing/2014/main" id="{B13AD4C7-86F6-404B-8075-54F914ED7924}"/>
-              </a:ext>
-            </a:extLst>
-          </p:cNvPr>
-          <p:cNvPicPr>
-            <a:picLocks noChangeAspect="1" noChangeArrowheads="1"/>
-          </p:cNvPicPr>
-          <p:nvPr/>
-        </p:nvPicPr>
-        <p:blipFill>
-          <a:blip r:embed="rId5">
-            <a:extLst>
-              <a:ext uri="{28A0092B-C50C-407E-A947-70E740481C1C}">
-                <a14:useLocalDpi xmlns:a14="http://schemas.microsoft.com/office/drawing/2010/main" val="0"/>
-              </a:ext>
-            </a:extLst>
-          </a:blip>
-          <a:srcRect/>
-          <a:stretch>
-            <a:fillRect/>
-          </a:stretch>
-        </p:blipFill>
-        <p:spPr bwMode="auto">
-          <a:xfrm>
-            <a:off x="10284038" y="1760055"/>
-            <a:ext cx="1950764" cy="1950764"/>
-          </a:xfrm>
-          <a:prstGeom prst="rect">
-            <a:avLst/>
-          </a:prstGeom>
-          <a:noFill/>
-          <a:extLst>
-            <a:ext uri="{909E8E84-426E-40DD-AFC4-6F175D3DCCD1}">
-              <a14:hiddenFill xmlns:a14="http://schemas.microsoft.com/office/drawing/2010/main">
-                <a:solidFill>
-                  <a:srgbClr val="FFFFFF"/>
-                </a:solidFill>
-              </a14:hiddenFill>
-            </a:ext>
-          </a:extLst>
-        </p:spPr>
-      </p:pic>
-      <p:pic>
-        <p:nvPicPr>
-          <p:cNvPr id="2052" name="Picture 4">
-            <a:extLst>
-              <a:ext uri="{FF2B5EF4-FFF2-40B4-BE49-F238E27FC236}">
-                <a16:creationId xmlns:a16="http://schemas.microsoft.com/office/drawing/2014/main" id="{74BBF544-C127-4220-87C5-CF180A0223D0}"/>
-              </a:ext>
-            </a:extLst>
-          </p:cNvPr>
-          <p:cNvPicPr>
-            <a:picLocks noChangeAspect="1" noChangeArrowheads="1"/>
-          </p:cNvPicPr>
-          <p:nvPr/>
-        </p:nvPicPr>
-        <p:blipFill>
-          <a:blip r:embed="rId6">
-            <a:extLst>
-              <a:ext uri="{28A0092B-C50C-407E-A947-70E740481C1C}">
-                <a14:useLocalDpi xmlns:a14="http://schemas.microsoft.com/office/drawing/2010/main" val="0"/>
-              </a:ext>
-            </a:extLst>
-          </a:blip>
-          <a:srcRect/>
-          <a:stretch>
-            <a:fillRect/>
-          </a:stretch>
-        </p:blipFill>
-        <p:spPr bwMode="auto">
-          <a:xfrm>
-            <a:off x="9922799" y="3604045"/>
-            <a:ext cx="1475616" cy="1343753"/>
-          </a:xfrm>
-          <a:prstGeom prst="rect">
-            <a:avLst/>
-          </a:prstGeom>
-          <a:noFill/>
-          <a:extLst>
-            <a:ext uri="{909E8E84-426E-40DD-AFC4-6F175D3DCCD1}">
-              <a14:hiddenFill xmlns:a14="http://schemas.microsoft.com/office/drawing/2010/main">
-                <a:solidFill>
-                  <a:srgbClr val="FFFFFF"/>
-                </a:solidFill>
-              </a14:hiddenFill>
-            </a:ext>
-          </a:extLst>
-        </p:spPr>
-      </p:pic>
-      <p:pic>
-        <p:nvPicPr>
-          <p:cNvPr id="2054" name="Picture 6" descr="apache/airflow - Docker Image">
-            <a:extLst>
-              <a:ext uri="{FF2B5EF4-FFF2-40B4-BE49-F238E27FC236}">
-                <a16:creationId xmlns:a16="http://schemas.microsoft.com/office/drawing/2014/main" id="{9960C656-9402-4E78-9370-E2F1C9769FD6}"/>
+                <a16:creationId xmlns:a16="http://schemas.microsoft.com/office/drawing/2014/main" id="{05715EBE-8CAB-4DF0-98F4-D9E2B848D0F5}"/>
               </a:ext>
             </a:extLst>
           </p:cNvPr>
@@ -13938,55 +14746,8 @@
         </p:blipFill>
         <p:spPr bwMode="auto">
           <a:xfrm>
-            <a:off x="6625880" y="5145184"/>
-            <a:ext cx="1068338" cy="1068338"/>
-          </a:xfrm>
-          <a:prstGeom prst="rect">
-            <a:avLst/>
-          </a:prstGeom>
-          <a:noFill/>
-          <a:extLst>
-            <a:ext uri="{909E8E84-426E-40DD-AFC4-6F175D3DCCD1}">
-              <a14:hiddenFill xmlns:a14="http://schemas.microsoft.com/office/drawing/2010/main">
-                <a:solidFill>
-                  <a:srgbClr val="FFFFFF"/>
-                </a:solidFill>
-              </a14:hiddenFill>
-            </a:ext>
-          </a:extLst>
-        </p:spPr>
-      </p:pic>
-      <p:pic>
-        <p:nvPicPr>
-          <p:cNvPr id="2056" name="Picture 8" descr="Docker: Getting started">
-            <a:extLst>
-              <a:ext uri="{FF2B5EF4-FFF2-40B4-BE49-F238E27FC236}">
-                <a16:creationId xmlns:a16="http://schemas.microsoft.com/office/drawing/2014/main" id="{C50419DC-D0FA-454C-B928-A3963B0B1945}"/>
-              </a:ext>
-            </a:extLst>
-          </p:cNvPr>
-          <p:cNvPicPr>
-            <a:picLocks noChangeAspect="1" noChangeArrowheads="1"/>
-          </p:cNvPicPr>
-          <p:nvPr/>
-        </p:nvPicPr>
-        <p:blipFill>
-          <a:blip r:embed="rId8">
-            <a:extLst>
-              <a:ext uri="{28A0092B-C50C-407E-A947-70E740481C1C}">
-                <a14:useLocalDpi xmlns:a14="http://schemas.microsoft.com/office/drawing/2010/main" val="0"/>
-              </a:ext>
-            </a:extLst>
-          </a:blip>
-          <a:srcRect/>
-          <a:stretch>
-            <a:fillRect/>
-          </a:stretch>
-        </p:blipFill>
-        <p:spPr bwMode="auto">
-          <a:xfrm>
-            <a:off x="7889402" y="4935574"/>
-            <a:ext cx="2833443" cy="1487558"/>
+            <a:off x="9409959" y="4673523"/>
+            <a:ext cx="2427311" cy="1213656"/>
           </a:xfrm>
           <a:prstGeom prst="rect">
             <a:avLst/>
@@ -14038,7 +14799,7 @@
           <p:cNvPr id="2" name="Заголовок 1">
             <a:extLst>
               <a:ext uri="{FF2B5EF4-FFF2-40B4-BE49-F238E27FC236}">
-                <a16:creationId xmlns:a16="http://schemas.microsoft.com/office/drawing/2014/main" id="{FFE226BE-C6AE-45AA-A385-720ADCF44DAD}"/>
+                <a16:creationId xmlns:a16="http://schemas.microsoft.com/office/drawing/2014/main" id="{2993856C-A931-42A8-8448-F0FC939E1A25}"/>
               </a:ext>
             </a:extLst>
           </p:cNvPr>
@@ -14051,14 +14812,12 @@
         </p:nvSpPr>
         <p:spPr>
           <a:xfrm>
-            <a:off x="838200" y="365126"/>
-            <a:ext cx="10167851" cy="565900"/>
+            <a:off x="838200" y="590550"/>
+            <a:ext cx="10515600" cy="709613"/>
           </a:xfrm>
         </p:spPr>
         <p:txBody>
-          <a:bodyPr>
-            <a:noAutofit/>
-          </a:bodyPr>
+          <a:bodyPr/>
           <a:lstStyle/>
           <a:p>
             <a:pPr algn="ctr"/>
@@ -14070,34 +14829,17 @@
                   </a:schemeClr>
                 </a:solidFill>
               </a:rPr>
-              <a:t>Диаграмма</a:t>
+              <a:t>АРХИТЕКТУРА</a:t>
             </a:r>
-            <a:r>
-              <a:rPr lang="en-US" sz="3600" b="1" dirty="0">
-                <a:solidFill>
-                  <a:schemeClr val="accent2">
-                    <a:lumMod val="50000"/>
-                  </a:schemeClr>
-                </a:solidFill>
-              </a:rPr>
-              <a:t> DFD</a:t>
-            </a:r>
-            <a:endParaRPr lang="ru-RU" sz="3600" b="1" dirty="0">
-              <a:solidFill>
-                <a:schemeClr val="accent2">
-                  <a:lumMod val="50000"/>
-                </a:schemeClr>
-              </a:solidFill>
-            </a:endParaRPr>
           </a:p>
         </p:txBody>
       </p:sp>
       <p:pic>
         <p:nvPicPr>
-          <p:cNvPr id="6" name="Рисунок 5">
+          <p:cNvPr id="4" name="Рисунок 3">
             <a:extLst>
               <a:ext uri="{FF2B5EF4-FFF2-40B4-BE49-F238E27FC236}">
-                <a16:creationId xmlns:a16="http://schemas.microsoft.com/office/drawing/2014/main" id="{576BCCFB-A6D8-4924-9CBB-9E1A6CCEEBB5}"/>
+                <a16:creationId xmlns:a16="http://schemas.microsoft.com/office/drawing/2014/main" id="{E55B03D2-A1C9-4B14-B608-419E800A5F49}"/>
               </a:ext>
             </a:extLst>
           </p:cNvPr>
@@ -14105,36 +14847,34 @@
           <p:nvPr/>
         </p:nvPicPr>
         <p:blipFill>
-          <a:blip r:embed="rId2" cstate="print">
+          <a:blip r:embed="rId2">
             <a:extLst>
               <a:ext uri="{28A0092B-C50C-407E-A947-70E740481C1C}">
                 <a14:useLocalDpi xmlns:a14="http://schemas.microsoft.com/office/drawing/2010/main" val="0"/>
               </a:ext>
+              <a:ext uri="{96DAC541-7B7A-43D3-8B79-37D633B846F1}">
+                <asvg:svgBlip xmlns:asvg="http://schemas.microsoft.com/office/drawing/2016/SVG/main" r:embed="rId3"/>
+              </a:ext>
             </a:extLst>
           </a:blip>
-          <a:srcRect/>
           <a:stretch>
             <a:fillRect/>
           </a:stretch>
         </p:blipFill>
-        <p:spPr bwMode="auto">
+        <p:spPr>
           <a:xfrm>
-            <a:off x="577970" y="1592166"/>
-            <a:ext cx="11237488" cy="4006378"/>
+            <a:off x="1927324" y="1688570"/>
+            <a:ext cx="8337352" cy="4578880"/>
           </a:xfrm>
           <a:prstGeom prst="rect">
             <a:avLst/>
           </a:prstGeom>
-          <a:noFill/>
-          <a:ln>
-            <a:noFill/>
-          </a:ln>
         </p:spPr>
       </p:pic>
     </p:spTree>
     <p:extLst>
       <p:ext uri="{BB962C8B-B14F-4D97-AF65-F5344CB8AC3E}">
-        <p14:creationId xmlns:p14="http://schemas.microsoft.com/office/powerpoint/2010/main" val="1122859262"/>
+        <p14:creationId xmlns:p14="http://schemas.microsoft.com/office/powerpoint/2010/main" val="789651022"/>
       </p:ext>
     </p:extLst>
   </p:cSld>
@@ -14166,7 +14906,7 @@
           <p:cNvPr id="2" name="Заголовок 1">
             <a:extLst>
               <a:ext uri="{FF2B5EF4-FFF2-40B4-BE49-F238E27FC236}">
-                <a16:creationId xmlns:a16="http://schemas.microsoft.com/office/drawing/2014/main" id="{94AB1114-2E3C-4ABF-89D4-C103C0381824}"/>
+                <a16:creationId xmlns:a16="http://schemas.microsoft.com/office/drawing/2014/main" id="{11FFE203-76DD-461E-803B-F0DC33519418}"/>
               </a:ext>
             </a:extLst>
           </p:cNvPr>
@@ -14178,9 +14918,9 @@
           </p:nvPr>
         </p:nvSpPr>
         <p:spPr>
-          <a:xfrm>
-            <a:off x="1035848" y="0"/>
-            <a:ext cx="10117975" cy="1056351"/>
+          <a:xfrm rot="16200000">
+            <a:off x="-1849834" y="2878537"/>
+            <a:ext cx="6858001" cy="1100928"/>
           </a:xfrm>
         </p:spPr>
         <p:txBody>
@@ -14198,17 +14938,57 @@
                   </a:schemeClr>
                 </a:solidFill>
               </a:rPr>
-              <a:t>Диаграмма последовательности</a:t>
+              <a:t>ДЕКОМПОЗИЦИЯ </a:t>
             </a:r>
+            <a:br>
+              <a:rPr lang="ru-RU" sz="3600" b="1" dirty="0">
+                <a:solidFill>
+                  <a:schemeClr val="accent2">
+                    <a:lumMod val="50000"/>
+                  </a:schemeClr>
+                </a:solidFill>
+              </a:rPr>
+            </a:br>
+            <a:r>
+              <a:rPr lang="ru-RU" sz="3600" b="1" dirty="0">
+                <a:solidFill>
+                  <a:schemeClr val="accent2">
+                    <a:lumMod val="50000"/>
+                  </a:schemeClr>
+                </a:solidFill>
+              </a:rPr>
+              <a:t>ДИАГРАММЫ </a:t>
+            </a:r>
+            <a:r>
+              <a:rPr lang="en-US" sz="3600" b="1" dirty="0">
+                <a:solidFill>
+                  <a:schemeClr val="accent2">
+                    <a:lumMod val="50000"/>
+                  </a:schemeClr>
+                </a:solidFill>
+              </a:rPr>
+              <a:t>IDEF</a:t>
+            </a:r>
+            <a:r>
+              <a:rPr lang="ru-RU" sz="3600" b="1" dirty="0">
+                <a:solidFill>
+                  <a:schemeClr val="accent2">
+                    <a:lumMod val="50000"/>
+                  </a:schemeClr>
+                </a:solidFill>
+              </a:rPr>
+              <a:t>0</a:t>
+            </a:r>
+            <a:endParaRPr lang="ru-RU" sz="3600" dirty="0"/>
           </a:p>
         </p:txBody>
       </p:sp>
       <p:pic>
         <p:nvPicPr>
-          <p:cNvPr id="5" name="Рисунок 4">
+          <p:cNvPr id="4" name="Рисунок 3">
             <a:extLst>
               <a:ext uri="{FF2B5EF4-FFF2-40B4-BE49-F238E27FC236}">
-                <a16:creationId xmlns:a16="http://schemas.microsoft.com/office/drawing/2014/main" id="{544CAE93-3EB9-426D-8166-ECF2352D7C90}"/>
+                <a16:creationId xmlns:a16="http://schemas.microsoft.com/office/drawing/2014/main" id="{0A424B9B-BD41-48EE-A600-0456F7DF339F}"/>
               </a:ext>
             </a:extLst>
           </p:cNvPr>
@@ -14230,19 +15010,22 @@
         </p:blipFill>
         <p:spPr bwMode="auto">
           <a:xfrm>
-            <a:off x="1038176" y="1056351"/>
-            <a:ext cx="10115647" cy="5172860"/>
+            <a:off x="2129631" y="1133078"/>
+            <a:ext cx="8998021" cy="4591844"/>
           </a:xfrm>
           <a:prstGeom prst="rect">
             <a:avLst/>
           </a:prstGeom>
           <a:noFill/>
+          <a:ln>
+            <a:noFill/>
+          </a:ln>
         </p:spPr>
       </p:pic>
     </p:spTree>
     <p:extLst>
       <p:ext uri="{BB962C8B-B14F-4D97-AF65-F5344CB8AC3E}">
-        <p14:creationId xmlns:p14="http://schemas.microsoft.com/office/powerpoint/2010/main" val="1778410790"/>
+        <p14:creationId xmlns:p14="http://schemas.microsoft.com/office/powerpoint/2010/main" val="1122708110"/>
       </p:ext>
     </p:extLst>
   </p:cSld>
@@ -14253,6 +15036,207 @@
 </file>
 
 <file path=ppt/theme/theme1.xml><?xml version="1.0" encoding="utf-8"?>
+<a:theme xmlns:a="http://schemas.openxmlformats.org/drawingml/2006/main" name="Тема Office">
+  <a:themeElements>
+    <a:clrScheme name="Синий II">
+      <a:dk1>
+        <a:sysClr val="windowText" lastClr="000000"/>
+      </a:dk1>
+      <a:lt1>
+        <a:sysClr val="window" lastClr="FFFFFF"/>
+      </a:lt1>
+      <a:dk2>
+        <a:srgbClr val="335B74"/>
+      </a:dk2>
+      <a:lt2>
+        <a:srgbClr val="DFE3E5"/>
+      </a:lt2>
+      <a:accent1>
+        <a:srgbClr val="1CADE4"/>
+      </a:accent1>
+      <a:accent2>
+        <a:srgbClr val="2683C6"/>
+      </a:accent2>
+      <a:accent3>
+        <a:srgbClr val="27CED7"/>
+      </a:accent3>
+      <a:accent4>
+        <a:srgbClr val="42BA97"/>
+      </a:accent4>
+      <a:accent5>
+        <a:srgbClr val="3E8853"/>
+      </a:accent5>
+      <a:accent6>
+        <a:srgbClr val="62A39F"/>
+      </a:accent6>
+      <a:hlink>
+        <a:srgbClr val="6EAC1C"/>
+      </a:hlink>
+      <a:folHlink>
+        <a:srgbClr val="B26B02"/>
+      </a:folHlink>
+    </a:clrScheme>
+    <a:fontScheme name="Другая 2">
+      <a:majorFont>
+        <a:latin typeface="Candara"/>
+        <a:ea typeface=""/>
+        <a:cs typeface=""/>
+      </a:majorFont>
+      <a:minorFont>
+        <a:latin typeface="Candara"/>
+        <a:ea typeface=""/>
+        <a:cs typeface=""/>
+      </a:minorFont>
+    </a:fontScheme>
+    <a:fmtScheme name="Стандартная">
+      <a:fillStyleLst>
+        <a:solidFill>
+          <a:schemeClr val="phClr"/>
+        </a:solidFill>
+        <a:gradFill rotWithShape="1">
+          <a:gsLst>
+            <a:gs pos="0">
+              <a:schemeClr val="phClr">
+                <a:lumMod val="110000"/>
+                <a:satMod val="105000"/>
+                <a:tint val="67000"/>
+              </a:schemeClr>
+            </a:gs>
+            <a:gs pos="50000">
+              <a:schemeClr val="phClr">
+                <a:lumMod val="105000"/>
+                <a:satMod val="103000"/>
+                <a:tint val="73000"/>
+              </a:schemeClr>
+            </a:gs>
+            <a:gs pos="100000">
+              <a:schemeClr val="phClr">
+                <a:lumMod val="105000"/>
+                <a:satMod val="109000"/>
+                <a:tint val="81000"/>
+              </a:schemeClr>
+            </a:gs>
+          </a:gsLst>
+          <a:lin ang="5400000" scaled="0"/>
+        </a:gradFill>
+        <a:gradFill rotWithShape="1">
+          <a:gsLst>
+            <a:gs pos="0">
+              <a:schemeClr val="phClr">
+                <a:satMod val="103000"/>
+                <a:lumMod val="102000"/>
+                <a:tint val="94000"/>
+              </a:schemeClr>
+            </a:gs>
+            <a:gs pos="50000">
+              <a:schemeClr val="phClr">
+                <a:satMod val="110000"/>
+                <a:lumMod val="100000"/>
+                <a:shade val="100000"/>
+              </a:schemeClr>
+            </a:gs>
+            <a:gs pos="100000">
+              <a:schemeClr val="phClr">
+                <a:lumMod val="99000"/>
+                <a:satMod val="120000"/>
+                <a:shade val="78000"/>
+              </a:schemeClr>
+            </a:gs>
+          </a:gsLst>
+          <a:lin ang="5400000" scaled="0"/>
+        </a:gradFill>
+      </a:fillStyleLst>
+      <a:lnStyleLst>
+        <a:ln w="6350" cap="flat" cmpd="sng" algn="ctr">
+          <a:solidFill>
+            <a:schemeClr val="phClr"/>
+          </a:solidFill>
+          <a:prstDash val="solid"/>
+          <a:miter lim="800000"/>
+        </a:ln>
+        <a:ln w="12700" cap="flat" cmpd="sng" algn="ctr">
+          <a:solidFill>
+            <a:schemeClr val="phClr"/>
+          </a:solidFill>
+          <a:prstDash val="solid"/>
+          <a:miter lim="800000"/>
+        </a:ln>
+        <a:ln w="19050" cap="flat" cmpd="sng" algn="ctr">
+          <a:solidFill>
+            <a:schemeClr val="phClr"/>
+          </a:solidFill>
+          <a:prstDash val="solid"/>
+          <a:miter lim="800000"/>
+        </a:ln>
+      </a:lnStyleLst>
+      <a:effectStyleLst>
+        <a:effectStyle>
+          <a:effectLst/>
+        </a:effectStyle>
+        <a:effectStyle>
+          <a:effectLst/>
+        </a:effectStyle>
+        <a:effectStyle>
+          <a:effectLst>
+            <a:outerShdw blurRad="57150" dist="19050" dir="5400000" algn="ctr" rotWithShape="0">
+              <a:srgbClr val="000000">
+                <a:alpha val="63000"/>
+              </a:srgbClr>
+            </a:outerShdw>
+          </a:effectLst>
+        </a:effectStyle>
+      </a:effectStyleLst>
+      <a:bgFillStyleLst>
+        <a:solidFill>
+          <a:schemeClr val="phClr"/>
+        </a:solidFill>
+        <a:solidFill>
+          <a:schemeClr val="phClr">
+            <a:tint val="95000"/>
+            <a:satMod val="170000"/>
+          </a:schemeClr>
+        </a:solidFill>
+        <a:gradFill rotWithShape="1">
+          <a:gsLst>
+            <a:gs pos="0">
+              <a:schemeClr val="phClr">
+                <a:tint val="93000"/>
+                <a:satMod val="150000"/>
+                <a:shade val="98000"/>
+                <a:lumMod val="102000"/>
+              </a:schemeClr>
+            </a:gs>
+            <a:gs pos="50000">
+              <a:schemeClr val="phClr">
+                <a:tint val="98000"/>
+                <a:satMod val="130000"/>
+                <a:shade val="90000"/>
+                <a:lumMod val="103000"/>
+              </a:schemeClr>
+            </a:gs>
+            <a:gs pos="100000">
+              <a:schemeClr val="phClr">
+                <a:shade val="63000"/>
+                <a:satMod val="120000"/>
+              </a:schemeClr>
+            </a:gs>
+          </a:gsLst>
+          <a:lin ang="5400000" scaled="0"/>
+        </a:gradFill>
+      </a:bgFillStyleLst>
+    </a:fmtScheme>
+  </a:themeElements>
+  <a:objectDefaults/>
+  <a:extraClrSchemeLst/>
+  <a:extLst>
+    <a:ext uri="{05A4C25C-085E-4340-85A3-A5531E510DB2}">
+      <thm15:themeFamily xmlns:thm15="http://schemas.microsoft.com/office/thememl/2012/main" name="Office Theme" id="{62F939B6-93AF-4DB8-9C6B-D6C7DFDC589F}" vid="{4A3C46E8-61CC-4603-A589-7422A47A8E4A}"/>
+    </a:ext>
+  </a:extLst>
+</a:theme>
+</file>
+
+<file path=ppt/theme/theme2.xml><?xml version="1.0" encoding="utf-8"?>
 <a:theme xmlns:a="http://schemas.openxmlformats.org/drawingml/2006/main" name="Тема Office">
   <a:themeElements>
     <a:clrScheme name="Стандартная">

--- a/Документы/Защита_Парамонова_АС.pptx
+++ b/Документы/Защита_Парамонова_АС.pptx
@@ -19,8 +19,8 @@
     <p:sldId id="293" r:id="rId10"/>
     <p:sldId id="291" r:id="rId11"/>
     <p:sldId id="281" r:id="rId12"/>
-    <p:sldId id="284" r:id="rId13"/>
-    <p:sldId id="286" r:id="rId14"/>
+    <p:sldId id="286" r:id="rId13"/>
+    <p:sldId id="294" r:id="rId14"/>
     <p:sldId id="258" r:id="rId15"/>
   </p:sldIdLst>
   <p:sldSz cx="12192000" cy="6858000"/>
@@ -6426,7 +6426,7 @@
           <a:p>
             <a:fld id="{1276E137-159C-40AE-B6E4-0B8BBE748819}" type="datetimeFigureOut">
               <a:rPr lang="ru-RU" smtClean="0"/>
-              <a:t>12.06.2026</a:t>
+              <a:t>16.06.2026</a:t>
             </a:fld>
             <a:endParaRPr lang="ru-RU"/>
           </a:p>
@@ -6924,7 +6924,7 @@
           <a:p>
             <a:fld id="{2F3BB9F6-A408-4EB0-9B33-6B405B8570CD}" type="datetimeFigureOut">
               <a:rPr lang="ru-RU" smtClean="0"/>
-              <a:t>12.06.2026</a:t>
+              <a:t>16.06.2026</a:t>
             </a:fld>
             <a:endParaRPr lang="ru-RU"/>
           </a:p>
@@ -7122,7 +7122,7 @@
           <a:p>
             <a:fld id="{2F3BB9F6-A408-4EB0-9B33-6B405B8570CD}" type="datetimeFigureOut">
               <a:rPr lang="ru-RU" smtClean="0"/>
-              <a:t>12.06.2026</a:t>
+              <a:t>16.06.2026</a:t>
             </a:fld>
             <a:endParaRPr lang="ru-RU"/>
           </a:p>
@@ -7330,7 +7330,7 @@
           <a:p>
             <a:fld id="{2F3BB9F6-A408-4EB0-9B33-6B405B8570CD}" type="datetimeFigureOut">
               <a:rPr lang="ru-RU" smtClean="0"/>
-              <a:t>12.06.2026</a:t>
+              <a:t>16.06.2026</a:t>
             </a:fld>
             <a:endParaRPr lang="ru-RU"/>
           </a:p>
@@ -7528,7 +7528,7 @@
           <a:p>
             <a:fld id="{2F3BB9F6-A408-4EB0-9B33-6B405B8570CD}" type="datetimeFigureOut">
               <a:rPr lang="ru-RU" smtClean="0"/>
-              <a:t>12.06.2026</a:t>
+              <a:t>16.06.2026</a:t>
             </a:fld>
             <a:endParaRPr lang="ru-RU"/>
           </a:p>
@@ -7803,7 +7803,7 @@
           <a:p>
             <a:fld id="{2F3BB9F6-A408-4EB0-9B33-6B405B8570CD}" type="datetimeFigureOut">
               <a:rPr lang="ru-RU" smtClean="0"/>
-              <a:t>12.06.2026</a:t>
+              <a:t>16.06.2026</a:t>
             </a:fld>
             <a:endParaRPr lang="ru-RU"/>
           </a:p>
@@ -8068,7 +8068,7 @@
           <a:p>
             <a:fld id="{2F3BB9F6-A408-4EB0-9B33-6B405B8570CD}" type="datetimeFigureOut">
               <a:rPr lang="ru-RU" smtClean="0"/>
-              <a:t>12.06.2026</a:t>
+              <a:t>16.06.2026</a:t>
             </a:fld>
             <a:endParaRPr lang="ru-RU"/>
           </a:p>
@@ -8480,7 +8480,7 @@
           <a:p>
             <a:fld id="{2F3BB9F6-A408-4EB0-9B33-6B405B8570CD}" type="datetimeFigureOut">
               <a:rPr lang="ru-RU" smtClean="0"/>
-              <a:t>12.06.2026</a:t>
+              <a:t>16.06.2026</a:t>
             </a:fld>
             <a:endParaRPr lang="ru-RU"/>
           </a:p>
@@ -8621,7 +8621,7 @@
           <a:p>
             <a:fld id="{2F3BB9F6-A408-4EB0-9B33-6B405B8570CD}" type="datetimeFigureOut">
               <a:rPr lang="ru-RU" smtClean="0"/>
-              <a:t>12.06.2026</a:t>
+              <a:t>16.06.2026</a:t>
             </a:fld>
             <a:endParaRPr lang="ru-RU"/>
           </a:p>
@@ -8734,7 +8734,7 @@
           <a:p>
             <a:fld id="{2F3BB9F6-A408-4EB0-9B33-6B405B8570CD}" type="datetimeFigureOut">
               <a:rPr lang="ru-RU" smtClean="0"/>
-              <a:t>12.06.2026</a:t>
+              <a:t>16.06.2026</a:t>
             </a:fld>
             <a:endParaRPr lang="ru-RU"/>
           </a:p>
@@ -9045,7 +9045,7 @@
           <a:p>
             <a:fld id="{2F3BB9F6-A408-4EB0-9B33-6B405B8570CD}" type="datetimeFigureOut">
               <a:rPr lang="ru-RU" smtClean="0"/>
-              <a:t>12.06.2026</a:t>
+              <a:t>16.06.2026</a:t>
             </a:fld>
             <a:endParaRPr lang="ru-RU"/>
           </a:p>
@@ -9333,7 +9333,7 @@
           <a:p>
             <a:fld id="{2F3BB9F6-A408-4EB0-9B33-6B405B8570CD}" type="datetimeFigureOut">
               <a:rPr lang="ru-RU" smtClean="0"/>
-              <a:t>12.06.2026</a:t>
+              <a:t>16.06.2026</a:t>
             </a:fld>
             <a:endParaRPr lang="ru-RU"/>
           </a:p>
@@ -9574,7 +9574,7 @@
           <a:p>
             <a:fld id="{2F3BB9F6-A408-4EB0-9B33-6B405B8570CD}" type="datetimeFigureOut">
               <a:rPr lang="ru-RU" smtClean="0"/>
-              <a:t>12.06.2026</a:t>
+              <a:t>16.06.2026</a:t>
             </a:fld>
             <a:endParaRPr lang="ru-RU"/>
           </a:p>
@@ -10664,115 +10664,6 @@
           <p:cNvPr id="2" name="Заголовок 1">
             <a:extLst>
               <a:ext uri="{FF2B5EF4-FFF2-40B4-BE49-F238E27FC236}">
-                <a16:creationId xmlns:a16="http://schemas.microsoft.com/office/drawing/2014/main" id="{94AB1114-2E3C-4ABF-89D4-C103C0381824}"/>
-              </a:ext>
-            </a:extLst>
-          </p:cNvPr>
-          <p:cNvSpPr>
-            <a:spLocks noGrp="1"/>
-          </p:cNvSpPr>
-          <p:nvPr>
-            <p:ph type="title"/>
-          </p:nvPr>
-        </p:nvSpPr>
-        <p:spPr>
-          <a:xfrm rot="16200000">
-            <a:off x="-410762" y="2953213"/>
-            <a:ext cx="6962777" cy="1056351"/>
-          </a:xfrm>
-        </p:spPr>
-        <p:txBody>
-          <a:bodyPr>
-            <a:noAutofit/>
-          </a:bodyPr>
-          <a:lstStyle/>
-          <a:p>
-            <a:pPr algn="ctr"/>
-            <a:r>
-              <a:rPr lang="ru-RU" sz="3600" b="1" dirty="0">
-                <a:solidFill>
-                  <a:schemeClr val="accent2">
-                    <a:lumMod val="50000"/>
-                  </a:schemeClr>
-                </a:solidFill>
-              </a:rPr>
-              <a:t>ДИАГРАММА ПОСЛЕДОВАТЕЛЬНОСТИ</a:t>
-            </a:r>
-          </a:p>
-        </p:txBody>
-      </p:sp>
-      <p:pic>
-        <p:nvPicPr>
-          <p:cNvPr id="4" name="Рисунок 3">
-            <a:extLst>
-              <a:ext uri="{FF2B5EF4-FFF2-40B4-BE49-F238E27FC236}">
-                <a16:creationId xmlns:a16="http://schemas.microsoft.com/office/drawing/2014/main" id="{CD8BB43A-4B0D-41CE-996A-2DA2012FA0A1}"/>
-              </a:ext>
-            </a:extLst>
-          </p:cNvPr>
-          <p:cNvPicPr/>
-          <p:nvPr/>
-        </p:nvPicPr>
-        <p:blipFill>
-          <a:blip r:embed="rId2">
-            <a:extLst>
-              <a:ext uri="{28A0092B-C50C-407E-A947-70E740481C1C}">
-                <a14:useLocalDpi xmlns:a14="http://schemas.microsoft.com/office/drawing/2010/main" val="0"/>
-              </a:ext>
-              <a:ext uri="{96DAC541-7B7A-43D3-8B79-37D633B846F1}">
-                <asvg:svgBlip xmlns:asvg="http://schemas.microsoft.com/office/drawing/2016/SVG/main" r:embed="rId3"/>
-              </a:ext>
-            </a:extLst>
-          </a:blip>
-          <a:stretch>
-            <a:fillRect/>
-          </a:stretch>
-        </p:blipFill>
-        <p:spPr>
-          <a:xfrm>
-            <a:off x="3598803" y="0"/>
-            <a:ext cx="6074569" cy="6858000"/>
-          </a:xfrm>
-          <a:prstGeom prst="rect">
-            <a:avLst/>
-          </a:prstGeom>
-        </p:spPr>
-      </p:pic>
-    </p:spTree>
-    <p:extLst>
-      <p:ext uri="{BB962C8B-B14F-4D97-AF65-F5344CB8AC3E}">
-        <p14:creationId xmlns:p14="http://schemas.microsoft.com/office/powerpoint/2010/main" val="1778410790"/>
-      </p:ext>
-    </p:extLst>
-  </p:cSld>
-  <p:clrMapOvr>
-    <a:masterClrMapping/>
-  </p:clrMapOvr>
-</p:sld>
-</file>
-
-<file path=ppt/slides/slide13.xml><?xml version="1.0" encoding="utf-8"?>
-<p:sld xmlns:a="http://schemas.openxmlformats.org/drawingml/2006/main" xmlns:r="http://schemas.openxmlformats.org/officeDocument/2006/relationships" xmlns:p="http://schemas.openxmlformats.org/presentationml/2006/main">
-  <p:cSld>
-    <p:spTree>
-      <p:nvGrpSpPr>
-        <p:cNvPr id="1" name=""/>
-        <p:cNvGrpSpPr/>
-        <p:nvPr/>
-      </p:nvGrpSpPr>
-      <p:grpSpPr>
-        <a:xfrm>
-          <a:off x="0" y="0"/>
-          <a:ext cx="0" cy="0"/>
-          <a:chOff x="0" y="0"/>
-          <a:chExt cx="0" cy="0"/>
-        </a:xfrm>
-      </p:grpSpPr>
-      <p:sp>
-        <p:nvSpPr>
-          <p:cNvPr id="2" name="Заголовок 1">
-            <a:extLst>
-              <a:ext uri="{FF2B5EF4-FFF2-40B4-BE49-F238E27FC236}">
                 <a16:creationId xmlns:a16="http://schemas.microsoft.com/office/drawing/2014/main" id="{6D2043EB-560B-44F4-8826-DC4A8C92371B}"/>
               </a:ext>
             </a:extLst>
@@ -10990,6 +10881,182 @@
     <p:extLst>
       <p:ext uri="{BB962C8B-B14F-4D97-AF65-F5344CB8AC3E}">
         <p14:creationId xmlns:p14="http://schemas.microsoft.com/office/powerpoint/2010/main" val="3060085501"/>
+      </p:ext>
+    </p:extLst>
+  </p:cSld>
+  <p:clrMapOvr>
+    <a:masterClrMapping/>
+  </p:clrMapOvr>
+</p:sld>
+</file>
+
+<file path=ppt/slides/slide13.xml><?xml version="1.0" encoding="utf-8"?>
+<p:sld xmlns:a="http://schemas.openxmlformats.org/drawingml/2006/main" xmlns:r="http://schemas.openxmlformats.org/officeDocument/2006/relationships" xmlns:p="http://schemas.openxmlformats.org/presentationml/2006/main">
+  <p:cSld>
+    <p:spTree>
+      <p:nvGrpSpPr>
+        <p:cNvPr id="1" name=""/>
+        <p:cNvGrpSpPr/>
+        <p:nvPr/>
+      </p:nvGrpSpPr>
+      <p:grpSpPr>
+        <a:xfrm>
+          <a:off x="0" y="0"/>
+          <a:ext cx="0" cy="0"/>
+          <a:chOff x="0" y="0"/>
+          <a:chExt cx="0" cy="0"/>
+        </a:xfrm>
+      </p:grpSpPr>
+      <p:sp>
+        <p:nvSpPr>
+          <p:cNvPr id="2" name="Заголовок 1">
+            <a:extLst>
+              <a:ext uri="{FF2B5EF4-FFF2-40B4-BE49-F238E27FC236}">
+                <a16:creationId xmlns:a16="http://schemas.microsoft.com/office/drawing/2014/main" id="{E31A3473-441A-43F4-BFA5-DFED761554D5}"/>
+              </a:ext>
+            </a:extLst>
+          </p:cNvPr>
+          <p:cNvSpPr>
+            <a:spLocks noGrp="1"/>
+          </p:cNvSpPr>
+          <p:nvPr>
+            <p:ph type="ctrTitle"/>
+          </p:nvPr>
+        </p:nvSpPr>
+        <p:spPr>
+          <a:xfrm>
+            <a:off x="1524000" y="568682"/>
+            <a:ext cx="9144000" cy="628799"/>
+          </a:xfrm>
+        </p:spPr>
+        <p:txBody>
+          <a:bodyPr/>
+          <a:lstStyle/>
+          <a:p>
+            <a:r>
+              <a:rPr lang="ru-RU" sz="3600" b="1" dirty="0">
+                <a:solidFill>
+                  <a:schemeClr val="accent2">
+                    <a:lumMod val="50000"/>
+                  </a:schemeClr>
+                </a:solidFill>
+              </a:rPr>
+              <a:t>ЗАКЛЮЧЕНИЕ</a:t>
+            </a:r>
+          </a:p>
+        </p:txBody>
+      </p:sp>
+      <p:sp>
+        <p:nvSpPr>
+          <p:cNvPr id="3" name="Подзаголовок 2">
+            <a:extLst>
+              <a:ext uri="{FF2B5EF4-FFF2-40B4-BE49-F238E27FC236}">
+                <a16:creationId xmlns:a16="http://schemas.microsoft.com/office/drawing/2014/main" id="{B03BC543-A949-47D2-81C4-FB3B7EDAA7BE}"/>
+              </a:ext>
+            </a:extLst>
+          </p:cNvPr>
+          <p:cNvSpPr>
+            <a:spLocks noGrp="1"/>
+          </p:cNvSpPr>
+          <p:nvPr>
+            <p:ph type="subTitle" idx="1"/>
+          </p:nvPr>
+        </p:nvSpPr>
+        <p:spPr>
+          <a:xfrm>
+            <a:off x="896645" y="1562470"/>
+            <a:ext cx="10422384" cy="4726847"/>
+          </a:xfrm>
+        </p:spPr>
+        <p:txBody>
+          <a:bodyPr>
+            <a:normAutofit/>
+          </a:bodyPr>
+          <a:lstStyle/>
+          <a:p>
+            <a:pPr algn="l"/>
+            <a:r>
+              <a:rPr lang="ru-RU" sz="2000" dirty="0">
+                <a:latin typeface="Candara" panose="020E0502030303020204" pitchFamily="34" charset="0"/>
+              </a:rPr>
+              <a:t>В рамках ВКР была разработана информационная система витрины качества металла, обеспечивающая актуальную информацию о ходе технологических процессов для партий металла и качестве выпускаемой продукции.</a:t>
+            </a:r>
+          </a:p>
+          <a:p>
+            <a:pPr algn="l"/>
+            <a:endParaRPr lang="ru-RU" sz="2000" dirty="0">
+              <a:latin typeface="Candara" panose="020E0502030303020204" pitchFamily="34" charset="0"/>
+            </a:endParaRPr>
+          </a:p>
+          <a:p>
+            <a:pPr algn="l"/>
+            <a:r>
+              <a:rPr lang="ru-RU" sz="2000" dirty="0">
+                <a:latin typeface="Candara" panose="020E0502030303020204" pitchFamily="34" charset="0"/>
+              </a:rPr>
+              <a:t>Были достигнуты следующие результаты:</a:t>
+            </a:r>
+          </a:p>
+          <a:p>
+            <a:pPr marL="342900" indent="-342900" algn="l">
+              <a:buFont typeface="Arial" panose="020B0604020202020204" pitchFamily="34" charset="0"/>
+              <a:buChar char="•"/>
+            </a:pPr>
+            <a:r>
+              <a:rPr lang="ru-RU" sz="2000" dirty="0">
+                <a:latin typeface="Candara" panose="020E0502030303020204" pitchFamily="34" charset="0"/>
+              </a:rPr>
+              <a:t>Произведен анализ предметной области;</a:t>
+            </a:r>
+          </a:p>
+          <a:p>
+            <a:pPr marL="342900" indent="-342900" algn="l">
+              <a:buFont typeface="Arial" panose="020B0604020202020204" pitchFamily="34" charset="0"/>
+              <a:buChar char="•"/>
+            </a:pPr>
+            <a:r>
+              <a:rPr lang="ru-RU" sz="2000" dirty="0">
+                <a:latin typeface="Candara" panose="020E0502030303020204" pitchFamily="34" charset="0"/>
+              </a:rPr>
+              <a:t>Осуществлен сравнительный анализ существующих аналогов;</a:t>
+            </a:r>
+          </a:p>
+          <a:p>
+            <a:pPr marL="342900" indent="-342900" algn="l">
+              <a:buFont typeface="Arial" panose="020B0604020202020204" pitchFamily="34" charset="0"/>
+              <a:buChar char="•"/>
+            </a:pPr>
+            <a:r>
+              <a:rPr lang="ru-RU" sz="2000" dirty="0">
+                <a:latin typeface="Candara" panose="020E0502030303020204" pitchFamily="34" charset="0"/>
+              </a:rPr>
+              <a:t>Выбраны технологии разработки;</a:t>
+            </a:r>
+          </a:p>
+          <a:p>
+            <a:pPr marL="342900" indent="-342900" algn="l">
+              <a:buFont typeface="Arial" panose="020B0604020202020204" pitchFamily="34" charset="0"/>
+              <a:buChar char="•"/>
+            </a:pPr>
+            <a:r>
+              <a:rPr lang="ru-RU" sz="2000" dirty="0">
+                <a:latin typeface="Candara" panose="020E0502030303020204" pitchFamily="34" charset="0"/>
+              </a:rPr>
+              <a:t>Спроектировано и реализовано ПО.</a:t>
+            </a:r>
+          </a:p>
+          <a:p>
+            <a:pPr algn="l"/>
+            <a:endParaRPr lang="ru-RU" sz="2000" dirty="0">
+              <a:latin typeface="Candara" panose="020E0502030303020204" pitchFamily="34" charset="0"/>
+            </a:endParaRPr>
+          </a:p>
+        </p:txBody>
+      </p:sp>
+    </p:spTree>
+    <p:extLst>
+      <p:ext uri="{BB962C8B-B14F-4D97-AF65-F5344CB8AC3E}">
+        <p14:creationId xmlns:p14="http://schemas.microsoft.com/office/powerpoint/2010/main" val="848228313"/>
       </p:ext>
     </p:extLst>
   </p:cSld>

--- a/Документы/Защита_Парамонова_АС.pptx
+++ b/Документы/Защита_Парамонова_АС.pptx
@@ -6777,6 +6777,90 @@
 </p:notes>
 </file>
 
+<file path=ppt/notesSlides/notesSlide2.xml><?xml version="1.0" encoding="utf-8"?>
+<p:notes xmlns:a="http://schemas.openxmlformats.org/drawingml/2006/main" xmlns:r="http://schemas.openxmlformats.org/officeDocument/2006/relationships" xmlns:p="http://schemas.openxmlformats.org/presentationml/2006/main">
+  <p:cSld>
+    <p:spTree>
+      <p:nvGrpSpPr>
+        <p:cNvPr id="1" name=""/>
+        <p:cNvGrpSpPr/>
+        <p:nvPr/>
+      </p:nvGrpSpPr>
+      <p:grpSpPr>
+        <a:xfrm>
+          <a:off x="0" y="0"/>
+          <a:ext cx="0" cy="0"/>
+          <a:chOff x="0" y="0"/>
+          <a:chExt cx="0" cy="0"/>
+        </a:xfrm>
+      </p:grpSpPr>
+      <p:sp>
+        <p:nvSpPr>
+          <p:cNvPr id="2" name="Образ слайда 1"/>
+          <p:cNvSpPr>
+            <a:spLocks noGrp="1" noRot="1" noChangeAspect="1"/>
+          </p:cNvSpPr>
+          <p:nvPr>
+            <p:ph type="sldImg"/>
+          </p:nvPr>
+        </p:nvSpPr>
+        <p:spPr/>
+      </p:sp>
+      <p:sp>
+        <p:nvSpPr>
+          <p:cNvPr id="3" name="Заметки 2"/>
+          <p:cNvSpPr>
+            <a:spLocks noGrp="1"/>
+          </p:cNvSpPr>
+          <p:nvPr>
+            <p:ph type="body" idx="1"/>
+          </p:nvPr>
+        </p:nvSpPr>
+        <p:spPr/>
+        <p:txBody>
+          <a:bodyPr/>
+          <a:lstStyle/>
+          <a:p>
+            <a:endParaRPr lang="ru-RU" dirty="0"/>
+          </a:p>
+        </p:txBody>
+      </p:sp>
+      <p:sp>
+        <p:nvSpPr>
+          <p:cNvPr id="4" name="Номер слайда 3"/>
+          <p:cNvSpPr>
+            <a:spLocks noGrp="1"/>
+          </p:cNvSpPr>
+          <p:nvPr>
+            <p:ph type="sldNum" sz="quarter" idx="5"/>
+          </p:nvPr>
+        </p:nvSpPr>
+        <p:spPr/>
+        <p:txBody>
+          <a:bodyPr/>
+          <a:lstStyle/>
+          <a:p>
+            <a:fld id="{7772016F-07DD-450A-84F7-F54B5EEAA4A9}" type="slidenum">
+              <a:rPr lang="ru-RU" smtClean="0"/>
+              <a:t>13</a:t>
+            </a:fld>
+            <a:endParaRPr lang="ru-RU"/>
+          </a:p>
+        </p:txBody>
+      </p:sp>
+    </p:spTree>
+    <p:extLst>
+      <p:ext uri="{BB962C8B-B14F-4D97-AF65-F5344CB8AC3E}">
+        <p14:creationId xmlns:p14="http://schemas.microsoft.com/office/powerpoint/2010/main" val="1593263142"/>
+      </p:ext>
+    </p:extLst>
+  </p:cSld>
+  <p:clrMapOvr>
+    <a:masterClrMapping/>
+  </p:clrMapOvr>
+</p:notes>
+</file>
+
 <file path=ppt/slideLayouts/slideLayout1.xml><?xml version="1.0" encoding="utf-8"?>
 <p:sldLayout xmlns:a="http://schemas.openxmlformats.org/drawingml/2006/main" xmlns:r="http://schemas.openxmlformats.org/officeDocument/2006/relationships" xmlns:p="http://schemas.openxmlformats.org/presentationml/2006/main" type="title" preserve="1">
   <p:cSld name="Титульный слайд">
